--- a/diploma_presentation.pptx
+++ b/diploma_presentation.pptx
@@ -16,6 +16,7 @@
     <p:sldId id="264" r:id="rId10"/>
     <p:sldId id="265" r:id="rId11"/>
     <p:sldId id="266" r:id="rId12"/>
+    <p:sldId id="269" r:id="rId20"/>
     <p:sldId id="267" r:id="rId13"/>
     <p:sldId id="268" r:id="rId14"/>
   </p:sldIdLst>
@@ -2616,7 +2617,7 @@
                 <a:ea typeface="Cambria" pitchFamily="34" charset="-122"/>
                 <a:cs typeface="Cambria" pitchFamily="34" charset="-120"/>
               </a:rPr>
-              <a:t>11.94 сек</a:t>
+              <a:t>34,7 сек</a:t>
             </a:r>
             <a:endParaRPr lang="en-US" sz="2600" dirty="0"/>
           </a:p>
@@ -2794,7 +2795,7 @@
                 <a:ea typeface="Calibri" pitchFamily="34" charset="-122"/>
                 <a:cs typeface="Calibri" pitchFamily="34" charset="-120"/>
               </a:rPr>
-              <a:t>По ходу прогона найден и исправлен баг в UI-тестах: ожидание "networkidle" не срабатывало из-за фоновых запросов сайта — заменено на явное ожидание нужного селектора/URL. После фикса все 13 тестов проходят стабильно.</a:t>
+              <a:t>По ходу прогонов найдены и исправлены ошибки в самих UI-тестах: ожидание networkidle не наступало, карточки товаров находились до выполнения поиска, список подсказок перехватывал клик. Теперь тесты ждут нужный адрес и элементы явно.</a:t>
             </a:r>
             <a:endParaRPr lang="en-US" sz="1300" dirty="0"/>
           </a:p>
@@ -2904,7 +2905,7 @@
                 <a:ea typeface="Cambria" pitchFamily="34" charset="-122"/>
                 <a:cs typeface="Cambria" pitchFamily="34" charset="-120"/>
               </a:rPr>
-              <a:t>Найденный дефект</a:t>
+              <a:t>Найденные дефекты · BR-001</a:t>
             </a:r>
             <a:endParaRPr lang="en-US" sz="3000" dirty="0"/>
           </a:p>
@@ -3394,7 +3395,7 @@
                 <a:ea typeface="Calibri" pitchFamily="34" charset="-122"/>
                 <a:cs typeface="Calibri" pitchFamily="34" charset="-120"/>
               </a:rPr>
-              <a:t>Low (Minor) / Low — визуально читаемо, но не проходит формальный критерий доступности</a:t>
+              <a:t>Minor / Low — текст читаем, но не проходит критерий доступности WCAG AA</a:t>
             </a:r>
             <a:endParaRPr lang="en-US" sz="1300" dirty="0"/>
           </a:p>
@@ -3604,7 +3605,7 @@
                 <a:ea typeface="Calibri" pitchFamily="34" charset="-122"/>
                 <a:cs typeface="Calibri" pitchFamily="34" charset="-120"/>
               </a:rPr>
-              <a:t>Все ключевые функции тестируемых объектов работают корректно. Автоматизация стабильна и воспроизводима — 13/13 тестов проходят на чистом окружении без авторизации и переменных окружения.</a:t>
+              <a:t>Общее качество приложения оценивается как удовлетворительное. Ключевые функции — поиск и карточка товара — работают корректно, API соответствует ожиданиям во всех 8 проверках, автотесты проходят 13 из 13. Главная проблема — сдвиги макета при загрузке (BR-002), они напрямую мешают пользователю. Контраст бейджей скидки (BR-001) — дефект доступности.</a:t>
             </a:r>
             <a:endParaRPr lang="en-US" sz="1500" dirty="0"/>
           </a:p>
@@ -3763,7 +3764,7 @@
                 <a:ea typeface="Calibri" pitchFamily="34" charset="-122"/>
                 <a:cs typeface="Calibri" pitchFamily="34" charset="-120"/>
               </a:rPr>
-              <a:t>Увеличить контраст текста бейджей скидки до соответствия WCAG AA (BR-001)</a:t>
+              <a:t>Увеличить контраст текста бейджей скидки до уровня WCAG 2.1 AA (BR-001)</a:t>
             </a:r>
             <a:endParaRPr lang="en-US" sz="1250" dirty="0"/>
           </a:p>
@@ -3883,7 +3884,7 @@
                 <a:ea typeface="Calibri" pitchFamily="34" charset="-122"/>
                 <a:cs typeface="Calibri" pitchFamily="34" charset="-120"/>
               </a:rPr>
-              <a:t>Прогнать нефункциональный чек-лист вручную в Firefox и Edge перед релизом</a:t>
+              <a:t>Устранить сдвиги макета: резервировать место под баннеры и изображения, задавать размеры медиа (BR-002)</a:t>
             </a:r>
             <a:endParaRPr lang="en-US" sz="1250" dirty="0"/>
           </a:p>
@@ -4003,7 +4004,7 @@
                 <a:ea typeface="Calibri" pitchFamily="34" charset="-122"/>
                 <a:cs typeface="Calibri" pitchFamily="34" charset="-120"/>
               </a:rPr>
-              <a:t>Перенести тест-кейсы в TestIT (team-m2rw.testit.software)</a:t>
+              <a:t>Добавить в регрессию проверки доступности и Core Web Vitals, чтобы отслеживать BR-001 и BR-002 после исправления</a:t>
             </a:r>
             <a:endParaRPr lang="en-US" sz="1250" dirty="0"/>
           </a:p>
@@ -4042,7 +4043,7 @@
                 <a:ea typeface="Calibri" pitchFamily="34" charset="-122"/>
                 <a:cs typeface="Calibri" pitchFamily="34" charset="-120"/>
               </a:rPr>
-              <a:t>12</a:t>
+              <a:t>13</a:t>
             </a:r>
             <a:endParaRPr lang="en-US" sz="1000" dirty="0"/>
           </a:p>
@@ -4291,7 +4292,7 @@
                 <a:ea typeface="Calibri" pitchFamily="34" charset="-122"/>
                 <a:cs typeface="Calibri" pitchFamily="34" charset="-120"/>
               </a:rPr>
-              <a:t>Тест-план и тест-кейсы:</a:t>
+              <a:t>Итоговый отчёт (Yonote):</a:t>
             </a:r>
             <a:endParaRPr lang="en-US" sz="1300" dirty="0"/>
           </a:p>
@@ -4330,7 +4331,7 @@
                 <a:ea typeface="Calibri" pitchFamily="34" charset="-122"/>
                 <a:cs typeface="Calibri" pitchFamily="34" charset="-120"/>
               </a:rPr>
-              <a:t>georgi1412qa.yonote.ru — коллекция «СеливановГера_QA.Skypro»</a:t>
+              <a:t>georgi1412qa.yonote.ru/share/5222c94a-8b37-4324-822a-e8b78ffc8325</a:t>
             </a:r>
             <a:endParaRPr lang="en-US" sz="1300" dirty="0"/>
           </a:p>
@@ -4372,6 +4373,599 @@
               <a:t>Селиванов Георгий · Sky.Pro</a:t>
             </a:r>
             <a:endParaRPr lang="en-US" sz="1200" dirty="0"/>
+          </a:p>
+        </p:txBody>
+      </p:sp>
+    </p:spTree>
+  </p:cSld>
+  <p:clrMapOvr>
+    <a:masterClrMapping/>
+  </p:clrMapOvr>
+</p:sld>
+</file>
+
+<file path=ppt/slides/slide14.xml><?xml version="1.0" encoding="utf-8"?>
+<p:sld xmlns:a="http://schemas.openxmlformats.org/drawingml/2006/main" xmlns:p="http://schemas.openxmlformats.org/presentationml/2006/main" xmlns:r="http://schemas.openxmlformats.org/officeDocument/2006/relationships">
+  <p:cSld>
+    <p:bg>
+      <p:bgPr>
+        <a:solidFill>
+          <a:srgbClr val="FFFFFF"/>
+        </a:solidFill>
+      </p:bgPr>
+    </p:bg>
+    <p:spTree>
+      <p:nvGrpSpPr>
+        <p:cNvPr id="1" name=""/>
+        <p:cNvGrpSpPr/>
+        <p:nvPr/>
+      </p:nvGrpSpPr>
+      <p:grpSpPr/>
+      <p:sp>
+        <p:nvSpPr>
+          <p:cNvPr id="2" name="Text 0"/>
+          <p:cNvSpPr txBox="1"/>
+          <p:nvPr/>
+        </p:nvSpPr>
+        <p:spPr>
+          <a:xfrm>
+            <a:off x="548640" y="411480"/>
+            <a:ext cx="11064240" cy="822960"/>
+          </a:xfrm>
+          <a:prstGeom prst="rect">
+            <a:avLst/>
+          </a:prstGeom>
+          <a:noFill/>
+          <a:ln/>
+        </p:spPr>
+        <p:txBody>
+          <a:bodyPr wrap="square" lIns="0" tIns="0" rIns="0" bIns="0" rtlCol="0" anchor="ctr"/>
+          <a:lstStyle/>
+          <a:p>
+            <a:pPr indent="0" marL="0">
+              <a:buNone/>
+            </a:pPr>
+            <a:r>
+              <a:rPr lang="en-US" sz="3000" b="1" dirty="0">
+                <a:solidFill>
+                  <a:srgbClr val="1B3A3D"/>
+                </a:solidFill>
+                <a:latin typeface="Cambria" pitchFamily="34" charset="0"/>
+                <a:ea typeface="Cambria" pitchFamily="34" charset="-122"/>
+                <a:cs typeface="Cambria" pitchFamily="34" charset="-120"/>
+              </a:rPr>
+              <a:t>Найденные дефекты · BR-002</a:t>
+            </a:r>
+            <a:endParaRPr lang="en-US" sz="3000" dirty="0"/>
+          </a:p>
+        </p:txBody>
+      </p:sp>
+      <p:sp>
+        <p:nvSpPr>
+          <p:cNvPr id="3" name="Shape 1"/>
+          <p:cNvSpPr/>
+          <p:nvPr/>
+        </p:nvSpPr>
+        <p:spPr>
+          <a:xfrm>
+            <a:off x="548640" y="1371600"/>
+            <a:ext cx="11064240" cy="685800"/>
+          </a:xfrm>
+          <a:prstGeom prst="roundRect">
+            <a:avLst>
+              <a:gd name="adj" fmla="val 13333"/>
+            </a:avLst>
+          </a:prstGeom>
+          <a:solidFill>
+            <a:srgbClr val="FBEAEA"/>
+          </a:solidFill>
+          <a:ln/>
+        </p:spPr>
+      </p:sp>
+      <p:sp>
+        <p:nvSpPr>
+          <p:cNvPr id="4" name="Text 2"/>
+          <p:cNvSpPr txBox="1"/>
+          <p:nvPr/>
+        </p:nvSpPr>
+        <p:spPr>
+          <a:xfrm>
+            <a:off x="777240" y="1371600"/>
+            <a:ext cx="1645920" cy="685800"/>
+          </a:xfrm>
+          <a:prstGeom prst="rect">
+            <a:avLst/>
+          </a:prstGeom>
+          <a:noFill/>
+          <a:ln/>
+        </p:spPr>
+        <p:txBody>
+          <a:bodyPr wrap="square" lIns="0" tIns="0" rIns="0" bIns="0" rtlCol="0" anchor="ctr"/>
+          <a:lstStyle/>
+          <a:p>
+            <a:pPr indent="0" marL="0">
+              <a:buNone/>
+            </a:pPr>
+            <a:r>
+              <a:rPr lang="en-US" sz="1800" b="1" dirty="0">
+                <a:solidFill>
+                  <a:srgbClr val="C0392B"/>
+                </a:solidFill>
+                <a:latin typeface="Cambria" pitchFamily="34" charset="0"/>
+                <a:ea typeface="Cambria" pitchFamily="34" charset="-122"/>
+                <a:cs typeface="Cambria" pitchFamily="34" charset="-120"/>
+              </a:rPr>
+              <a:t>BR-002</a:t>
+            </a:r>
+            <a:endParaRPr lang="en-US" sz="1800" dirty="0"/>
+          </a:p>
+        </p:txBody>
+      </p:sp>
+      <p:sp>
+        <p:nvSpPr>
+          <p:cNvPr id="5" name="Text 3"/>
+          <p:cNvSpPr txBox="1"/>
+          <p:nvPr/>
+        </p:nvSpPr>
+        <p:spPr>
+          <a:xfrm>
+            <a:off x="2377440" y="1371600"/>
+            <a:ext cx="9052560" cy="685800"/>
+          </a:xfrm>
+          <a:prstGeom prst="rect">
+            <a:avLst/>
+          </a:prstGeom>
+          <a:noFill/>
+          <a:ln/>
+        </p:spPr>
+        <p:txBody>
+          <a:bodyPr wrap="square" lIns="0" tIns="0" rIns="0" bIns="0" rtlCol="0" anchor="ctr"/>
+          <a:lstStyle/>
+          <a:p>
+            <a:pPr indent="0" marL="0">
+              <a:buNone/>
+            </a:pPr>
+            <a:r>
+              <a:rPr lang="en-US" sz="1500" b="1" dirty="0">
+                <a:solidFill>
+                  <a:srgbClr val="1B3A3D"/>
+                </a:solidFill>
+                <a:latin typeface="Calibri" pitchFamily="34" charset="0"/>
+                <a:ea typeface="Calibri" pitchFamily="34" charset="-122"/>
+                <a:cs typeface="Calibri" pitchFamily="34" charset="-120"/>
+              </a:rPr>
+              <a:t>Сильные сдвиги макета при загрузке главной страницы (CLS 0,7)</a:t>
+            </a:r>
+            <a:endParaRPr lang="en-US" sz="1500" dirty="0"/>
+          </a:p>
+        </p:txBody>
+      </p:sp>
+      <p:sp>
+        <p:nvSpPr>
+          <p:cNvPr id="6" name="Text 4"/>
+          <p:cNvSpPr txBox="1"/>
+          <p:nvPr/>
+        </p:nvSpPr>
+        <p:spPr>
+          <a:xfrm>
+            <a:off x="548640" y="2331720"/>
+            <a:ext cx="2377440" cy="640080"/>
+          </a:xfrm>
+          <a:prstGeom prst="rect">
+            <a:avLst/>
+          </a:prstGeom>
+          <a:noFill/>
+          <a:ln/>
+        </p:spPr>
+        <p:txBody>
+          <a:bodyPr wrap="square" lIns="0" tIns="0" rIns="0" bIns="0" rtlCol="0" anchor="ctr"/>
+          <a:lstStyle/>
+          <a:p>
+            <a:pPr indent="0" marL="0">
+              <a:buNone/>
+            </a:pPr>
+            <a:r>
+              <a:rPr lang="en-US" sz="1300" b="1" dirty="0">
+                <a:solidFill>
+                  <a:srgbClr val="028090"/>
+                </a:solidFill>
+                <a:latin typeface="Calibri" pitchFamily="34" charset="0"/>
+                <a:ea typeface="Calibri" pitchFamily="34" charset="-122"/>
+                <a:cs typeface="Calibri" pitchFamily="34" charset="-120"/>
+              </a:rPr>
+              <a:t>Окружение</a:t>
+            </a:r>
+            <a:endParaRPr lang="en-US" sz="1300" dirty="0"/>
+          </a:p>
+        </p:txBody>
+      </p:sp>
+      <p:sp>
+        <p:nvSpPr>
+          <p:cNvPr id="7" name="Text 5"/>
+          <p:cNvSpPr txBox="1"/>
+          <p:nvPr/>
+        </p:nvSpPr>
+        <p:spPr>
+          <a:xfrm>
+            <a:off x="3017520" y="2331720"/>
+            <a:ext cx="8595360" cy="640080"/>
+          </a:xfrm>
+          <a:prstGeom prst="rect">
+            <a:avLst/>
+          </a:prstGeom>
+          <a:noFill/>
+          <a:ln/>
+        </p:spPr>
+        <p:txBody>
+          <a:bodyPr wrap="square" lIns="0" tIns="0" rIns="0" bIns="0" rtlCol="0" anchor="ctr"/>
+          <a:lstStyle/>
+          <a:p>
+            <a:pPr indent="0" marL="0">
+              <a:buNone/>
+            </a:pPr>
+            <a:r>
+              <a:rPr lang="en-US" sz="1300" dirty="0">
+                <a:solidFill>
+                  <a:srgbClr val="1B3A3D"/>
+                </a:solidFill>
+                <a:latin typeface="Calibri" pitchFamily="34" charset="0"/>
+                <a:ea typeface="Calibri" pitchFamily="34" charset="-122"/>
+                <a:cs typeface="Calibri" pitchFamily="34" charset="-120"/>
+              </a:rPr>
+              <a:t>chitai-gorod.ru, главная страница, компьютеры; PageSpeed Insights — данные пользователей Chrome за 28 дней, 23.09.2026</a:t>
+            </a:r>
+            <a:endParaRPr lang="en-US" sz="1300" dirty="0"/>
+          </a:p>
+        </p:txBody>
+      </p:sp>
+      <p:sp>
+        <p:nvSpPr>
+          <p:cNvPr id="8" name="Text 6"/>
+          <p:cNvSpPr txBox="1"/>
+          <p:nvPr/>
+        </p:nvSpPr>
+        <p:spPr>
+          <a:xfrm>
+            <a:off x="548640" y="3044952"/>
+            <a:ext cx="2377440" cy="640080"/>
+          </a:xfrm>
+          <a:prstGeom prst="rect">
+            <a:avLst/>
+          </a:prstGeom>
+          <a:noFill/>
+          <a:ln/>
+        </p:spPr>
+        <p:txBody>
+          <a:bodyPr wrap="square" lIns="0" tIns="0" rIns="0" bIns="0" rtlCol="0" anchor="ctr"/>
+          <a:lstStyle/>
+          <a:p>
+            <a:pPr indent="0" marL="0">
+              <a:buNone/>
+            </a:pPr>
+            <a:r>
+              <a:rPr lang="en-US" sz="1300" b="1" dirty="0">
+                <a:solidFill>
+                  <a:srgbClr val="028090"/>
+                </a:solidFill>
+                <a:latin typeface="Calibri" pitchFamily="34" charset="0"/>
+                <a:ea typeface="Calibri" pitchFamily="34" charset="-122"/>
+                <a:cs typeface="Calibri" pitchFamily="34" charset="-120"/>
+              </a:rPr>
+              <a:t>Шаги</a:t>
+            </a:r>
+            <a:endParaRPr lang="en-US" sz="1300" dirty="0"/>
+          </a:p>
+        </p:txBody>
+      </p:sp>
+      <p:sp>
+        <p:nvSpPr>
+          <p:cNvPr id="9" name="Text 7"/>
+          <p:cNvSpPr txBox="1"/>
+          <p:nvPr/>
+        </p:nvSpPr>
+        <p:spPr>
+          <a:xfrm>
+            <a:off x="3017520" y="3044952"/>
+            <a:ext cx="8595360" cy="640080"/>
+          </a:xfrm>
+          <a:prstGeom prst="rect">
+            <a:avLst/>
+          </a:prstGeom>
+          <a:noFill/>
+          <a:ln/>
+        </p:spPr>
+        <p:txBody>
+          <a:bodyPr wrap="square" lIns="0" tIns="0" rIns="0" bIns="0" rtlCol="0" anchor="ctr"/>
+          <a:lstStyle/>
+          <a:p>
+            <a:pPr indent="0" marL="0">
+              <a:buNone/>
+            </a:pPr>
+            <a:r>
+              <a:rPr lang="en-US" sz="1300" dirty="0">
+                <a:solidFill>
+                  <a:srgbClr val="1B3A3D"/>
+                </a:solidFill>
+                <a:latin typeface="Calibri" pitchFamily="34" charset="0"/>
+                <a:ea typeface="Calibri" pitchFamily="34" charset="-122"/>
+                <a:cs typeface="Calibri" pitchFamily="34" charset="-120"/>
+              </a:rPr>
+              <a:t>pagespeed.web.dev → ввести https://www.chitai-gorod.ru/ → «Анализировать» → вкладка «Компьютер» → блок фактической производительности</a:t>
+            </a:r>
+            <a:endParaRPr lang="en-US" sz="1300" dirty="0"/>
+          </a:p>
+        </p:txBody>
+      </p:sp>
+      <p:sp>
+        <p:nvSpPr>
+          <p:cNvPr id="10" name="Text 8"/>
+          <p:cNvSpPr txBox="1"/>
+          <p:nvPr/>
+        </p:nvSpPr>
+        <p:spPr>
+          <a:xfrm>
+            <a:off x="548640" y="3758184"/>
+            <a:ext cx="2377440" cy="640080"/>
+          </a:xfrm>
+          <a:prstGeom prst="rect">
+            <a:avLst/>
+          </a:prstGeom>
+          <a:noFill/>
+          <a:ln/>
+        </p:spPr>
+        <p:txBody>
+          <a:bodyPr wrap="square" lIns="0" tIns="0" rIns="0" bIns="0" rtlCol="0" anchor="ctr"/>
+          <a:lstStyle/>
+          <a:p>
+            <a:pPr indent="0" marL="0">
+              <a:buNone/>
+            </a:pPr>
+            <a:r>
+              <a:rPr lang="en-US" sz="1300" b="1" dirty="0">
+                <a:solidFill>
+                  <a:srgbClr val="028090"/>
+                </a:solidFill>
+                <a:latin typeface="Calibri" pitchFamily="34" charset="0"/>
+                <a:ea typeface="Calibri" pitchFamily="34" charset="-122"/>
+                <a:cs typeface="Calibri" pitchFamily="34" charset="-120"/>
+              </a:rPr>
+              <a:t>Ожидаемо</a:t>
+            </a:r>
+            <a:endParaRPr lang="en-US" sz="1300" dirty="0"/>
+          </a:p>
+        </p:txBody>
+      </p:sp>
+      <p:sp>
+        <p:nvSpPr>
+          <p:cNvPr id="11" name="Text 9"/>
+          <p:cNvSpPr txBox="1"/>
+          <p:nvPr/>
+        </p:nvSpPr>
+        <p:spPr>
+          <a:xfrm>
+            <a:off x="3017520" y="3758184"/>
+            <a:ext cx="8595360" cy="640080"/>
+          </a:xfrm>
+          <a:prstGeom prst="rect">
+            <a:avLst/>
+          </a:prstGeom>
+          <a:noFill/>
+          <a:ln/>
+        </p:spPr>
+        <p:txBody>
+          <a:bodyPr wrap="square" lIns="0" tIns="0" rIns="0" bIns="0" rtlCol="0" anchor="ctr"/>
+          <a:lstStyle/>
+          <a:p>
+            <a:pPr indent="0" marL="0">
+              <a:buNone/>
+            </a:pPr>
+            <a:r>
+              <a:rPr lang="en-US" sz="1300" dirty="0">
+                <a:solidFill>
+                  <a:srgbClr val="1B3A3D"/>
+                </a:solidFill>
+                <a:latin typeface="Calibri" pitchFamily="34" charset="0"/>
+                <a:ea typeface="Calibri" pitchFamily="34" charset="-122"/>
+                <a:cs typeface="Calibri" pitchFamily="34" charset="-120"/>
+              </a:rPr>
+              <a:t>Cumulative Layout Shift ≤ 0,1 (диапазон «хорошо»)</a:t>
+            </a:r>
+            <a:endParaRPr lang="en-US" sz="1300" dirty="0"/>
+          </a:p>
+        </p:txBody>
+      </p:sp>
+      <p:sp>
+        <p:nvSpPr>
+          <p:cNvPr id="12" name="Text 10"/>
+          <p:cNvSpPr txBox="1"/>
+          <p:nvPr/>
+        </p:nvSpPr>
+        <p:spPr>
+          <a:xfrm>
+            <a:off x="548640" y="4471416"/>
+            <a:ext cx="2377440" cy="640080"/>
+          </a:xfrm>
+          <a:prstGeom prst="rect">
+            <a:avLst/>
+          </a:prstGeom>
+          <a:noFill/>
+          <a:ln/>
+        </p:spPr>
+        <p:txBody>
+          <a:bodyPr wrap="square" lIns="0" tIns="0" rIns="0" bIns="0" rtlCol="0" anchor="ctr"/>
+          <a:lstStyle/>
+          <a:p>
+            <a:pPr indent="0" marL="0">
+              <a:buNone/>
+            </a:pPr>
+            <a:r>
+              <a:rPr lang="en-US" sz="1300" b="1" dirty="0">
+                <a:solidFill>
+                  <a:srgbClr val="028090"/>
+                </a:solidFill>
+                <a:latin typeface="Calibri" pitchFamily="34" charset="0"/>
+                <a:ea typeface="Calibri" pitchFamily="34" charset="-122"/>
+                <a:cs typeface="Calibri" pitchFamily="34" charset="-120"/>
+              </a:rPr>
+              <a:t>Фактически</a:t>
+            </a:r>
+            <a:endParaRPr lang="en-US" sz="1300" dirty="0"/>
+          </a:p>
+        </p:txBody>
+      </p:sp>
+      <p:sp>
+        <p:nvSpPr>
+          <p:cNvPr id="13" name="Text 11"/>
+          <p:cNvSpPr txBox="1"/>
+          <p:nvPr/>
+        </p:nvSpPr>
+        <p:spPr>
+          <a:xfrm>
+            <a:off x="3017520" y="4471416"/>
+            <a:ext cx="8595360" cy="640080"/>
+          </a:xfrm>
+          <a:prstGeom prst="rect">
+            <a:avLst/>
+          </a:prstGeom>
+          <a:noFill/>
+          <a:ln/>
+        </p:spPr>
+        <p:txBody>
+          <a:bodyPr wrap="square" lIns="0" tIns="0" rIns="0" bIns="0" rtlCol="0" anchor="ctr"/>
+          <a:lstStyle/>
+          <a:p>
+            <a:pPr indent="0" marL="0">
+              <a:buNone/>
+            </a:pPr>
+            <a:r>
+              <a:rPr lang="en-US" sz="1300" dirty="0">
+                <a:solidFill>
+                  <a:srgbClr val="1B3A3D"/>
+                </a:solidFill>
+                <a:latin typeface="Calibri" pitchFamily="34" charset="0"/>
+                <a:ea typeface="Calibri" pitchFamily="34" charset="-122"/>
+                <a:cs typeface="Calibri" pitchFamily="34" charset="-120"/>
+              </a:rPr>
+              <a:t>CLS = 0,7 (диапазон «плохо», порог &gt; 0,25); оценка основных интернет-показателей — «проверка не пройдена»</a:t>
+            </a:r>
+            <a:endParaRPr lang="en-US" sz="1300" dirty="0"/>
+          </a:p>
+        </p:txBody>
+      </p:sp>
+      <p:sp>
+        <p:nvSpPr>
+          <p:cNvPr id="14" name="Text 12"/>
+          <p:cNvSpPr txBox="1"/>
+          <p:nvPr/>
+        </p:nvSpPr>
+        <p:spPr>
+          <a:xfrm>
+            <a:off x="548640" y="5184648"/>
+            <a:ext cx="2377440" cy="640080"/>
+          </a:xfrm>
+          <a:prstGeom prst="rect">
+            <a:avLst/>
+          </a:prstGeom>
+          <a:noFill/>
+          <a:ln/>
+        </p:spPr>
+        <p:txBody>
+          <a:bodyPr wrap="square" lIns="0" tIns="0" rIns="0" bIns="0" rtlCol="0" anchor="ctr"/>
+          <a:lstStyle/>
+          <a:p>
+            <a:pPr indent="0" marL="0">
+              <a:buNone/>
+            </a:pPr>
+            <a:r>
+              <a:rPr lang="en-US" sz="1300" b="1" dirty="0">
+                <a:solidFill>
+                  <a:srgbClr val="028090"/>
+                </a:solidFill>
+                <a:latin typeface="Calibri" pitchFamily="34" charset="0"/>
+                <a:ea typeface="Calibri" pitchFamily="34" charset="-122"/>
+                <a:cs typeface="Calibri" pitchFamily="34" charset="-120"/>
+              </a:rPr>
+              <a:t>Серьёзность / приоритет</a:t>
+            </a:r>
+            <a:endParaRPr lang="en-US" sz="1300" dirty="0"/>
+          </a:p>
+        </p:txBody>
+      </p:sp>
+      <p:sp>
+        <p:nvSpPr>
+          <p:cNvPr id="15" name="Text 13"/>
+          <p:cNvSpPr txBox="1"/>
+          <p:nvPr/>
+        </p:nvSpPr>
+        <p:spPr>
+          <a:xfrm>
+            <a:off x="3017520" y="5184648"/>
+            <a:ext cx="8595360" cy="640080"/>
+          </a:xfrm>
+          <a:prstGeom prst="rect">
+            <a:avLst/>
+          </a:prstGeom>
+          <a:noFill/>
+          <a:ln/>
+        </p:spPr>
+        <p:txBody>
+          <a:bodyPr wrap="square" lIns="0" tIns="0" rIns="0" bIns="0" rtlCol="0" anchor="ctr"/>
+          <a:lstStyle/>
+          <a:p>
+            <a:pPr indent="0" marL="0">
+              <a:buNone/>
+            </a:pPr>
+            <a:r>
+              <a:rPr lang="en-US" sz="1300" dirty="0">
+                <a:solidFill>
+                  <a:srgbClr val="1B3A3D"/>
+                </a:solidFill>
+                <a:latin typeface="Calibri" pitchFamily="34" charset="0"/>
+                <a:ea typeface="Calibri" pitchFamily="34" charset="-122"/>
+                <a:cs typeface="Calibri" pitchFamily="34" charset="-120"/>
+              </a:rPr>
+              <a:t>Major / Medium — элементы смещаются во время загрузки, растёт риск промахнуться при клике</a:t>
+            </a:r>
+            <a:endParaRPr lang="en-US" sz="1300" dirty="0"/>
+          </a:p>
+        </p:txBody>
+      </p:sp>
+      <p:sp>
+        <p:nvSpPr>
+          <p:cNvPr id="16" name="Text 14"/>
+          <p:cNvSpPr txBox="1"/>
+          <p:nvPr/>
+        </p:nvSpPr>
+        <p:spPr>
+          <a:xfrm>
+            <a:off x="11521440" y="6446520"/>
+            <a:ext cx="457200" cy="320040"/>
+          </a:xfrm>
+          <a:prstGeom prst="rect">
+            <a:avLst/>
+          </a:prstGeom>
+          <a:noFill/>
+          <a:ln/>
+        </p:spPr>
+        <p:txBody>
+          <a:bodyPr wrap="square" lIns="0" tIns="0" rIns="0" bIns="0" rtlCol="0" anchor="ctr"/>
+          <a:lstStyle/>
+          <a:p>
+            <a:pPr algn="r" indent="0" marL="0">
+              <a:buNone/>
+            </a:pPr>
+            <a:r>
+              <a:rPr lang="en-US" sz="1000" dirty="0">
+                <a:solidFill>
+                  <a:srgbClr val="5C7A7D"/>
+                </a:solidFill>
+                <a:latin typeface="Calibri" pitchFamily="34" charset="0"/>
+                <a:ea typeface="Calibri" pitchFamily="34" charset="-122"/>
+                <a:cs typeface="Calibri" pitchFamily="34" charset="-120"/>
+              </a:rPr>
+              <a:t>12</a:t>
+            </a:r>
+            <a:endParaRPr lang="en-US" sz="1000" dirty="0"/>
           </a:p>
         </p:txBody>
       </p:sp>
@@ -5437,7 +6031,7 @@
                 <a:ea typeface="Calibri" pitchFamily="34" charset="-122"/>
                 <a:cs typeface="Calibri" pitchFamily="34" charset="-120"/>
               </a:rPr>
-              <a:t>Проверялись: поиск по названию, переход в карточку товара, граничные случаи (пустой запрос, запрос без результатов)</a:t>
+              <a:t>Проверялись: поиск по названию и по автору, переход в карточку товара, отображение названия книги</a:t>
             </a:r>
             <a:endParaRPr lang="en-US" sz="1400" dirty="0"/>
           </a:p>
@@ -5688,7 +6282,7 @@
                 <a:ea typeface="Calibri" pitchFamily="34" charset="-122"/>
                 <a:cs typeface="Calibri" pitchFamily="34" charset="-120"/>
               </a:rPr>
-              <a:t>Проверялись: CRUD над задачами (GET/POST/PATCH/DELETE) + негативные сценарии</a:t>
+              <a:t>Проверялись: CRUD над задачами (GET/POST/PATCH/DELETE) + 3 негативных сценария</a:t>
             </a:r>
             <a:endParaRPr lang="en-US" sz="1400" dirty="0"/>
           </a:p>
@@ -6989,7 +7583,7 @@
                 <a:ea typeface="Calibri" pitchFamily="34" charset="-122"/>
                 <a:cs typeface="Calibri" pitchFamily="34" charset="-120"/>
               </a:rPr>
-              <a:t>5 функциональных UI-кейсов, 8 API-кейсов (5 + 3 негативных), 10 пунктов нефункционального чек-листа</a:t>
+              <a:t>5 позитивных функциональных UI-кейсов, 8 API-кейсов (5 позитивных + 3 негативных), 12 пунктов нефункционального чек-листа — выгрузка в XLS</a:t>
             </a:r>
             <a:endParaRPr lang="en-US" sz="1250" dirty="0"/>
           </a:p>
@@ -7153,7 +7747,7 @@
                 <a:ea typeface="Calibri" pitchFamily="34" charset="-122"/>
                 <a:cs typeface="Calibri" pitchFamily="34" charset="-120"/>
               </a:rPr>
-              <a:t>8 запросов с тестами (Tests-скрипты) под JSONPlaceholder, экспорт в JSON</a:t>
+              <a:t>8 запросов с тест-скриптами (проверка статус-кода, сохранение id), переменные base_url и token, экспорт в JSON</a:t>
             </a:r>
             <a:endParaRPr lang="en-US" sz="1250" dirty="0"/>
           </a:p>
@@ -7547,7 +8141,7 @@
                 <a:ea typeface="Calibri" pitchFamily="34" charset="-122"/>
                 <a:cs typeface="Calibri" pitchFamily="34" charset="-120"/>
               </a:rPr>
-              <a:t>Поиск возвращает результаты по существующему запросу</a:t>
+              <a:t>Поиск книги по названию возвращает результаты</a:t>
             </a:r>
             <a:endParaRPr lang="en-US" sz="1450" dirty="0"/>
           </a:p>
@@ -7667,7 +8261,7 @@
                 <a:ea typeface="Calibri" pitchFamily="34" charset="-122"/>
                 <a:cs typeface="Calibri" pitchFamily="34" charset="-120"/>
               </a:rPr>
-              <a:t>Первый результат поиска отображается видимой ссылкой</a:t>
+              <a:t>Первый товар в результатах поиска отображается на странице</a:t>
             </a:r>
             <a:endParaRPr lang="en-US" sz="1450" dirty="0"/>
           </a:p>
@@ -7787,7 +8381,7 @@
                 <a:ea typeface="Calibri" pitchFamily="34" charset="-122"/>
                 <a:cs typeface="Calibri" pitchFamily="34" charset="-120"/>
               </a:rPr>
-              <a:t>Клик по товару открывает карточку товара</a:t>
+              <a:t>Поиск книги по фамилии автора возвращает результаты</a:t>
             </a:r>
             <a:endParaRPr lang="en-US" sz="1450" dirty="0"/>
           </a:p>
@@ -7907,7 +8501,7 @@
                 <a:ea typeface="Calibri" pitchFamily="34" charset="-122"/>
                 <a:cs typeface="Calibri" pitchFamily="34" charset="-120"/>
               </a:rPr>
-              <a:t>Пустой поисковый запрос не приводит к ошибке</a:t>
+              <a:t>Клик по товару из выдачи открывает карточку товара</a:t>
             </a:r>
             <a:endParaRPr lang="en-US" sz="1450" dirty="0"/>
           </a:p>
@@ -8027,7 +8621,7 @@
                 <a:ea typeface="Calibri" pitchFamily="34" charset="-122"/>
                 <a:cs typeface="Calibri" pitchFamily="34" charset="-120"/>
               </a:rPr>
-              <a:t>Заведомо бессмысленный запрос не вызывает ошибку страницы</a:t>
+              <a:t>Карточка товара отображает название книги</a:t>
             </a:r>
             <a:endParaRPr lang="en-US" sz="1450" dirty="0"/>
           </a:p>
@@ -8066,7 +8660,7 @@
                 <a:ea typeface="Calibri" pitchFamily="34" charset="-122"/>
                 <a:cs typeface="Calibri" pitchFamily="34" charset="-120"/>
               </a:rPr>
-              <a:t>5 из 5 автоматизированы (Playwright, headless Chromium)</a:t>
+              <a:t>Все кейсы позитивные · 5 из 5 автоматизированы (Playwright, headless Chromium)</a:t>
             </a:r>
             <a:endParaRPr lang="en-US" sz="1300" dirty="0"/>
           </a:p>
@@ -8510,7 +9104,7 @@
                 <a:ea typeface="Calibri" pitchFamily="34" charset="-122"/>
                 <a:cs typeface="Calibri" pitchFamily="34" charset="-120"/>
               </a:rPr>
-              <a:t>POST /todos без title — статус 201, но поле title отсутствует в ответе</a:t>
+              <a:t>POST /todos/1 — неподдерживаемый метод, статус 404</a:t>
             </a:r>
             <a:endParaRPr lang="en-US" sz="1400" dirty="0"/>
           </a:p>
@@ -8659,7 +9253,7 @@
                 <a:ea typeface="Calibri" pitchFamily="34" charset="-122"/>
                 <a:cs typeface="Calibri" pitchFamily="34" charset="-120"/>
               </a:rPr>
-              <a:t>10 пунктов · 3 вида проверок: UI/UX, кросс-браузерность, доступность</a:t>
+              <a:t>12 пунктов · 4 вида проверок: UI/UX, кросс-браузерность, доступность, производительность</a:t>
             </a:r>
             <a:endParaRPr lang="en-US" sz="1400" dirty="0"/>
           </a:p>
@@ -8820,7 +9414,7 @@
                 <a:ea typeface="Cambria" pitchFamily="34" charset="-122"/>
                 <a:cs typeface="Cambria" pitchFamily="34" charset="-120"/>
               </a:rPr>
-              <a:t>1</a:t>
+              <a:t>2</a:t>
             </a:r>
             <a:endParaRPr lang="en-US" sz="5400" dirty="0"/>
           </a:p>
@@ -9002,7 +9596,7 @@
                 <a:ea typeface="Calibri" pitchFamily="34" charset="-122"/>
                 <a:cs typeface="Calibri" pitchFamily="34" charset="-120"/>
               </a:rPr>
-              <a:t>Пройдено: элементы без прокрутки, cookie-баннер, плейсхолдер поиска, изображения без разрывов вёрстки, Chrome, Tab-навигация, alt-атрибуты изображений</a:t>
+              <a:t>Пройдено: элементы без прокрутки, cookie-баннер, плейсхолдер поиска, изображения товаров, Chrome, Tab-навигация, alt-атрибуты, LCP</a:t>
             </a:r>
             <a:endParaRPr lang="en-US" sz="1150" dirty="0"/>
           </a:p>
@@ -9023,7 +9617,7 @@
                 <a:ea typeface="Calibri" pitchFamily="34" charset="-122"/>
                 <a:cs typeface="Calibri" pitchFamily="34" charset="-120"/>
               </a:rPr>
-              <a:t>Не пройдено: контраст текста бейджа скидки (WCAG AA) — см. дефект BR-001</a:t>
+              <a:t>Не пройдено: контраст бейджа скидки — BR-001; сдвиги макета, CLS 0,7 — BR-002</a:t>
             </a:r>
             <a:endParaRPr lang="en-US" sz="1150" dirty="0"/>
           </a:p>
@@ -9044,7 +9638,7 @@
                 <a:ea typeface="Calibri" pitchFamily="34" charset="-122"/>
                 <a:cs typeface="Calibri" pitchFamily="34" charset="-120"/>
               </a:rPr>
-              <a:t>Не проверено: рендеринг в Firefox и Edge — вне возможностей доступных инструментов автоматизации</a:t>
+              <a:t>Не проверено: отображение в Яндекс Браузере и Edge — ожидает ручной проверки</a:t>
             </a:r>
             <a:endParaRPr lang="en-US" sz="1150" dirty="0"/>
           </a:p>
@@ -9541,7 +10135,7 @@
                 <a:ea typeface="Calibri" pitchFamily="34" charset="-122"/>
                 <a:cs typeface="Calibri" pitchFamily="34" charset="-120"/>
               </a:rPr>
-              <a:t>Типизация на всех методах (аннотации)</a:t>
+              <a:t>Типизация на всех функциях (аннотации)</a:t>
             </a:r>
             <a:endParaRPr lang="en-US" sz="1300" dirty="0"/>
           </a:p>
@@ -9562,7 +10156,7 @@
                 <a:ea typeface="Calibri" pitchFamily="34" charset="-122"/>
                 <a:cs typeface="Calibri" pitchFamily="34" charset="-120"/>
               </a:rPr>
-              <a:t>Без time.sleep() — только явные и встроенные ожидания Playwright</a:t>
+              <a:t>Без time.sleep() — только явные ожидания Playwright (wait_for_url, expect)</a:t>
             </a:r>
             <a:endParaRPr lang="en-US" sz="1300" dirty="0"/>
           </a:p>
@@ -9604,7 +10198,7 @@
                 <a:ea typeface="Calibri" pitchFamily="34" charset="-122"/>
                 <a:cs typeface="Calibri" pitchFamily="34" charset="-120"/>
               </a:rPr>
-              <a:t>Маркеры pytest: api / ui, PEP8 (flake8, max-line-length 100)</a:t>
+              <a:t>Маркеры pytest: api / ui, PEP8 (flake8, max-line-length 99)</a:t>
             </a:r>
             <a:endParaRPr lang="en-US" sz="1300" dirty="0"/>
           </a:p>
@@ -9743,7 +10337,7 @@
                 <a:ea typeface="Courier New" pitchFamily="34" charset="-122"/>
                 <a:cs typeface="Courier New" pitchFamily="34" charset="-120"/>
               </a:rPr>
-              <a:t>diploma_automation/</a:t>
+              <a:t>skypro-diploma-automation/</a:t>
             </a:r>
             <a:endParaRPr lang="en-US" sz="1250" dirty="0"/>
           </a:p>

--- a/diploma_presentation.pptx
+++ b/diploma_presentation.pptx
@@ -9314,7 +9314,7 @@
                 <a:ea typeface="Cambria" pitchFamily="34" charset="-122"/>
                 <a:cs typeface="Cambria" pitchFamily="34" charset="-120"/>
               </a:rPr>
-              <a:t>8</a:t>
+              <a:t>10</a:t>
             </a:r>
             <a:endParaRPr lang="en-US" sz="5400" dirty="0"/>
           </a:p>
@@ -9514,7 +9514,7 @@
                 <a:ea typeface="Cambria" pitchFamily="34" charset="-122"/>
                 <a:cs typeface="Cambria" pitchFamily="34" charset="-120"/>
               </a:rPr>
-              <a:t>2</a:t>
+              <a:t>0</a:t>
             </a:r>
             <a:endParaRPr lang="en-US" sz="5400" dirty="0"/>
           </a:p>
@@ -9596,7 +9596,7 @@
                 <a:ea typeface="Calibri" pitchFamily="34" charset="-122"/>
                 <a:cs typeface="Calibri" pitchFamily="34" charset="-120"/>
               </a:rPr>
-              <a:t>Пройдено: элементы без прокрутки, cookie-баннер, плейсхолдер поиска, изображения товаров, Chrome, Tab-навигация, alt-атрибуты, LCP</a:t>
+              <a:t>Пройдено: элементы без прокрутки, cookie-баннер, плейсхолдер поиска, изображения товаров, Chrome, Яндекс Браузер, Edge, Tab-навигация, alt-атрибуты, LCP</a:t>
             </a:r>
             <a:endParaRPr lang="en-US" sz="1150" dirty="0"/>
           </a:p>
@@ -9618,27 +9618,6 @@
                 <a:cs typeface="Calibri" pitchFamily="34" charset="-120"/>
               </a:rPr>
               <a:t>Не пройдено: контраст бейджа скидки — BR-001; сдвиги макета, CLS 0,7 — BR-002</a:t>
-            </a:r>
-            <a:endParaRPr lang="en-US" sz="1150" dirty="0"/>
-          </a:p>
-          <a:p>
-            <a:pPr marL="342900" indent="-342900">
-              <a:spcAft>
-                <a:spcPts val="1000"/>
-              </a:spcAft>
-              <a:buSzPct val="100000"/>
-              <a:buChar char="•"/>
-            </a:pPr>
-            <a:r>
-              <a:rPr lang="en-US" sz="1150" dirty="0">
-                <a:solidFill>
-                  <a:srgbClr val="5C7A7D"/>
-                </a:solidFill>
-                <a:latin typeface="Calibri" pitchFamily="34" charset="0"/>
-                <a:ea typeface="Calibri" pitchFamily="34" charset="-122"/>
-                <a:cs typeface="Calibri" pitchFamily="34" charset="-120"/>
-              </a:rPr>
-              <a:t>Не проверено: отображение в Яндекс Браузере и Edge — ожидает ручной проверки</a:t>
             </a:r>
             <a:endParaRPr lang="en-US" sz="1150" dirty="0"/>
           </a:p>

--- a/diploma_presentation.pptx
+++ b/diploma_presentation.pptx
@@ -19,9 +19,10 @@
     <p:sldId id="267" r:id="rId13"/>
     <p:sldId id="268" r:id="rId14"/>
     <p:sldId id="269" r:id="rId15"/>
+    <p:sldId id="270" r:id="rId16"/>
   </p:sldIdLst>
   <p:notesMasterIdLst>
-    <p:notesMasterId r:id="rId16"/>
+    <p:notesMasterId r:id="rId17"/>
   </p:notesMasterIdLst>
   <p:sldSz cx="12192000" cy="6858000"/>
   <p:notesSz cx="6858000" cy="12192000"/>
@@ -889,7 +890,7 @@
           <a:p>
             <a:r>
               <a:rPr lang="en-US" dirty="0"/>
-              <a:t>Привет! Я Георгий, это моя дипломная работа по тестированию. Проверял два объекта: интернет-магазин «Читай-город» через интерфейс и сервис задач Todo List через API. Расскажу, что и как тестировал, что нашёл и какие выводы сделал.</a:t>
+              <a:t>Привет! Я Георгий, это моя дипломная работа по тестированию. Проверял одно приложение — интернет-магазин «Читай-город»: через интерфейс сайта и через его API. Расскажу, что и как тестировал, что нашёл и какие выводы сделал.</a:t>
             </a:r>
             <a:endParaRPr lang="en-US" dirty="0"/>
           </a:p>
@@ -977,7 +978,7 @@
           <a:p>
             <a:r>
               <a:rPr lang="en-US" dirty="0"/>
-              <a:t>Финальный прогон: тринадцать из тринадцати за тридцать пять секунд. По ходу я нашёл ошибки в самих тестах: они могли проходить, даже если поиск не сработал. Исправил — теперь тесты ждут именно результаты поиска. Покажу отчёт Allure.</a:t>
+              <a:t>Финальный прогон: все тесты прошли, кроме одного, который специально помечен как ожидаемо падающий — он фиксирует найденный дефект API. Покажу отчёт Allure.</a:t>
             </a:r>
             <a:endParaRPr lang="en-US" dirty="0"/>
           </a:p>
@@ -1241,7 +1242,7 @@
           <a:p>
             <a:r>
               <a:rPr lang="en-US" dirty="0"/>
-              <a:t>Вывод: сайт в целом рабочий, ключевые функции работают. Первым я бы исправил сдвиги страницы, потом контраст бейджей, а в регрессию добавил бы проверки доступности и скорости, чтобы это не вернулось.</a:t>
+              <a:t>Третий дефект нашёлся в API. Если передать в поиск номер города, которого нет в справочнике, сервис отвечает ошибкой сервера 500. Правильно — ответить ошибкой клиента, как он уже делает для нуля и отрицательных значений. Автотест на этот случай помечен как ожидаемо падающий.</a:t>
             </a:r>
             <a:endParaRPr lang="en-US" dirty="0"/>
           </a:p>
@@ -1329,7 +1330,7 @@
           <a:p>
             <a:r>
               <a:rPr lang="en-US" dirty="0"/>
-              <a:t>Спасибо за внимание! Ссылки на код и отчёт — на слайде. Готов ответить на вопросы.</a:t>
+              <a:t>Вывод: приложение в целом рабочее, ключевые функции работают. Первым я бы исправил сдвиги страницы, затем обработку несуществующего города в API, потом контраст бейджей, а в регрессию добавил бы проверки доступности и скорости.</a:t>
             </a:r>
             <a:endParaRPr lang="en-US" dirty="0"/>
           </a:p>
@@ -1353,6 +1354,94 @@
             <a:fld id="{F7021451-1387-4CA6-816F-3879F97B5CBC}" type="slidenum">
               <a:rPr lang="en-US"/>
               <a:t>14</a:t>
+            </a:fld>
+            <a:endParaRPr lang="en-US"/>
+          </a:p>
+        </p:txBody>
+      </p:sp>
+    </p:spTree>
+    <p:extLst>
+      <p:ext uri="{BB962C8B-B14F-4D97-AF65-F5344CB8AC3E}">
+        <p14:creationId xmlns:p14="http://schemas.microsoft.com/office/powerpoint/2010/main" val="1024086991"/>
+      </p:ext>
+    </p:extLst>
+  </p:cSld>
+  <p:clrMapOvr>
+    <a:masterClrMapping/>
+  </p:clrMapOvr>
+</p:notes>
+</file>
+
+<file path=ppt/notesSlides/notesSlide15.xml><?xml version="1.0" encoding="utf-8"?>
+<p:notes xmlns:a="http://schemas.openxmlformats.org/drawingml/2006/main" xmlns:r="http://schemas.openxmlformats.org/officeDocument/2006/relationships" xmlns:p="http://schemas.openxmlformats.org/presentationml/2006/main">
+  <p:cSld>
+    <p:spTree>
+      <p:nvGrpSpPr>
+        <p:cNvPr id="1" name=""/>
+        <p:cNvGrpSpPr/>
+        <p:nvPr/>
+      </p:nvGrpSpPr>
+      <p:grpSpPr>
+        <a:xfrm>
+          <a:off x="0" y="0"/>
+          <a:ext cx="0" cy="0"/>
+          <a:chOff x="0" y="0"/>
+          <a:chExt cx="0" cy="0"/>
+        </a:xfrm>
+      </p:grpSpPr>
+      <p:sp>
+        <p:nvSpPr>
+          <p:cNvPr id="2" name="Slide Image Placeholder 1"/>
+          <p:cNvSpPr>
+            <a:spLocks noGrp="1" noRot="1" noChangeAspect="1"/>
+          </p:cNvSpPr>
+          <p:nvPr>
+            <p:ph type="sldImg"/>
+          </p:nvPr>
+        </p:nvSpPr>
+        <p:spPr/>
+      </p:sp>
+      <p:sp>
+        <p:nvSpPr>
+          <p:cNvPr id="3" name="Notes Placeholder 2"/>
+          <p:cNvSpPr>
+            <a:spLocks noGrp="1"/>
+          </p:cNvSpPr>
+          <p:nvPr>
+            <p:ph type="body" idx="1"/>
+          </p:nvPr>
+        </p:nvSpPr>
+        <p:spPr/>
+        <p:txBody>
+          <a:bodyPr/>
+          <a:lstStyle/>
+          <a:p>
+            <a:r>
+              <a:rPr lang="en-US" dirty="0"/>
+              <a:t>Спасибо за внимание! Ссылки на код и отчёт — на слайде. Готов ответить на вопросы.</a:t>
+            </a:r>
+            <a:endParaRPr lang="en-US" dirty="0"/>
+          </a:p>
+        </p:txBody>
+      </p:sp>
+      <p:sp>
+        <p:nvSpPr>
+          <p:cNvPr id="4" name="Slide Number Placeholder 3"/>
+          <p:cNvSpPr>
+            <a:spLocks noGrp="1"/>
+          </p:cNvSpPr>
+          <p:nvPr>
+            <p:ph type="sldNum" sz="quarter" idx="10"/>
+          </p:nvPr>
+        </p:nvSpPr>
+        <p:spPr/>
+        <p:txBody>
+          <a:bodyPr/>
+          <a:lstStyle/>
+          <a:p>
+            <a:fld id="{F7021451-1387-4CA6-816F-3879F97B5CBC}" type="slidenum">
+              <a:rPr lang="en-US"/>
+              <a:t>15</a:t>
             </a:fld>
             <a:endParaRPr lang="en-US"/>
           </a:p>
@@ -1505,7 +1594,7 @@
           <a:p>
             <a:r>
               <a:rPr lang="en-US" dirty="0"/>
-              <a:t>Интерфейс проверял на «Читай-городе» без входа в аккаунт: поиск и карточку товара. API — на сервисе задач Todo List: всё, что можно сделать с задачей, плюс три негативных сценария.</a:t>
+              <a:t>Всё тестирование — на одном приложении, «Читай-городе». Интерфейс проверял без входа в аккаунт: поиск и карточку товара. API — открытое API поиска: сервис сам выдаёт анонимный токен, дальше я проверяю поиск товаров, подсказки и популярные запросы.</a:t>
             </a:r>
             <a:endParaRPr lang="en-US" dirty="0"/>
           </a:p>
@@ -1593,7 +1682,7 @@
           <a:p>
             <a:r>
               <a:rPr lang="en-US" dirty="0"/>
-              <a:t>Изначально API-часть была на учебном сервере, и в Postman всё проходило. Но в день прогона сервер перестал отвечать. Я перенёс кейсы на JSONPlaceholder: модель та же, так что структура кейсов не поменялась, а ответы нового сервиса я заранее проверил руками.</a:t>
+              <a:t>Сначала API-часть была на учебном сервере, но он перестал отвечать, и я временно перенёс кейсы на тренировочный сервис. Наставник справедливо заметила, что UI и API должны быть про одно приложение. Я нашёл открытое API Читай-города и переписал под него кейсы, коллекцию и автотесты.</a:t>
             </a:r>
             <a:endParaRPr lang="en-US" dirty="0"/>
           </a:p>
@@ -1681,7 +1770,7 @@
           <a:p>
             <a:r>
               <a:rPr lang="en-US" dirty="0"/>
-              <a:t>Вот объём документации. Функциональных кейсов пять, все позитивные: негативные сценарии у меня в API. Чек-лист — двенадцать пунктов по четырём видам проверок. Всё выложено: план и отчёт в Yonote, кейсы в Excel, коллекция в Postman, код на GitHub.</a:t>
+              <a:t>Вот объём документации. Функциональных кейсов пять, все позитивные. API-кейсов одиннадцать: шесть позитивных и пять негативных. Чек-лист — двенадцать пунктов по четырём видам проверок. Вся документация лежит в Yonote рядом с отчётом, на GitHub — только код автотестов.</a:t>
             </a:r>
             <a:endParaRPr lang="en-US" dirty="0"/>
           </a:p>
@@ -1857,7 +1946,7 @@
           <a:p>
             <a:r>
               <a:rPr lang="en-US" dirty="0"/>
-              <a:t>В API пять позитивных проверок — весь цикл жизни задачи — и три негативных: несуществующий id, id не числом и запрос неподдерживаемым методом. Негативных меньше, чем позитивных, как требует задание. Всё то же самое есть в коллекции Postman.</a:t>
+              <a:t>Позитивные проверки: получение анонимного токена, поиск по названию и по автору, вторая страница выдачи, подсказки и популярные фразы. Негативные строятся на реальной валидации сервиса: без токена — 401, слишком короткая фраза — 400, отрицательная страница — 422, неподдерживаемый метод — 405. А на несуществующий город сервис отвечает 500 — это найденный дефект. Всё это есть и в коллекции Postman.</a:t>
             </a:r>
             <a:endParaRPr lang="en-US" dirty="0"/>
           </a:p>
@@ -2485,7 +2574,7 @@
                 <a:ea typeface="Cambria" pitchFamily="34" charset="-122"/>
                 <a:cs typeface="Cambria" pitchFamily="34" charset="-120"/>
               </a:rPr>
-              <a:t>Тестирую Читай-город</a:t>
+              <a:t>Тестирую Читай-город:</a:t>
             </a:r>
             <a:endParaRPr lang="en-US" sz="3800" dirty="0"/>
           </a:p>
@@ -2502,7 +2591,7 @@
                 <a:ea typeface="Cambria" pitchFamily="34" charset="-122"/>
                 <a:cs typeface="Cambria" pitchFamily="34" charset="-120"/>
               </a:rPr>
-              <a:t>и Todo List API</a:t>
+              <a:t>сайт и API</a:t>
             </a:r>
             <a:endParaRPr lang="en-US" sz="3800" dirty="0"/>
           </a:p>
@@ -2714,7 +2803,7 @@
                 <a:ea typeface="Cambria" pitchFamily="34" charset="-122"/>
                 <a:cs typeface="Cambria" pitchFamily="34" charset="-120"/>
               </a:rPr>
-              <a:t>Прогон: 13 из 13</a:t>
+              <a:t>Прогон автотестов</a:t>
             </a:r>
             <a:endParaRPr lang="en-US" sz="3400" dirty="0"/>
           </a:p>
@@ -2767,24 +2856,24 @@
         </p:nvSpPr>
         <p:spPr>
           <a:xfrm>
-            <a:off x="548640" y="1600200"/>
-            <a:ext cx="4754880" cy="1188720"/>
-          </a:xfrm>
-          <a:prstGeom prst="rect">
-            <a:avLst/>
-          </a:prstGeom>
-          <a:noFill/>
-          <a:ln/>
-        </p:spPr>
-        <p:txBody>
-          <a:bodyPr wrap="square" lIns="0" tIns="0" rIns="0" bIns="0" rtlCol="0" anchor="ctr"/>
-          <a:lstStyle/>
-          <a:p>
-            <a:pPr indent="0" marL="0">
-              <a:buNone/>
-            </a:pPr>
-            <a:r>
-              <a:rPr lang="en-US" sz="7200" b="1" dirty="0">
+            <a:off x="548640" y="1554480"/>
+            <a:ext cx="4937760" cy="1188720"/>
+          </a:xfrm>
+          <a:prstGeom prst="rect">
+            <a:avLst/>
+          </a:prstGeom>
+          <a:noFill/>
+          <a:ln/>
+        </p:spPr>
+        <p:txBody>
+          <a:bodyPr wrap="square" lIns="0" tIns="0" rIns="0" bIns="0" rtlCol="0" anchor="ctr"/>
+          <a:lstStyle/>
+          <a:p>
+            <a:pPr indent="0" marL="0">
+              <a:buNone/>
+            </a:pPr>
+            <a:r>
+              <a:rPr lang="en-US" sz="6400" b="1" dirty="0">
                 <a:solidFill>
                   <a:srgbClr val="2F7D4F"/>
                 </a:solidFill>
@@ -2792,9 +2881,9 @@
                 <a:ea typeface="Cambria" pitchFamily="34" charset="-122"/>
                 <a:cs typeface="Cambria" pitchFamily="34" charset="-120"/>
               </a:rPr>
-              <a:t>13/13</a:t>
-            </a:r>
-            <a:endParaRPr lang="en-US" sz="7200" dirty="0"/>
+              <a:t>15 из 16</a:t>
+            </a:r>
+            <a:endParaRPr lang="en-US" sz="6400" dirty="0"/>
           </a:p>
         </p:txBody>
       </p:sp>
@@ -2806,7 +2895,7 @@
         </p:nvSpPr>
         <p:spPr>
           <a:xfrm>
-            <a:off x="548640" y="2788920"/>
+            <a:off x="548640" y="2743200"/>
             <a:ext cx="4937760" cy="365760"/>
           </a:xfrm>
           <a:prstGeom prst="rect">
@@ -2831,7 +2920,7 @@
                 <a:ea typeface="Calibri" pitchFamily="34" charset="-122"/>
                 <a:cs typeface="Calibri" pitchFamily="34" charset="-120"/>
               </a:rPr>
-              <a:t>34,7 сек · 8 API + 5 UI · 23.09.2026</a:t>
+              <a:t>прошли · 56 секунд · 26.09.2026</a:t>
             </a:r>
             <a:endParaRPr lang="en-US" sz="1600" dirty="0"/>
           </a:p>
@@ -2845,12 +2934,134 @@
         </p:nvSpPr>
         <p:spPr>
           <a:xfrm>
-            <a:off x="548640" y="3337560"/>
-            <a:ext cx="4937760" cy="2606040"/>
+            <a:off x="548640" y="3291840"/>
+            <a:ext cx="4937760" cy="1143000"/>
           </a:xfrm>
           <a:prstGeom prst="roundRect">
             <a:avLst>
-              <a:gd name="adj" fmla="val 7719"/>
+              <a:gd name="adj" fmla="val 17600"/>
+            </a:avLst>
+          </a:prstGeom>
+          <a:solidFill>
+            <a:srgbClr val="FDE8DC"/>
+          </a:solidFill>
+          <a:ln w="12700">
+            <a:solidFill>
+              <a:srgbClr val="FDE8DC"/>
+            </a:solidFill>
+            <a:prstDash val="solid"/>
+          </a:ln>
+        </p:spPr>
+      </p:sp>
+      <p:sp>
+        <p:nvSpPr>
+          <p:cNvPr id="8" name="Text 6"/>
+          <p:cNvSpPr txBox="1"/>
+          <p:nvPr/>
+        </p:nvSpPr>
+        <p:spPr>
+          <a:xfrm>
+            <a:off x="777240" y="3383280"/>
+            <a:ext cx="4572000" cy="960120"/>
+          </a:xfrm>
+          <a:prstGeom prst="rect">
+            <a:avLst/>
+          </a:prstGeom>
+          <a:noFill/>
+          <a:ln/>
+        </p:spPr>
+        <p:txBody>
+          <a:bodyPr wrap="square" lIns="0" tIns="0" rIns="0" bIns="0" rtlCol="0" anchor="ctr"/>
+          <a:lstStyle/>
+          <a:p>
+            <a:pPr indent="0" marL="0">
+              <a:buNone/>
+            </a:pPr>
+            <a:r>
+              <a:rPr lang="en-US" sz="1600" b="1" dirty="0">
+                <a:solidFill>
+                  <a:srgbClr val="16323B"/>
+                </a:solidFill>
+                <a:latin typeface="Calibri" pitchFamily="34" charset="0"/>
+                <a:ea typeface="Calibri" pitchFamily="34" charset="-122"/>
+                <a:cs typeface="Calibri" pitchFamily="34" charset="-120"/>
+              </a:rPr>
+              <a:t>1 тест ожидаемо падает (xfail)</a:t>
+            </a:r>
+            <a:endParaRPr lang="en-US" sz="1600" dirty="0"/>
+          </a:p>
+          <a:p>
+            <a:pPr indent="0" marL="0">
+              <a:buNone/>
+            </a:pPr>
+            <a:r>
+              <a:rPr lang="en-US" sz="1400" dirty="0">
+                <a:solidFill>
+                  <a:srgbClr val="5A7179"/>
+                </a:solidFill>
+                <a:latin typeface="Calibri" pitchFamily="34" charset="0"/>
+                <a:ea typeface="Calibri" pitchFamily="34" charset="-122"/>
+                <a:cs typeface="Calibri" pitchFamily="34" charset="-120"/>
+              </a:rPr>
+              <a:t>фиксирует дефект API BR-003 и сообщит, когда его исправят</a:t>
+            </a:r>
+            <a:endParaRPr lang="en-US" sz="1600" dirty="0"/>
+          </a:p>
+        </p:txBody>
+      </p:sp>
+      <p:sp>
+        <p:nvSpPr>
+          <p:cNvPr id="9" name="Text 7"/>
+          <p:cNvSpPr txBox="1"/>
+          <p:nvPr/>
+        </p:nvSpPr>
+        <p:spPr>
+          <a:xfrm>
+            <a:off x="548640" y="4663440"/>
+            <a:ext cx="4937760" cy="914400"/>
+          </a:xfrm>
+          <a:prstGeom prst="rect">
+            <a:avLst/>
+          </a:prstGeom>
+          <a:noFill/>
+          <a:ln/>
+        </p:spPr>
+        <p:txBody>
+          <a:bodyPr wrap="square" lIns="0" tIns="0" rIns="0" bIns="0" rtlCol="0" anchor="t"/>
+          <a:lstStyle/>
+          <a:p>
+            <a:pPr indent="0" marL="0">
+              <a:buNone/>
+            </a:pPr>
+            <a:r>
+              <a:rPr lang="en-US" sz="1400" i="1" dirty="0">
+                <a:solidFill>
+                  <a:srgbClr val="0F6E7A"/>
+                </a:solidFill>
+                <a:latin typeface="Calibri" pitchFamily="34" charset="0"/>
+                <a:ea typeface="Calibri" pitchFamily="34" charset="-122"/>
+                <a:cs typeface="Calibri" pitchFamily="34" charset="-120"/>
+              </a:rPr>
+              <a:t>По ходу прогонов поправил ожидания в UI-тестах: теперь они ждут именно результаты поиска, а не карточки с главной.</a:t>
+            </a:r>
+            <a:endParaRPr lang="en-US" sz="1400" dirty="0"/>
+          </a:p>
+        </p:txBody>
+      </p:sp>
+      <p:sp>
+        <p:nvSpPr>
+          <p:cNvPr id="10" name="Shape 8"/>
+          <p:cNvSpPr/>
+          <p:nvPr/>
+        </p:nvSpPr>
+        <p:spPr>
+          <a:xfrm>
+            <a:off x="5916168" y="1618488"/>
+            <a:ext cx="5724144" cy="3079231"/>
+          </a:xfrm>
+          <a:prstGeom prst="roundRect">
+            <a:avLst>
+              <a:gd name="adj" fmla="val 3563"/>
             </a:avLst>
           </a:prstGeom>
           <a:solidFill>
@@ -2871,148 +3082,9 @@
           </a:effectLst>
         </p:spPr>
       </p:sp>
-      <p:sp>
-        <p:nvSpPr>
-          <p:cNvPr id="8" name="Text 6"/>
-          <p:cNvSpPr txBox="1"/>
-          <p:nvPr/>
-        </p:nvSpPr>
-        <p:spPr>
-          <a:xfrm>
-            <a:off x="777240" y="3474720"/>
-            <a:ext cx="4526280" cy="2377440"/>
-          </a:xfrm>
-          <a:prstGeom prst="rect">
-            <a:avLst/>
-          </a:prstGeom>
-          <a:noFill/>
-          <a:ln/>
-        </p:spPr>
-        <p:txBody>
-          <a:bodyPr wrap="square" lIns="0" tIns="0" rIns="0" bIns="0" rtlCol="0" anchor="t"/>
-          <a:lstStyle/>
-          <a:p>
-            <a:pPr indent="0" marL="0">
-              <a:spcAft>
-                <a:spcPts val="600"/>
-              </a:spcAft>
-              <a:buNone/>
-            </a:pPr>
-            <a:r>
-              <a:rPr lang="en-US" sz="1600" b="1" dirty="0">
-                <a:solidFill>
-                  <a:srgbClr val="0B3C49"/>
-                </a:solidFill>
-                <a:latin typeface="Calibri" pitchFamily="34" charset="0"/>
-                <a:ea typeface="Calibri" pitchFamily="34" charset="-122"/>
-                <a:cs typeface="Calibri" pitchFamily="34" charset="-120"/>
-              </a:rPr>
-              <a:t>Что починил в тестах по дороге</a:t>
-            </a:r>
-            <a:endParaRPr lang="en-US" sz="1400" dirty="0"/>
-          </a:p>
-          <a:p>
-            <a:pPr marL="342900" indent="-342900">
-              <a:spcAft>
-                <a:spcPts val="600"/>
-              </a:spcAft>
-              <a:buSzPct val="100000"/>
-              <a:buChar char="•"/>
-            </a:pPr>
-            <a:r>
-              <a:rPr lang="en-US" sz="1400" dirty="0">
-                <a:solidFill>
-                  <a:srgbClr val="16323B"/>
-                </a:solidFill>
-                <a:latin typeface="Calibri" pitchFamily="34" charset="0"/>
-                <a:ea typeface="Calibri" pitchFamily="34" charset="-122"/>
-                <a:cs typeface="Calibri" pitchFamily="34" charset="-120"/>
-              </a:rPr>
-              <a:t>networkidle не наступал из-за фоновых запросов — жду нужный адрес и элементы</a:t>
-            </a:r>
-            <a:endParaRPr lang="en-US" sz="1400" dirty="0"/>
-          </a:p>
-          <a:p>
-            <a:pPr marL="342900" indent="-342900">
-              <a:spcAft>
-                <a:spcPts val="600"/>
-              </a:spcAft>
-              <a:buSzPct val="100000"/>
-              <a:buChar char="•"/>
-            </a:pPr>
-            <a:r>
-              <a:rPr lang="en-US" sz="1400" dirty="0">
-                <a:solidFill>
-                  <a:srgbClr val="16323B"/>
-                </a:solidFill>
-                <a:latin typeface="Calibri" pitchFamily="34" charset="0"/>
-                <a:ea typeface="Calibri" pitchFamily="34" charset="-122"/>
-                <a:cs typeface="Calibri" pitchFamily="34" charset="-120"/>
-              </a:rPr>
-              <a:t>карточки находились ещё до поиска — беру только блок выдачи</a:t>
-            </a:r>
-            <a:endParaRPr lang="en-US" sz="1400" dirty="0"/>
-          </a:p>
-          <a:p>
-            <a:pPr marL="342900" indent="-342900">
-              <a:spcAft>
-                <a:spcPts val="600"/>
-              </a:spcAft>
-              <a:buSzPct val="100000"/>
-              <a:buChar char="•"/>
-            </a:pPr>
-            <a:r>
-              <a:rPr lang="en-US" sz="1400" dirty="0">
-                <a:solidFill>
-                  <a:srgbClr val="16323B"/>
-                </a:solidFill>
-                <a:latin typeface="Calibri" pitchFamily="34" charset="0"/>
-                <a:ea typeface="Calibri" pitchFamily="34" charset="-122"/>
-                <a:cs typeface="Calibri" pitchFamily="34" charset="-120"/>
-              </a:rPr>
-              <a:t>подсказки поиска перекрывали клик — дожидаюсь их и закрываю</a:t>
-            </a:r>
-            <a:endParaRPr lang="en-US" sz="1400" dirty="0"/>
-          </a:p>
-        </p:txBody>
-      </p:sp>
-      <p:sp>
-        <p:nvSpPr>
-          <p:cNvPr id="9" name="Shape 7"/>
-          <p:cNvSpPr/>
-          <p:nvPr/>
-        </p:nvSpPr>
-        <p:spPr>
-          <a:xfrm>
-            <a:off x="5916168" y="1618488"/>
-            <a:ext cx="5724144" cy="3037875"/>
-          </a:xfrm>
-          <a:prstGeom prst="roundRect">
-            <a:avLst>
-              <a:gd name="adj" fmla="val 3612"/>
-            </a:avLst>
-          </a:prstGeom>
-          <a:solidFill>
-            <a:srgbClr val="FFFFFF"/>
-          </a:solidFill>
-          <a:ln w="12700">
-            <a:solidFill>
-              <a:srgbClr val="FFFFFF"/>
-            </a:solidFill>
-            <a:prstDash val="solid"/>
-          </a:ln>
-          <a:effectLst>
-            <a:outerShdw sx="100000" sy="100000" kx="0" ky="0" algn="bl" rotWithShape="0" blurRad="101600" dist="25400" dir="5400000">
-              <a:srgbClr val="0B3C49">
-                <a:alpha val="12000"/>
-              </a:srgbClr>
-            </a:outerShdw>
-          </a:effectLst>
-        </p:spPr>
-      </p:sp>
       <p:pic>
         <p:nvPicPr>
-          <p:cNvPr id="10" name="Image 0" descr="/tmp/claude-0/deck/img/allure_ov.png">    </p:cNvPr>
+          <p:cNvPr id="11" name="Image 0" descr="/tmp/claude-0/deck/img/allure_ov.png">    </p:cNvPr>
           <p:cNvPicPr>
             <a:picLocks noChangeAspect="1"/>
           </p:cNvPicPr>
@@ -3027,7 +3099,7 @@
         <p:spPr>
           <a:xfrm>
             <a:off x="5989320" y="1691640"/>
-            <a:ext cx="5577840" cy="2891571"/>
+            <a:ext cx="5577840" cy="2932927"/>
           </a:xfrm>
           <a:prstGeom prst="rect">
             <a:avLst/>
@@ -3036,13 +3108,13 @@
       </p:pic>
       <p:sp>
         <p:nvSpPr>
-          <p:cNvPr id="11" name="Text 8"/>
-          <p:cNvSpPr txBox="1"/>
-          <p:nvPr/>
-        </p:nvSpPr>
-        <p:spPr>
-          <a:xfrm>
-            <a:off x="5989320" y="4692939"/>
+          <p:cNvPr id="12" name="Text 9"/>
+          <p:cNvSpPr txBox="1"/>
+          <p:nvPr/>
+        </p:nvSpPr>
+        <p:spPr>
+          <a:xfrm>
+            <a:off x="5989320" y="4734295"/>
             <a:ext cx="5577840" cy="274320"/>
           </a:xfrm>
           <a:prstGeom prst="rect">
@@ -4593,7 +4665,7 @@
                 <a:ea typeface="Calibri" pitchFamily="34" charset="-122"/>
                 <a:cs typeface="Calibri" pitchFamily="34" charset="-120"/>
               </a:rPr>
-              <a:t>12 · ВЫВОДЫ</a:t>
+              <a:t>12 · ДЕФЕКТ</a:t>
             </a:r>
             <a:endParaRPr lang="en-US" sz="1200" dirty="0"/>
           </a:p>
@@ -4632,7 +4704,7 @@
                 <a:ea typeface="Cambria" pitchFamily="34" charset="-122"/>
                 <a:cs typeface="Cambria" pitchFamily="34" charset="-120"/>
               </a:rPr>
-              <a:t>Что в итоге</a:t>
+              <a:t>BR-003 · API падает на чужом городе</a:t>
             </a:r>
             <a:endParaRPr lang="en-US" sz="3400" dirty="0"/>
           </a:p>
@@ -4685,186 +4757,12 @@
         </p:nvSpPr>
         <p:spPr>
           <a:xfrm>
-            <a:off x="548640" y="1691640"/>
-            <a:ext cx="5120640" cy="4297680"/>
+            <a:off x="475488" y="1664208"/>
+            <a:ext cx="5815584" cy="2664753"/>
           </a:xfrm>
           <a:prstGeom prst="roundRect">
             <a:avLst>
-              <a:gd name="adj" fmla="val 4681"/>
-            </a:avLst>
-          </a:prstGeom>
-          <a:solidFill>
-            <a:srgbClr val="0B3C49"/>
-          </a:solidFill>
-          <a:ln w="12700">
-            <a:solidFill>
-              <a:srgbClr val="0B3C49"/>
-            </a:solidFill>
-            <a:prstDash val="solid"/>
-          </a:ln>
-          <a:effectLst>
-            <a:outerShdw sx="100000" sy="100000" kx="0" ky="0" algn="bl" rotWithShape="0" blurRad="101600" dist="25400" dir="5400000">
-              <a:srgbClr val="0B3C49">
-                <a:alpha val="12000"/>
-              </a:srgbClr>
-            </a:outerShdw>
-          </a:effectLst>
-        </p:spPr>
-      </p:sp>
-      <p:sp>
-        <p:nvSpPr>
-          <p:cNvPr id="6" name="Text 4"/>
-          <p:cNvSpPr txBox="1"/>
-          <p:nvPr/>
-        </p:nvSpPr>
-        <p:spPr>
-          <a:xfrm>
-            <a:off x="868680" y="1965960"/>
-            <a:ext cx="4572000" cy="914400"/>
-          </a:xfrm>
-          <a:prstGeom prst="rect">
-            <a:avLst/>
-          </a:prstGeom>
-          <a:noFill/>
-          <a:ln/>
-        </p:spPr>
-        <p:txBody>
-          <a:bodyPr wrap="square" lIns="0" tIns="0" rIns="0" bIns="0" rtlCol="0" anchor="t"/>
-          <a:lstStyle/>
-          <a:p>
-            <a:pPr indent="0" marL="0">
-              <a:buNone/>
-            </a:pPr>
-            <a:r>
-              <a:rPr lang="en-US" sz="2400" b="1" dirty="0">
-                <a:solidFill>
-                  <a:srgbClr val="FFFFFF"/>
-                </a:solidFill>
-                <a:latin typeface="Cambria" pitchFamily="34" charset="0"/>
-                <a:ea typeface="Cambria" pitchFamily="34" charset="-122"/>
-                <a:cs typeface="Cambria" pitchFamily="34" charset="-120"/>
-              </a:rPr>
-              <a:t>Качество — удовлетворительное</a:t>
-            </a:r>
-            <a:endParaRPr lang="en-US" sz="2400" dirty="0"/>
-          </a:p>
-        </p:txBody>
-      </p:sp>
-      <p:sp>
-        <p:nvSpPr>
-          <p:cNvPr id="7" name="Text 5"/>
-          <p:cNvSpPr txBox="1"/>
-          <p:nvPr/>
-        </p:nvSpPr>
-        <p:spPr>
-          <a:xfrm>
-            <a:off x="868680" y="2926080"/>
-            <a:ext cx="4526280" cy="2926080"/>
-          </a:xfrm>
-          <a:prstGeom prst="rect">
-            <a:avLst/>
-          </a:prstGeom>
-          <a:noFill/>
-          <a:ln/>
-        </p:spPr>
-        <p:txBody>
-          <a:bodyPr wrap="square" lIns="0" tIns="0" rIns="0" bIns="0" rtlCol="0" anchor="t"/>
-          <a:lstStyle/>
-          <a:p>
-            <a:pPr indent="0" marL="0">
-              <a:buNone/>
-            </a:pPr>
-            <a:r>
-              <a:rPr lang="en-US" sz="1600" dirty="0">
-                <a:solidFill>
-                  <a:srgbClr val="DCEFEC"/>
-                </a:solidFill>
-                <a:latin typeface="Calibri" pitchFamily="34" charset="0"/>
-                <a:ea typeface="Calibri" pitchFamily="34" charset="-122"/>
-                <a:cs typeface="Calibri" pitchFamily="34" charset="-120"/>
-              </a:rPr>
-              <a:t>Поиск и карточка товара работают, API отвечает как ожидается во всех 8 проверках, автотесты проходят 13 из 13.</a:t>
-            </a:r>
-            <a:endParaRPr lang="en-US" sz="1600" dirty="0"/>
-          </a:p>
-          <a:p>
-            <a:pPr indent="0" marL="0">
-              <a:buNone/>
-            </a:pPr>
-            <a:endParaRPr lang="en-US" sz="1600" dirty="0"/>
-          </a:p>
-          <a:p>
-            <a:pPr indent="0" marL="0">
-              <a:buNone/>
-            </a:pPr>
-            <a:r>
-              <a:rPr lang="en-US" sz="1600" dirty="0">
-                <a:solidFill>
-                  <a:srgbClr val="DCEFEC"/>
-                </a:solidFill>
-                <a:latin typeface="Calibri" pitchFamily="34" charset="0"/>
-                <a:ea typeface="Calibri" pitchFamily="34" charset="-122"/>
-                <a:cs typeface="Calibri" pitchFamily="34" charset="-120"/>
-              </a:rPr>
-              <a:t>Больше всего пользователю мешают сдвиги страницы при загрузке (BR-002). Контраст бейджей (BR-001) — вопрос доступности.</a:t>
-            </a:r>
-            <a:endParaRPr lang="en-US" sz="1600" dirty="0"/>
-          </a:p>
-        </p:txBody>
-      </p:sp>
-      <p:sp>
-        <p:nvSpPr>
-          <p:cNvPr id="8" name="Text 6"/>
-          <p:cNvSpPr txBox="1"/>
-          <p:nvPr/>
-        </p:nvSpPr>
-        <p:spPr>
-          <a:xfrm>
-            <a:off x="6126480" y="1691640"/>
-            <a:ext cx="5486400" cy="457200"/>
-          </a:xfrm>
-          <a:prstGeom prst="rect">
-            <a:avLst/>
-          </a:prstGeom>
-          <a:noFill/>
-          <a:ln/>
-        </p:spPr>
-        <p:txBody>
-          <a:bodyPr wrap="square" lIns="0" tIns="0" rIns="0" bIns="0" rtlCol="0" anchor="ctr"/>
-          <a:lstStyle/>
-          <a:p>
-            <a:pPr indent="0" marL="0">
-              <a:buNone/>
-            </a:pPr>
-            <a:r>
-              <a:rPr lang="en-US" sz="2200" b="1" dirty="0">
-                <a:solidFill>
-                  <a:srgbClr val="0B3C49"/>
-                </a:solidFill>
-                <a:latin typeface="Cambria" pitchFamily="34" charset="0"/>
-                <a:ea typeface="Cambria" pitchFamily="34" charset="-122"/>
-                <a:cs typeface="Cambria" pitchFamily="34" charset="-120"/>
-              </a:rPr>
-              <a:t>Что бы я исправил</a:t>
-            </a:r>
-            <a:endParaRPr lang="en-US" sz="2200" dirty="0"/>
-          </a:p>
-        </p:txBody>
-      </p:sp>
-      <p:sp>
-        <p:nvSpPr>
-          <p:cNvPr id="9" name="Shape 7"/>
-          <p:cNvSpPr/>
-          <p:nvPr/>
-        </p:nvSpPr>
-        <p:spPr>
-          <a:xfrm>
-            <a:off x="6126480" y="2331720"/>
-            <a:ext cx="5532120" cy="1005840"/>
-          </a:xfrm>
-          <a:prstGeom prst="roundRect">
-            <a:avLst>
-              <a:gd name="adj" fmla="val 20000"/>
+              <a:gd name="adj" fmla="val 4118"/>
             </a:avLst>
           </a:prstGeom>
           <a:solidFill>
@@ -4885,19 +4783,84 @@
           </a:effectLst>
         </p:spPr>
       </p:sp>
-      <p:sp>
-        <p:nvSpPr>
-          <p:cNvPr id="10" name="Shape 8"/>
+      <p:pic>
+        <p:nvPicPr>
+          <p:cNvPr id="6" name="Image 0" descr="/tmp/claude-0/deck/img/br3.png">    </p:cNvPr>
+          <p:cNvPicPr>
+            <a:picLocks noChangeAspect="1"/>
+          </p:cNvPicPr>
+          <p:nvPr/>
+        </p:nvPicPr>
+        <p:blipFill>
+          <a:blip r:embed="rId2"/>
+          <a:stretch>
+            <a:fillRect/>
+          </a:stretch>
+        </p:blipFill>
+        <p:spPr>
+          <a:xfrm>
+            <a:off x="548640" y="1737360"/>
+            <a:ext cx="5669280" cy="2518449"/>
+          </a:xfrm>
+          <a:prstGeom prst="rect">
+            <a:avLst/>
+          </a:prstGeom>
+        </p:spPr>
+      </p:pic>
+      <p:sp>
+        <p:nvSpPr>
+          <p:cNvPr id="7" name="Text 4"/>
+          <p:cNvSpPr txBox="1"/>
+          <p:nvPr/>
+        </p:nvSpPr>
+        <p:spPr>
+          <a:xfrm>
+            <a:off x="548640" y="4365537"/>
+            <a:ext cx="5669280" cy="274320"/>
+          </a:xfrm>
+          <a:prstGeom prst="rect">
+            <a:avLst/>
+          </a:prstGeom>
+          <a:noFill/>
+          <a:ln/>
+        </p:spPr>
+        <p:txBody>
+          <a:bodyPr wrap="square" lIns="0" tIns="0" rIns="0" bIns="0" rtlCol="0" anchor="ctr"/>
+          <a:lstStyle/>
+          <a:p>
+            <a:pPr indent="0" marL="0">
+              <a:buNone/>
+            </a:pPr>
+            <a:r>
+              <a:rPr lang="en-US" sz="1200" dirty="0">
+                <a:solidFill>
+                  <a:srgbClr val="5A7179"/>
+                </a:solidFill>
+                <a:latin typeface="Calibri" pitchFamily="34" charset="0"/>
+                <a:ea typeface="Calibri" pitchFamily="34" charset="-122"/>
+                <a:cs typeface="Calibri" pitchFamily="34" charset="-120"/>
+              </a:rPr>
+              <a:t>Allure: тест BR-003 и приложенный ответ сервиса</a:t>
+            </a:r>
+            <a:endParaRPr lang="en-US" sz="1200" dirty="0"/>
+          </a:p>
+        </p:txBody>
+      </p:sp>
+      <p:sp>
+        <p:nvSpPr>
+          <p:cNvPr id="8" name="Shape 5"/>
           <p:cNvSpPr/>
           <p:nvPr/>
         </p:nvSpPr>
         <p:spPr>
           <a:xfrm>
-            <a:off x="6355080" y="2606040"/>
-            <a:ext cx="457200" cy="457200"/>
-          </a:xfrm>
-          <a:prstGeom prst="ellipse">
-            <a:avLst/>
+            <a:off x="6629400" y="1783080"/>
+            <a:ext cx="1097280" cy="329184"/>
+          </a:xfrm>
+          <a:prstGeom prst="roundRect">
+            <a:avLst>
+              <a:gd name="adj" fmla="val 50000"/>
+            </a:avLst>
           </a:prstGeom>
           <a:solidFill>
             <a:srgbClr val="E8692E"/>
@@ -4912,14 +4875,14 @@
       </p:sp>
       <p:sp>
         <p:nvSpPr>
-          <p:cNvPr id="11" name="Text 9"/>
-          <p:cNvSpPr txBox="1"/>
-          <p:nvPr/>
-        </p:nvSpPr>
-        <p:spPr>
-          <a:xfrm>
-            <a:off x="6355080" y="2606040"/>
-            <a:ext cx="457200" cy="457200"/>
+          <p:cNvPr id="9" name="Text 6"/>
+          <p:cNvSpPr txBox="1"/>
+          <p:nvPr/>
+        </p:nvSpPr>
+        <p:spPr>
+          <a:xfrm>
+            <a:off x="6629400" y="1783080"/>
+            <a:ext cx="1097280" cy="329184"/>
           </a:xfrm>
           <a:prstGeom prst="rect">
             <a:avLst/>
@@ -4935,7 +4898,7 @@
               <a:buNone/>
             </a:pPr>
             <a:r>
-              <a:rPr lang="en-US" sz="1600" b="1" dirty="0">
+              <a:rPr lang="en-US" sz="1200" b="1" dirty="0">
                 <a:solidFill>
                   <a:srgbClr val="FFFFFF"/>
                 </a:solidFill>
@@ -4943,137 +4906,49 @@
                 <a:ea typeface="Calibri" pitchFamily="34" charset="-122"/>
                 <a:cs typeface="Calibri" pitchFamily="34" charset="-120"/>
               </a:rPr>
-              <a:t>1</a:t>
-            </a:r>
-            <a:endParaRPr lang="en-US" sz="1600" dirty="0"/>
-          </a:p>
-        </p:txBody>
-      </p:sp>
-      <p:sp>
-        <p:nvSpPr>
-          <p:cNvPr id="12" name="Text 10"/>
-          <p:cNvSpPr txBox="1"/>
-          <p:nvPr/>
-        </p:nvSpPr>
-        <p:spPr>
-          <a:xfrm>
-            <a:off x="6995160" y="2423160"/>
-            <a:ext cx="4526280" cy="822960"/>
-          </a:xfrm>
-          <a:prstGeom prst="rect">
-            <a:avLst/>
-          </a:prstGeom>
-          <a:noFill/>
-          <a:ln/>
-        </p:spPr>
-        <p:txBody>
-          <a:bodyPr wrap="square" lIns="0" tIns="0" rIns="0" bIns="0" rtlCol="0" anchor="ctr"/>
-          <a:lstStyle/>
-          <a:p>
-            <a:pPr indent="0" marL="0">
-              <a:buNone/>
-            </a:pPr>
-            <a:r>
-              <a:rPr lang="en-US" sz="1600" b="1" dirty="0">
-                <a:solidFill>
-                  <a:srgbClr val="16323B"/>
-                </a:solidFill>
-                <a:latin typeface="Calibri" pitchFamily="34" charset="0"/>
-                <a:ea typeface="Calibri" pitchFamily="34" charset="-122"/>
-                <a:cs typeface="Calibri" pitchFamily="34" charset="-120"/>
-              </a:rPr>
-              <a:t>BR-002 — в первую очередь</a:t>
-            </a:r>
-            <a:endParaRPr lang="en-US" sz="1600" dirty="0"/>
-          </a:p>
-          <a:p>
-            <a:pPr indent="0" marL="0">
-              <a:buNone/>
-            </a:pPr>
-            <a:r>
-              <a:rPr lang="en-US" sz="1400" dirty="0">
-                <a:solidFill>
-                  <a:srgbClr val="5A7179"/>
-                </a:solidFill>
-                <a:latin typeface="Calibri" pitchFamily="34" charset="0"/>
-                <a:ea typeface="Calibri" pitchFamily="34" charset="-122"/>
-                <a:cs typeface="Calibri" pitchFamily="34" charset="-120"/>
-              </a:rPr>
-              <a:t>заранее резервировать место под баннеры и картинки, задавать им размеры</a:t>
-            </a:r>
-            <a:endParaRPr lang="en-US" sz="1600" dirty="0"/>
-          </a:p>
-        </p:txBody>
-      </p:sp>
-      <p:sp>
-        <p:nvSpPr>
-          <p:cNvPr id="13" name="Shape 11"/>
+              <a:t>Major</a:t>
+            </a:r>
+            <a:endParaRPr lang="en-US" sz="1200" dirty="0"/>
+          </a:p>
+        </p:txBody>
+      </p:sp>
+      <p:sp>
+        <p:nvSpPr>
+          <p:cNvPr id="10" name="Shape 7"/>
           <p:cNvSpPr/>
           <p:nvPr/>
         </p:nvSpPr>
         <p:spPr>
           <a:xfrm>
-            <a:off x="6126480" y="3520440"/>
-            <a:ext cx="5532120" cy="1005840"/>
+            <a:off x="7863840" y="1783080"/>
+            <a:ext cx="2011680" cy="329184"/>
           </a:xfrm>
           <a:prstGeom prst="roundRect">
             <a:avLst>
-              <a:gd name="adj" fmla="val 20000"/>
+              <a:gd name="adj" fmla="val 50000"/>
             </a:avLst>
           </a:prstGeom>
           <a:solidFill>
-            <a:srgbClr val="FFFFFF"/>
+            <a:srgbClr val="0F6E7A"/>
           </a:solidFill>
           <a:ln w="12700">
             <a:solidFill>
-              <a:srgbClr val="FFFFFF"/>
+              <a:srgbClr val="0F6E7A"/>
             </a:solidFill>
             <a:prstDash val="solid"/>
           </a:ln>
-          <a:effectLst>
-            <a:outerShdw sx="100000" sy="100000" kx="0" ky="0" algn="bl" rotWithShape="0" blurRad="101600" dist="25400" dir="5400000">
-              <a:srgbClr val="0B3C49">
-                <a:alpha val="12000"/>
-              </a:srgbClr>
-            </a:outerShdw>
-          </a:effectLst>
-        </p:spPr>
-      </p:sp>
-      <p:sp>
-        <p:nvSpPr>
-          <p:cNvPr id="14" name="Shape 12"/>
-          <p:cNvSpPr/>
-          <p:nvPr/>
-        </p:nvSpPr>
-        <p:spPr>
-          <a:xfrm>
-            <a:off x="6355080" y="3794760"/>
-            <a:ext cx="457200" cy="457200"/>
-          </a:xfrm>
-          <a:prstGeom prst="ellipse">
-            <a:avLst/>
-          </a:prstGeom>
-          <a:solidFill>
-            <a:srgbClr val="2BA79A"/>
-          </a:solidFill>
-          <a:ln w="12700">
-            <a:solidFill>
-              <a:srgbClr val="2BA79A"/>
-            </a:solidFill>
-            <a:prstDash val="solid"/>
-          </a:ln>
-        </p:spPr>
-      </p:sp>
-      <p:sp>
-        <p:nvSpPr>
-          <p:cNvPr id="15" name="Text 13"/>
-          <p:cNvSpPr txBox="1"/>
-          <p:nvPr/>
-        </p:nvSpPr>
-        <p:spPr>
-          <a:xfrm>
-            <a:off x="6355080" y="3794760"/>
-            <a:ext cx="457200" cy="457200"/>
+        </p:spPr>
+      </p:sp>
+      <p:sp>
+        <p:nvSpPr>
+          <p:cNvPr id="11" name="Text 8"/>
+          <p:cNvSpPr txBox="1"/>
+          <p:nvPr/>
+        </p:nvSpPr>
+        <p:spPr>
+          <a:xfrm>
+            <a:off x="7863840" y="1783080"/>
+            <a:ext cx="2011680" cy="329184"/>
           </a:xfrm>
           <a:prstGeom prst="rect">
             <a:avLst/>
@@ -5089,7 +4964,7 @@
               <a:buNone/>
             </a:pPr>
             <a:r>
-              <a:rPr lang="en-US" sz="1600" b="1" dirty="0">
+              <a:rPr lang="en-US" sz="1200" b="1" dirty="0">
                 <a:solidFill>
                   <a:srgbClr val="FFFFFF"/>
                 </a:solidFill>
@@ -5097,7 +4972,163 @@
                 <a:ea typeface="Calibri" pitchFamily="34" charset="-122"/>
                 <a:cs typeface="Calibri" pitchFamily="34" charset="-120"/>
               </a:rPr>
-              <a:t>2</a:t>
+              <a:t>Приоритет Medium</a:t>
+            </a:r>
+            <a:endParaRPr lang="en-US" sz="1200" dirty="0"/>
+          </a:p>
+        </p:txBody>
+      </p:sp>
+      <p:sp>
+        <p:nvSpPr>
+          <p:cNvPr id="12" name="Text 9"/>
+          <p:cNvSpPr txBox="1"/>
+          <p:nvPr/>
+        </p:nvSpPr>
+        <p:spPr>
+          <a:xfrm>
+            <a:off x="6629400" y="2377440"/>
+            <a:ext cx="5029200" cy="292608"/>
+          </a:xfrm>
+          <a:prstGeom prst="rect">
+            <a:avLst/>
+          </a:prstGeom>
+          <a:noFill/>
+          <a:ln/>
+        </p:spPr>
+        <p:txBody>
+          <a:bodyPr wrap="square" lIns="0" tIns="0" rIns="0" bIns="0" rtlCol="0" anchor="ctr"/>
+          <a:lstStyle/>
+          <a:p>
+            <a:pPr indent="0" marL="0">
+              <a:buNone/>
+            </a:pPr>
+            <a:r>
+              <a:rPr lang="en-US" sz="1300" b="1" dirty="0">
+                <a:solidFill>
+                  <a:srgbClr val="2BA79A"/>
+                </a:solidFill>
+                <a:latin typeface="Calibri" pitchFamily="34" charset="0"/>
+                <a:ea typeface="Calibri" pitchFamily="34" charset="-122"/>
+                <a:cs typeface="Calibri" pitchFamily="34" charset="-120"/>
+              </a:rPr>
+              <a:t>Запрос</a:t>
+            </a:r>
+            <a:endParaRPr lang="en-US" sz="1300" dirty="0"/>
+          </a:p>
+        </p:txBody>
+      </p:sp>
+      <p:sp>
+        <p:nvSpPr>
+          <p:cNvPr id="13" name="Text 10"/>
+          <p:cNvSpPr txBox="1"/>
+          <p:nvPr/>
+        </p:nvSpPr>
+        <p:spPr>
+          <a:xfrm>
+            <a:off x="6629400" y="2670048"/>
+            <a:ext cx="5029200" cy="548640"/>
+          </a:xfrm>
+          <a:prstGeom prst="rect">
+            <a:avLst/>
+          </a:prstGeom>
+          <a:noFill/>
+          <a:ln/>
+        </p:spPr>
+        <p:txBody>
+          <a:bodyPr wrap="square" lIns="0" tIns="0" rIns="0" bIns="0" rtlCol="0" anchor="t"/>
+          <a:lstStyle/>
+          <a:p>
+            <a:pPr indent="0" marL="0">
+              <a:buNone/>
+            </a:pPr>
+            <a:r>
+              <a:rPr lang="en-US" sz="1300" dirty="0">
+                <a:solidFill>
+                  <a:srgbClr val="16323B"/>
+                </a:solidFill>
+                <a:latin typeface="Courier New" pitchFamily="34" charset="0"/>
+                <a:ea typeface="Courier New" pitchFamily="34" charset="-122"/>
+                <a:cs typeface="Courier New" pitchFamily="34" charset="-120"/>
+              </a:rPr>
+              <a:t>GET /v2/search/product?…&amp;customerCityId=99999</a:t>
+            </a:r>
+            <a:endParaRPr lang="en-US" sz="1300" dirty="0"/>
+          </a:p>
+        </p:txBody>
+      </p:sp>
+      <p:sp>
+        <p:nvSpPr>
+          <p:cNvPr id="14" name="Text 11"/>
+          <p:cNvSpPr txBox="1"/>
+          <p:nvPr/>
+        </p:nvSpPr>
+        <p:spPr>
+          <a:xfrm>
+            <a:off x="6629400" y="3246120"/>
+            <a:ext cx="5029200" cy="292608"/>
+          </a:xfrm>
+          <a:prstGeom prst="rect">
+            <a:avLst/>
+          </a:prstGeom>
+          <a:noFill/>
+          <a:ln/>
+        </p:spPr>
+        <p:txBody>
+          <a:bodyPr wrap="square" lIns="0" tIns="0" rIns="0" bIns="0" rtlCol="0" anchor="ctr"/>
+          <a:lstStyle/>
+          <a:p>
+            <a:pPr indent="0" marL="0">
+              <a:buNone/>
+            </a:pPr>
+            <a:r>
+              <a:rPr lang="en-US" sz="1300" b="1" dirty="0">
+                <a:solidFill>
+                  <a:srgbClr val="2BA79A"/>
+                </a:solidFill>
+                <a:latin typeface="Calibri" pitchFamily="34" charset="0"/>
+                <a:ea typeface="Calibri" pitchFamily="34" charset="-122"/>
+                <a:cs typeface="Calibri" pitchFamily="34" charset="-120"/>
+              </a:rPr>
+              <a:t>Ожидаемо</a:t>
+            </a:r>
+            <a:endParaRPr lang="en-US" sz="1300" dirty="0"/>
+          </a:p>
+        </p:txBody>
+      </p:sp>
+      <p:sp>
+        <p:nvSpPr>
+          <p:cNvPr id="15" name="Text 12"/>
+          <p:cNvSpPr txBox="1"/>
+          <p:nvPr/>
+        </p:nvSpPr>
+        <p:spPr>
+          <a:xfrm>
+            <a:off x="6629400" y="3538728"/>
+            <a:ext cx="5029200" cy="548640"/>
+          </a:xfrm>
+          <a:prstGeom prst="rect">
+            <a:avLst/>
+          </a:prstGeom>
+          <a:noFill/>
+          <a:ln/>
+        </p:spPr>
+        <p:txBody>
+          <a:bodyPr wrap="square" lIns="0" tIns="0" rIns="0" bIns="0" rtlCol="0" anchor="t"/>
+          <a:lstStyle/>
+          <a:p>
+            <a:pPr indent="0" marL="0">
+              <a:buNone/>
+            </a:pPr>
+            <a:r>
+              <a:rPr lang="en-US" sz="1600" dirty="0">
+                <a:solidFill>
+                  <a:srgbClr val="16323B"/>
+                </a:solidFill>
+                <a:latin typeface="Calibri" pitchFamily="34" charset="0"/>
+                <a:ea typeface="Calibri" pitchFamily="34" charset="-122"/>
+                <a:cs typeface="Calibri" pitchFamily="34" charset="-120"/>
+              </a:rPr>
+              <a:t>ошибка клиента 4xx: города нет в справочнике</a:t>
             </a:r>
             <a:endParaRPr lang="en-US" sz="1600" dirty="0"/>
           </a:p>
@@ -5105,30 +5136,69 @@
       </p:sp>
       <p:sp>
         <p:nvSpPr>
-          <p:cNvPr id="16" name="Text 14"/>
-          <p:cNvSpPr txBox="1"/>
-          <p:nvPr/>
-        </p:nvSpPr>
-        <p:spPr>
-          <a:xfrm>
-            <a:off x="6995160" y="3611880"/>
-            <a:ext cx="4526280" cy="822960"/>
-          </a:xfrm>
-          <a:prstGeom prst="rect">
-            <a:avLst/>
-          </a:prstGeom>
-          <a:noFill/>
-          <a:ln/>
-        </p:spPr>
-        <p:txBody>
-          <a:bodyPr wrap="square" lIns="0" tIns="0" rIns="0" bIns="0" rtlCol="0" anchor="ctr"/>
-          <a:lstStyle/>
-          <a:p>
-            <a:pPr indent="0" marL="0">
-              <a:buNone/>
-            </a:pPr>
-            <a:r>
-              <a:rPr lang="en-US" sz="1600" b="1" dirty="0">
+          <p:cNvPr id="16" name="Text 13"/>
+          <p:cNvSpPr txBox="1"/>
+          <p:nvPr/>
+        </p:nvSpPr>
+        <p:spPr>
+          <a:xfrm>
+            <a:off x="6629400" y="4114800"/>
+            <a:ext cx="5029200" cy="292608"/>
+          </a:xfrm>
+          <a:prstGeom prst="rect">
+            <a:avLst/>
+          </a:prstGeom>
+          <a:noFill/>
+          <a:ln/>
+        </p:spPr>
+        <p:txBody>
+          <a:bodyPr wrap="square" lIns="0" tIns="0" rIns="0" bIns="0" rtlCol="0" anchor="ctr"/>
+          <a:lstStyle/>
+          <a:p>
+            <a:pPr indent="0" marL="0">
+              <a:buNone/>
+            </a:pPr>
+            <a:r>
+              <a:rPr lang="en-US" sz="1300" b="1" dirty="0">
+                <a:solidFill>
+                  <a:srgbClr val="2BA79A"/>
+                </a:solidFill>
+                <a:latin typeface="Calibri" pitchFamily="34" charset="0"/>
+                <a:ea typeface="Calibri" pitchFamily="34" charset="-122"/>
+                <a:cs typeface="Calibri" pitchFamily="34" charset="-120"/>
+              </a:rPr>
+              <a:t>Фактически</a:t>
+            </a:r>
+            <a:endParaRPr lang="en-US" sz="1300" dirty="0"/>
+          </a:p>
+        </p:txBody>
+      </p:sp>
+      <p:sp>
+        <p:nvSpPr>
+          <p:cNvPr id="17" name="Text 14"/>
+          <p:cNvSpPr txBox="1"/>
+          <p:nvPr/>
+        </p:nvSpPr>
+        <p:spPr>
+          <a:xfrm>
+            <a:off x="6629400" y="4407408"/>
+            <a:ext cx="5029200" cy="548640"/>
+          </a:xfrm>
+          <a:prstGeom prst="rect">
+            <a:avLst/>
+          </a:prstGeom>
+          <a:noFill/>
+          <a:ln/>
+        </p:spPr>
+        <p:txBody>
+          <a:bodyPr wrap="square" lIns="0" tIns="0" rIns="0" bIns="0" rtlCol="0" anchor="t"/>
+          <a:lstStyle/>
+          <a:p>
+            <a:pPr indent="0" marL="0">
+              <a:buNone/>
+            </a:pPr>
+            <a:r>
+              <a:rPr lang="en-US" sz="1600" dirty="0">
                 <a:solidFill>
                   <a:srgbClr val="16323B"/>
                 </a:solidFill>
@@ -5136,153 +5206,77 @@
                 <a:ea typeface="Calibri" pitchFamily="34" charset="-122"/>
                 <a:cs typeface="Calibri" pitchFamily="34" charset="-120"/>
               </a:rPr>
-              <a:t>BR-001</a:t>
+              <a:t>500 «application error» на все 4 проверенных несуществующих id</a:t>
             </a:r>
             <a:endParaRPr lang="en-US" sz="1600" dirty="0"/>
           </a:p>
-          <a:p>
-            <a:pPr indent="0" marL="0">
-              <a:buNone/>
-            </a:pPr>
-            <a:r>
-              <a:rPr lang="en-US" sz="1400" dirty="0">
-                <a:solidFill>
-                  <a:srgbClr val="5A7179"/>
-                </a:solidFill>
-                <a:latin typeface="Calibri" pitchFamily="34" charset="0"/>
-                <a:ea typeface="Calibri" pitchFamily="34" charset="-122"/>
-                <a:cs typeface="Calibri" pitchFamily="34" charset="-120"/>
-              </a:rPr>
-              <a:t>затемнить фон бейджа или сделать текст крупнее и жирнее</a:t>
-            </a:r>
-            <a:endParaRPr lang="en-US" sz="1600" dirty="0"/>
-          </a:p>
-        </p:txBody>
-      </p:sp>
-      <p:sp>
-        <p:nvSpPr>
-          <p:cNvPr id="17" name="Shape 15"/>
-          <p:cNvSpPr/>
-          <p:nvPr/>
-        </p:nvSpPr>
-        <p:spPr>
-          <a:xfrm>
-            <a:off x="6126480" y="4709160"/>
-            <a:ext cx="5532120" cy="1005840"/>
-          </a:xfrm>
-          <a:prstGeom prst="roundRect">
-            <a:avLst>
-              <a:gd name="adj" fmla="val 20000"/>
-            </a:avLst>
-          </a:prstGeom>
-          <a:solidFill>
-            <a:srgbClr val="FFFFFF"/>
-          </a:solidFill>
-          <a:ln w="12700">
-            <a:solidFill>
-              <a:srgbClr val="FFFFFF"/>
-            </a:solidFill>
-            <a:prstDash val="solid"/>
-          </a:ln>
-          <a:effectLst>
-            <a:outerShdw sx="100000" sy="100000" kx="0" ky="0" algn="bl" rotWithShape="0" blurRad="101600" dist="25400" dir="5400000">
-              <a:srgbClr val="0B3C49">
-                <a:alpha val="12000"/>
-              </a:srgbClr>
-            </a:outerShdw>
-          </a:effectLst>
-        </p:spPr>
-      </p:sp>
-      <p:sp>
-        <p:nvSpPr>
-          <p:cNvPr id="18" name="Shape 16"/>
-          <p:cNvSpPr/>
-          <p:nvPr/>
-        </p:nvSpPr>
-        <p:spPr>
-          <a:xfrm>
-            <a:off x="6355080" y="4983480"/>
-            <a:ext cx="457200" cy="457200"/>
-          </a:xfrm>
-          <a:prstGeom prst="ellipse">
-            <a:avLst/>
-          </a:prstGeom>
-          <a:solidFill>
-            <a:srgbClr val="2F7D4F"/>
-          </a:solidFill>
-          <a:ln w="12700">
-            <a:solidFill>
-              <a:srgbClr val="2F7D4F"/>
-            </a:solidFill>
-            <a:prstDash val="solid"/>
-          </a:ln>
-        </p:spPr>
-      </p:sp>
-      <p:sp>
-        <p:nvSpPr>
-          <p:cNvPr id="19" name="Text 17"/>
-          <p:cNvSpPr txBox="1"/>
-          <p:nvPr/>
-        </p:nvSpPr>
-        <p:spPr>
-          <a:xfrm>
-            <a:off x="6355080" y="4983480"/>
-            <a:ext cx="457200" cy="457200"/>
-          </a:xfrm>
-          <a:prstGeom prst="rect">
-            <a:avLst/>
-          </a:prstGeom>
-          <a:noFill/>
-          <a:ln/>
-        </p:spPr>
-        <p:txBody>
-          <a:bodyPr wrap="square" lIns="0" tIns="0" rIns="0" bIns="0" rtlCol="0" anchor="ctr"/>
-          <a:lstStyle/>
-          <a:p>
-            <a:pPr algn="ctr" indent="0" marL="0">
-              <a:buNone/>
-            </a:pPr>
-            <a:r>
-              <a:rPr lang="en-US" sz="1600" b="1" dirty="0">
-                <a:solidFill>
-                  <a:srgbClr val="FFFFFF"/>
-                </a:solidFill>
-                <a:latin typeface="Calibri" pitchFamily="34" charset="0"/>
-                <a:ea typeface="Calibri" pitchFamily="34" charset="-122"/>
-                <a:cs typeface="Calibri" pitchFamily="34" charset="-120"/>
-              </a:rPr>
-              <a:t>3</a:t>
-            </a:r>
-            <a:endParaRPr lang="en-US" sz="1600" dirty="0"/>
-          </a:p>
-        </p:txBody>
-      </p:sp>
-      <p:sp>
-        <p:nvSpPr>
-          <p:cNvPr id="20" name="Text 18"/>
-          <p:cNvSpPr txBox="1"/>
-          <p:nvPr/>
-        </p:nvSpPr>
-        <p:spPr>
-          <a:xfrm>
-            <a:off x="6995160" y="4800600"/>
-            <a:ext cx="4526280" cy="822960"/>
-          </a:xfrm>
-          <a:prstGeom prst="rect">
-            <a:avLst/>
-          </a:prstGeom>
-          <a:noFill/>
-          <a:ln/>
-        </p:spPr>
-        <p:txBody>
-          <a:bodyPr wrap="square" lIns="0" tIns="0" rIns="0" bIns="0" rtlCol="0" anchor="ctr"/>
-          <a:lstStyle/>
-          <a:p>
-            <a:pPr indent="0" marL="0">
-              <a:buNone/>
-            </a:pPr>
-            <a:r>
-              <a:rPr lang="en-US" sz="1600" b="1" dirty="0">
+        </p:txBody>
+      </p:sp>
+      <p:sp>
+        <p:nvSpPr>
+          <p:cNvPr id="18" name="Text 15"/>
+          <p:cNvSpPr txBox="1"/>
+          <p:nvPr/>
+        </p:nvSpPr>
+        <p:spPr>
+          <a:xfrm>
+            <a:off x="6629400" y="4983480"/>
+            <a:ext cx="5029200" cy="292608"/>
+          </a:xfrm>
+          <a:prstGeom prst="rect">
+            <a:avLst/>
+          </a:prstGeom>
+          <a:noFill/>
+          <a:ln/>
+        </p:spPr>
+        <p:txBody>
+          <a:bodyPr wrap="square" lIns="0" tIns="0" rIns="0" bIns="0" rtlCol="0" anchor="ctr"/>
+          <a:lstStyle/>
+          <a:p>
+            <a:pPr indent="0" marL="0">
+              <a:buNone/>
+            </a:pPr>
+            <a:r>
+              <a:rPr lang="en-US" sz="1300" b="1" dirty="0">
+                <a:solidFill>
+                  <a:srgbClr val="2BA79A"/>
+                </a:solidFill>
+                <a:latin typeface="Calibri" pitchFamily="34" charset="0"/>
+                <a:ea typeface="Calibri" pitchFamily="34" charset="-122"/>
+                <a:cs typeface="Calibri" pitchFamily="34" charset="-120"/>
+              </a:rPr>
+              <a:t>Почему важно</a:t>
+            </a:r>
+            <a:endParaRPr lang="en-US" sz="1300" dirty="0"/>
+          </a:p>
+        </p:txBody>
+      </p:sp>
+      <p:sp>
+        <p:nvSpPr>
+          <p:cNvPr id="19" name="Text 16"/>
+          <p:cNvSpPr txBox="1"/>
+          <p:nvPr/>
+        </p:nvSpPr>
+        <p:spPr>
+          <a:xfrm>
+            <a:off x="6629400" y="5276088"/>
+            <a:ext cx="5029200" cy="548640"/>
+          </a:xfrm>
+          <a:prstGeom prst="rect">
+            <a:avLst/>
+          </a:prstGeom>
+          <a:noFill/>
+          <a:ln/>
+        </p:spPr>
+        <p:txBody>
+          <a:bodyPr wrap="square" lIns="0" tIns="0" rIns="0" bIns="0" rtlCol="0" anchor="t"/>
+          <a:lstStyle/>
+          <a:p>
+            <a:pPr indent="0" marL="0">
+              <a:buNone/>
+            </a:pPr>
+            <a:r>
+              <a:rPr lang="en-US" sz="1600" dirty="0">
                 <a:solidFill>
                   <a:srgbClr val="16323B"/>
                 </a:solidFill>
@@ -5290,24 +5284,7 @@
                 <a:ea typeface="Calibri" pitchFamily="34" charset="-122"/>
                 <a:cs typeface="Calibri" pitchFamily="34" charset="-120"/>
               </a:rPr>
-              <a:t>Регрессия</a:t>
-            </a:r>
-            <a:endParaRPr lang="en-US" sz="1600" dirty="0"/>
-          </a:p>
-          <a:p>
-            <a:pPr indent="0" marL="0">
-              <a:buNone/>
-            </a:pPr>
-            <a:r>
-              <a:rPr lang="en-US" sz="1400" dirty="0">
-                <a:solidFill>
-                  <a:srgbClr val="5A7179"/>
-                </a:solidFill>
-                <a:latin typeface="Calibri" pitchFamily="34" charset="0"/>
-                <a:ea typeface="Calibri" pitchFamily="34" charset="-122"/>
-                <a:cs typeface="Calibri" pitchFamily="34" charset="-120"/>
-              </a:rPr>
-              <a:t>добавить автопроверки доступности и Core Web Vitals, чтобы дефекты не вернулись</a:t>
+              <a:t>поиск ломается вместо понятной ошибки, 500 засоряют мониторинг</a:t>
             </a:r>
             <a:endParaRPr lang="en-US" sz="1600" dirty="0"/>
           </a:p>
@@ -5360,6 +5337,798 @@
         </p:nvSpPr>
         <p:spPr>
           <a:xfrm>
+            <a:off x="548640" y="320040"/>
+            <a:ext cx="8229600" cy="320040"/>
+          </a:xfrm>
+          <a:prstGeom prst="rect">
+            <a:avLst/>
+          </a:prstGeom>
+          <a:noFill/>
+          <a:ln/>
+        </p:spPr>
+        <p:txBody>
+          <a:bodyPr wrap="square" lIns="0" tIns="0" rIns="0" bIns="0" rtlCol="0" anchor="ctr"/>
+          <a:lstStyle/>
+          <a:p>
+            <a:pPr indent="0" marL="0">
+              <a:buNone/>
+            </a:pPr>
+            <a:r>
+              <a:rPr lang="en-US" sz="1200" b="1" spc="300" kern="0" dirty="0">
+                <a:solidFill>
+                  <a:srgbClr val="2BA79A"/>
+                </a:solidFill>
+                <a:latin typeface="Calibri" pitchFamily="34" charset="0"/>
+                <a:ea typeface="Calibri" pitchFamily="34" charset="-122"/>
+                <a:cs typeface="Calibri" pitchFamily="34" charset="-120"/>
+              </a:rPr>
+              <a:t>13 · ВЫВОДЫ</a:t>
+            </a:r>
+            <a:endParaRPr lang="en-US" sz="1200" dirty="0"/>
+          </a:p>
+        </p:txBody>
+      </p:sp>
+      <p:sp>
+        <p:nvSpPr>
+          <p:cNvPr id="3" name="Text 1"/>
+          <p:cNvSpPr txBox="1"/>
+          <p:nvPr/>
+        </p:nvSpPr>
+        <p:spPr>
+          <a:xfrm>
+            <a:off x="548640" y="640080"/>
+            <a:ext cx="9326880" cy="731520"/>
+          </a:xfrm>
+          <a:prstGeom prst="rect">
+            <a:avLst/>
+          </a:prstGeom>
+          <a:noFill/>
+          <a:ln/>
+        </p:spPr>
+        <p:txBody>
+          <a:bodyPr wrap="square" lIns="0" tIns="0" rIns="0" bIns="0" rtlCol="0" anchor="ctr"/>
+          <a:lstStyle/>
+          <a:p>
+            <a:pPr indent="0" marL="0">
+              <a:buNone/>
+            </a:pPr>
+            <a:r>
+              <a:rPr lang="en-US" sz="3400" b="1" dirty="0">
+                <a:solidFill>
+                  <a:srgbClr val="0B3C49"/>
+                </a:solidFill>
+                <a:latin typeface="Cambria" pitchFamily="34" charset="0"/>
+                <a:ea typeface="Cambria" pitchFamily="34" charset="-122"/>
+                <a:cs typeface="Cambria" pitchFamily="34" charset="-120"/>
+              </a:rPr>
+              <a:t>Что в итоге</a:t>
+            </a:r>
+            <a:endParaRPr lang="en-US" sz="3400" dirty="0"/>
+          </a:p>
+        </p:txBody>
+      </p:sp>
+      <p:sp>
+        <p:nvSpPr>
+          <p:cNvPr id="4" name="Text 2"/>
+          <p:cNvSpPr txBox="1"/>
+          <p:nvPr/>
+        </p:nvSpPr>
+        <p:spPr>
+          <a:xfrm>
+            <a:off x="11155680" y="6355080"/>
+            <a:ext cx="548640" cy="274320"/>
+          </a:xfrm>
+          <a:prstGeom prst="rect">
+            <a:avLst/>
+          </a:prstGeom>
+          <a:noFill/>
+          <a:ln/>
+        </p:spPr>
+        <p:txBody>
+          <a:bodyPr wrap="square" lIns="0" tIns="0" rIns="0" bIns="0" rtlCol="0" anchor="ctr"/>
+          <a:lstStyle/>
+          <a:p>
+            <a:pPr algn="r" indent="0" marL="0">
+              <a:buNone/>
+            </a:pPr>
+            <a:r>
+              <a:rPr lang="en-US" sz="1100" dirty="0">
+                <a:solidFill>
+                  <a:srgbClr val="5A7179"/>
+                </a:solidFill>
+                <a:latin typeface="Calibri" pitchFamily="34" charset="0"/>
+                <a:ea typeface="Calibri" pitchFamily="34" charset="-122"/>
+                <a:cs typeface="Calibri" pitchFamily="34" charset="-120"/>
+              </a:rPr>
+              <a:t>14</a:t>
+            </a:r>
+            <a:endParaRPr lang="en-US" sz="1100" dirty="0"/>
+          </a:p>
+        </p:txBody>
+      </p:sp>
+      <p:sp>
+        <p:nvSpPr>
+          <p:cNvPr id="5" name="Shape 3"/>
+          <p:cNvSpPr/>
+          <p:nvPr/>
+        </p:nvSpPr>
+        <p:spPr>
+          <a:xfrm>
+            <a:off x="548640" y="1691640"/>
+            <a:ext cx="5120640" cy="4297680"/>
+          </a:xfrm>
+          <a:prstGeom prst="roundRect">
+            <a:avLst>
+              <a:gd name="adj" fmla="val 4681"/>
+            </a:avLst>
+          </a:prstGeom>
+          <a:solidFill>
+            <a:srgbClr val="0B3C49"/>
+          </a:solidFill>
+          <a:ln w="12700">
+            <a:solidFill>
+              <a:srgbClr val="0B3C49"/>
+            </a:solidFill>
+            <a:prstDash val="solid"/>
+          </a:ln>
+          <a:effectLst>
+            <a:outerShdw sx="100000" sy="100000" kx="0" ky="0" algn="bl" rotWithShape="0" blurRad="101600" dist="25400" dir="5400000">
+              <a:srgbClr val="0B3C49">
+                <a:alpha val="12000"/>
+              </a:srgbClr>
+            </a:outerShdw>
+          </a:effectLst>
+        </p:spPr>
+      </p:sp>
+      <p:sp>
+        <p:nvSpPr>
+          <p:cNvPr id="6" name="Text 4"/>
+          <p:cNvSpPr txBox="1"/>
+          <p:nvPr/>
+        </p:nvSpPr>
+        <p:spPr>
+          <a:xfrm>
+            <a:off x="868680" y="1965960"/>
+            <a:ext cx="4572000" cy="914400"/>
+          </a:xfrm>
+          <a:prstGeom prst="rect">
+            <a:avLst/>
+          </a:prstGeom>
+          <a:noFill/>
+          <a:ln/>
+        </p:spPr>
+        <p:txBody>
+          <a:bodyPr wrap="square" lIns="0" tIns="0" rIns="0" bIns="0" rtlCol="0" anchor="t"/>
+          <a:lstStyle/>
+          <a:p>
+            <a:pPr indent="0" marL="0">
+              <a:buNone/>
+            </a:pPr>
+            <a:r>
+              <a:rPr lang="en-US" sz="2400" b="1" dirty="0">
+                <a:solidFill>
+                  <a:srgbClr val="FFFFFF"/>
+                </a:solidFill>
+                <a:latin typeface="Cambria" pitchFamily="34" charset="0"/>
+                <a:ea typeface="Cambria" pitchFamily="34" charset="-122"/>
+                <a:cs typeface="Cambria" pitchFamily="34" charset="-120"/>
+              </a:rPr>
+              <a:t>Качество — удовлетворительное</a:t>
+            </a:r>
+            <a:endParaRPr lang="en-US" sz="2400" dirty="0"/>
+          </a:p>
+        </p:txBody>
+      </p:sp>
+      <p:sp>
+        <p:nvSpPr>
+          <p:cNvPr id="7" name="Text 5"/>
+          <p:cNvSpPr txBox="1"/>
+          <p:nvPr/>
+        </p:nvSpPr>
+        <p:spPr>
+          <a:xfrm>
+            <a:off x="868680" y="2926080"/>
+            <a:ext cx="4526280" cy="2926080"/>
+          </a:xfrm>
+          <a:prstGeom prst="rect">
+            <a:avLst/>
+          </a:prstGeom>
+          <a:noFill/>
+          <a:ln/>
+        </p:spPr>
+        <p:txBody>
+          <a:bodyPr wrap="square" lIns="0" tIns="0" rIns="0" bIns="0" rtlCol="0" anchor="t"/>
+          <a:lstStyle/>
+          <a:p>
+            <a:pPr indent="0" marL="0">
+              <a:buNone/>
+            </a:pPr>
+            <a:r>
+              <a:rPr lang="en-US" sz="1600" dirty="0">
+                <a:solidFill>
+                  <a:srgbClr val="DCEFEC"/>
+                </a:solidFill>
+                <a:latin typeface="Calibri" pitchFamily="34" charset="0"/>
+                <a:ea typeface="Calibri" pitchFamily="34" charset="-122"/>
+                <a:cs typeface="Calibri" pitchFamily="34" charset="-120"/>
+              </a:rPr>
+              <a:t>Поиск и карточка товара работают в интерфейсе и через API, сервис правильно валидирует большинство неверных запросов.</a:t>
+            </a:r>
+            <a:endParaRPr lang="en-US" sz="1600" dirty="0"/>
+          </a:p>
+          <a:p>
+            <a:pPr indent="0" marL="0">
+              <a:buNone/>
+            </a:pPr>
+            <a:endParaRPr lang="en-US" sz="1600" dirty="0"/>
+          </a:p>
+          <a:p>
+            <a:pPr indent="0" marL="0">
+              <a:buNone/>
+            </a:pPr>
+            <a:r>
+              <a:rPr lang="en-US" sz="1600" dirty="0">
+                <a:solidFill>
+                  <a:srgbClr val="DCEFEC"/>
+                </a:solidFill>
+                <a:latin typeface="Calibri" pitchFamily="34" charset="0"/>
+                <a:ea typeface="Calibri" pitchFamily="34" charset="-122"/>
+                <a:cs typeface="Calibri" pitchFamily="34" charset="-120"/>
+              </a:rPr>
+              <a:t>Больше всего пользователю мешают сдвиги страницы при загрузке (BR-002). В API несуществующий город роняет поиск с 500 (BR-003). Контраст бейджей (BR-001) — вопрос доступности.</a:t>
+            </a:r>
+            <a:endParaRPr lang="en-US" sz="1600" dirty="0"/>
+          </a:p>
+        </p:txBody>
+      </p:sp>
+      <p:sp>
+        <p:nvSpPr>
+          <p:cNvPr id="8" name="Text 6"/>
+          <p:cNvSpPr txBox="1"/>
+          <p:nvPr/>
+        </p:nvSpPr>
+        <p:spPr>
+          <a:xfrm>
+            <a:off x="6126480" y="1691640"/>
+            <a:ext cx="5486400" cy="457200"/>
+          </a:xfrm>
+          <a:prstGeom prst="rect">
+            <a:avLst/>
+          </a:prstGeom>
+          <a:noFill/>
+          <a:ln/>
+        </p:spPr>
+        <p:txBody>
+          <a:bodyPr wrap="square" lIns="0" tIns="0" rIns="0" bIns="0" rtlCol="0" anchor="ctr"/>
+          <a:lstStyle/>
+          <a:p>
+            <a:pPr indent="0" marL="0">
+              <a:buNone/>
+            </a:pPr>
+            <a:r>
+              <a:rPr lang="en-US" sz="2200" b="1" dirty="0">
+                <a:solidFill>
+                  <a:srgbClr val="0B3C49"/>
+                </a:solidFill>
+                <a:latin typeface="Cambria" pitchFamily="34" charset="0"/>
+                <a:ea typeface="Cambria" pitchFamily="34" charset="-122"/>
+                <a:cs typeface="Cambria" pitchFamily="34" charset="-120"/>
+              </a:rPr>
+              <a:t>Что бы я исправил</a:t>
+            </a:r>
+            <a:endParaRPr lang="en-US" sz="2200" dirty="0"/>
+          </a:p>
+        </p:txBody>
+      </p:sp>
+      <p:sp>
+        <p:nvSpPr>
+          <p:cNvPr id="9" name="Shape 7"/>
+          <p:cNvSpPr/>
+          <p:nvPr/>
+        </p:nvSpPr>
+        <p:spPr>
+          <a:xfrm>
+            <a:off x="6126480" y="2331720"/>
+            <a:ext cx="5532120" cy="1005840"/>
+          </a:xfrm>
+          <a:prstGeom prst="roundRect">
+            <a:avLst>
+              <a:gd name="adj" fmla="val 20000"/>
+            </a:avLst>
+          </a:prstGeom>
+          <a:solidFill>
+            <a:srgbClr val="FFFFFF"/>
+          </a:solidFill>
+          <a:ln w="12700">
+            <a:solidFill>
+              <a:srgbClr val="FFFFFF"/>
+            </a:solidFill>
+            <a:prstDash val="solid"/>
+          </a:ln>
+          <a:effectLst>
+            <a:outerShdw sx="100000" sy="100000" kx="0" ky="0" algn="bl" rotWithShape="0" blurRad="101600" dist="25400" dir="5400000">
+              <a:srgbClr val="0B3C49">
+                <a:alpha val="12000"/>
+              </a:srgbClr>
+            </a:outerShdw>
+          </a:effectLst>
+        </p:spPr>
+      </p:sp>
+      <p:sp>
+        <p:nvSpPr>
+          <p:cNvPr id="10" name="Shape 8"/>
+          <p:cNvSpPr/>
+          <p:nvPr/>
+        </p:nvSpPr>
+        <p:spPr>
+          <a:xfrm>
+            <a:off x="6355080" y="2606040"/>
+            <a:ext cx="457200" cy="457200"/>
+          </a:xfrm>
+          <a:prstGeom prst="ellipse">
+            <a:avLst/>
+          </a:prstGeom>
+          <a:solidFill>
+            <a:srgbClr val="E8692E"/>
+          </a:solidFill>
+          <a:ln w="12700">
+            <a:solidFill>
+              <a:srgbClr val="E8692E"/>
+            </a:solidFill>
+            <a:prstDash val="solid"/>
+          </a:ln>
+        </p:spPr>
+      </p:sp>
+      <p:sp>
+        <p:nvSpPr>
+          <p:cNvPr id="11" name="Text 9"/>
+          <p:cNvSpPr txBox="1"/>
+          <p:nvPr/>
+        </p:nvSpPr>
+        <p:spPr>
+          <a:xfrm>
+            <a:off x="6355080" y="2606040"/>
+            <a:ext cx="457200" cy="457200"/>
+          </a:xfrm>
+          <a:prstGeom prst="rect">
+            <a:avLst/>
+          </a:prstGeom>
+          <a:noFill/>
+          <a:ln/>
+        </p:spPr>
+        <p:txBody>
+          <a:bodyPr wrap="square" lIns="0" tIns="0" rIns="0" bIns="0" rtlCol="0" anchor="ctr"/>
+          <a:lstStyle/>
+          <a:p>
+            <a:pPr algn="ctr" indent="0" marL="0">
+              <a:buNone/>
+            </a:pPr>
+            <a:r>
+              <a:rPr lang="en-US" sz="1600" b="1" dirty="0">
+                <a:solidFill>
+                  <a:srgbClr val="FFFFFF"/>
+                </a:solidFill>
+                <a:latin typeface="Calibri" pitchFamily="34" charset="0"/>
+                <a:ea typeface="Calibri" pitchFamily="34" charset="-122"/>
+                <a:cs typeface="Calibri" pitchFamily="34" charset="-120"/>
+              </a:rPr>
+              <a:t>1</a:t>
+            </a:r>
+            <a:endParaRPr lang="en-US" sz="1600" dirty="0"/>
+          </a:p>
+        </p:txBody>
+      </p:sp>
+      <p:sp>
+        <p:nvSpPr>
+          <p:cNvPr id="12" name="Text 10"/>
+          <p:cNvSpPr txBox="1"/>
+          <p:nvPr/>
+        </p:nvSpPr>
+        <p:spPr>
+          <a:xfrm>
+            <a:off x="6995160" y="2423160"/>
+            <a:ext cx="4526280" cy="822960"/>
+          </a:xfrm>
+          <a:prstGeom prst="rect">
+            <a:avLst/>
+          </a:prstGeom>
+          <a:noFill/>
+          <a:ln/>
+        </p:spPr>
+        <p:txBody>
+          <a:bodyPr wrap="square" lIns="0" tIns="0" rIns="0" bIns="0" rtlCol="0" anchor="ctr"/>
+          <a:lstStyle/>
+          <a:p>
+            <a:pPr indent="0" marL="0">
+              <a:buNone/>
+            </a:pPr>
+            <a:r>
+              <a:rPr lang="en-US" sz="1600" b="1" dirty="0">
+                <a:solidFill>
+                  <a:srgbClr val="16323B"/>
+                </a:solidFill>
+                <a:latin typeface="Calibri" pitchFamily="34" charset="0"/>
+                <a:ea typeface="Calibri" pitchFamily="34" charset="-122"/>
+                <a:cs typeface="Calibri" pitchFamily="34" charset="-120"/>
+              </a:rPr>
+              <a:t>BR-002 — в первую очередь</a:t>
+            </a:r>
+            <a:endParaRPr lang="en-US" sz="1600" dirty="0"/>
+          </a:p>
+          <a:p>
+            <a:pPr indent="0" marL="0">
+              <a:buNone/>
+            </a:pPr>
+            <a:r>
+              <a:rPr lang="en-US" sz="1400" dirty="0">
+                <a:solidFill>
+                  <a:srgbClr val="5A7179"/>
+                </a:solidFill>
+                <a:latin typeface="Calibri" pitchFamily="34" charset="0"/>
+                <a:ea typeface="Calibri" pitchFamily="34" charset="-122"/>
+                <a:cs typeface="Calibri" pitchFamily="34" charset="-120"/>
+              </a:rPr>
+              <a:t>заранее резервировать место под баннеры и картинки, задавать им размеры</a:t>
+            </a:r>
+            <a:endParaRPr lang="en-US" sz="1600" dirty="0"/>
+          </a:p>
+        </p:txBody>
+      </p:sp>
+      <p:sp>
+        <p:nvSpPr>
+          <p:cNvPr id="13" name="Shape 11"/>
+          <p:cNvSpPr/>
+          <p:nvPr/>
+        </p:nvSpPr>
+        <p:spPr>
+          <a:xfrm>
+            <a:off x="6126480" y="3520440"/>
+            <a:ext cx="5532120" cy="1005840"/>
+          </a:xfrm>
+          <a:prstGeom prst="roundRect">
+            <a:avLst>
+              <a:gd name="adj" fmla="val 20000"/>
+            </a:avLst>
+          </a:prstGeom>
+          <a:solidFill>
+            <a:srgbClr val="FFFFFF"/>
+          </a:solidFill>
+          <a:ln w="12700">
+            <a:solidFill>
+              <a:srgbClr val="FFFFFF"/>
+            </a:solidFill>
+            <a:prstDash val="solid"/>
+          </a:ln>
+          <a:effectLst>
+            <a:outerShdw sx="100000" sy="100000" kx="0" ky="0" algn="bl" rotWithShape="0" blurRad="101600" dist="25400" dir="5400000">
+              <a:srgbClr val="0B3C49">
+                <a:alpha val="12000"/>
+              </a:srgbClr>
+            </a:outerShdw>
+          </a:effectLst>
+        </p:spPr>
+      </p:sp>
+      <p:sp>
+        <p:nvSpPr>
+          <p:cNvPr id="14" name="Shape 12"/>
+          <p:cNvSpPr/>
+          <p:nvPr/>
+        </p:nvSpPr>
+        <p:spPr>
+          <a:xfrm>
+            <a:off x="6355080" y="3794760"/>
+            <a:ext cx="457200" cy="457200"/>
+          </a:xfrm>
+          <a:prstGeom prst="ellipse">
+            <a:avLst/>
+          </a:prstGeom>
+          <a:solidFill>
+            <a:srgbClr val="2BA79A"/>
+          </a:solidFill>
+          <a:ln w="12700">
+            <a:solidFill>
+              <a:srgbClr val="2BA79A"/>
+            </a:solidFill>
+            <a:prstDash val="solid"/>
+          </a:ln>
+        </p:spPr>
+      </p:sp>
+      <p:sp>
+        <p:nvSpPr>
+          <p:cNvPr id="15" name="Text 13"/>
+          <p:cNvSpPr txBox="1"/>
+          <p:nvPr/>
+        </p:nvSpPr>
+        <p:spPr>
+          <a:xfrm>
+            <a:off x="6355080" y="3794760"/>
+            <a:ext cx="457200" cy="457200"/>
+          </a:xfrm>
+          <a:prstGeom prst="rect">
+            <a:avLst/>
+          </a:prstGeom>
+          <a:noFill/>
+          <a:ln/>
+        </p:spPr>
+        <p:txBody>
+          <a:bodyPr wrap="square" lIns="0" tIns="0" rIns="0" bIns="0" rtlCol="0" anchor="ctr"/>
+          <a:lstStyle/>
+          <a:p>
+            <a:pPr algn="ctr" indent="0" marL="0">
+              <a:buNone/>
+            </a:pPr>
+            <a:r>
+              <a:rPr lang="en-US" sz="1600" b="1" dirty="0">
+                <a:solidFill>
+                  <a:srgbClr val="FFFFFF"/>
+                </a:solidFill>
+                <a:latin typeface="Calibri" pitchFamily="34" charset="0"/>
+                <a:ea typeface="Calibri" pitchFamily="34" charset="-122"/>
+                <a:cs typeface="Calibri" pitchFamily="34" charset="-120"/>
+              </a:rPr>
+              <a:t>2</a:t>
+            </a:r>
+            <a:endParaRPr lang="en-US" sz="1600" dirty="0"/>
+          </a:p>
+        </p:txBody>
+      </p:sp>
+      <p:sp>
+        <p:nvSpPr>
+          <p:cNvPr id="16" name="Text 14"/>
+          <p:cNvSpPr txBox="1"/>
+          <p:nvPr/>
+        </p:nvSpPr>
+        <p:spPr>
+          <a:xfrm>
+            <a:off x="6995160" y="3611880"/>
+            <a:ext cx="4526280" cy="822960"/>
+          </a:xfrm>
+          <a:prstGeom prst="rect">
+            <a:avLst/>
+          </a:prstGeom>
+          <a:noFill/>
+          <a:ln/>
+        </p:spPr>
+        <p:txBody>
+          <a:bodyPr wrap="square" lIns="0" tIns="0" rIns="0" bIns="0" rtlCol="0" anchor="ctr"/>
+          <a:lstStyle/>
+          <a:p>
+            <a:pPr indent="0" marL="0">
+              <a:buNone/>
+            </a:pPr>
+            <a:r>
+              <a:rPr lang="en-US" sz="1600" b="1" dirty="0">
+                <a:solidFill>
+                  <a:srgbClr val="16323B"/>
+                </a:solidFill>
+                <a:latin typeface="Calibri" pitchFamily="34" charset="0"/>
+                <a:ea typeface="Calibri" pitchFamily="34" charset="-122"/>
+                <a:cs typeface="Calibri" pitchFamily="34" charset="-120"/>
+              </a:rPr>
+              <a:t>BR-003</a:t>
+            </a:r>
+            <a:endParaRPr lang="en-US" sz="1600" dirty="0"/>
+          </a:p>
+          <a:p>
+            <a:pPr indent="0" marL="0">
+              <a:buNone/>
+            </a:pPr>
+            <a:r>
+              <a:rPr lang="en-US" sz="1400" dirty="0">
+                <a:solidFill>
+                  <a:srgbClr val="5A7179"/>
+                </a:solidFill>
+                <a:latin typeface="Calibri" pitchFamily="34" charset="0"/>
+                <a:ea typeface="Calibri" pitchFamily="34" charset="-122"/>
+                <a:cs typeface="Calibri" pitchFamily="34" charset="-120"/>
+              </a:rPr>
+              <a:t>проверять customerCityId по справочнику и отвечать 404 или 422</a:t>
+            </a:r>
+            <a:endParaRPr lang="en-US" sz="1600" dirty="0"/>
+          </a:p>
+        </p:txBody>
+      </p:sp>
+      <p:sp>
+        <p:nvSpPr>
+          <p:cNvPr id="17" name="Shape 15"/>
+          <p:cNvSpPr/>
+          <p:nvPr/>
+        </p:nvSpPr>
+        <p:spPr>
+          <a:xfrm>
+            <a:off x="6126480" y="4709160"/>
+            <a:ext cx="5532120" cy="1005840"/>
+          </a:xfrm>
+          <a:prstGeom prst="roundRect">
+            <a:avLst>
+              <a:gd name="adj" fmla="val 20000"/>
+            </a:avLst>
+          </a:prstGeom>
+          <a:solidFill>
+            <a:srgbClr val="FFFFFF"/>
+          </a:solidFill>
+          <a:ln w="12700">
+            <a:solidFill>
+              <a:srgbClr val="FFFFFF"/>
+            </a:solidFill>
+            <a:prstDash val="solid"/>
+          </a:ln>
+          <a:effectLst>
+            <a:outerShdw sx="100000" sy="100000" kx="0" ky="0" algn="bl" rotWithShape="0" blurRad="101600" dist="25400" dir="5400000">
+              <a:srgbClr val="0B3C49">
+                <a:alpha val="12000"/>
+              </a:srgbClr>
+            </a:outerShdw>
+          </a:effectLst>
+        </p:spPr>
+      </p:sp>
+      <p:sp>
+        <p:nvSpPr>
+          <p:cNvPr id="18" name="Shape 16"/>
+          <p:cNvSpPr/>
+          <p:nvPr/>
+        </p:nvSpPr>
+        <p:spPr>
+          <a:xfrm>
+            <a:off x="6355080" y="4983480"/>
+            <a:ext cx="457200" cy="457200"/>
+          </a:xfrm>
+          <a:prstGeom prst="ellipse">
+            <a:avLst/>
+          </a:prstGeom>
+          <a:solidFill>
+            <a:srgbClr val="2F7D4F"/>
+          </a:solidFill>
+          <a:ln w="12700">
+            <a:solidFill>
+              <a:srgbClr val="2F7D4F"/>
+            </a:solidFill>
+            <a:prstDash val="solid"/>
+          </a:ln>
+        </p:spPr>
+      </p:sp>
+      <p:sp>
+        <p:nvSpPr>
+          <p:cNvPr id="19" name="Text 17"/>
+          <p:cNvSpPr txBox="1"/>
+          <p:nvPr/>
+        </p:nvSpPr>
+        <p:spPr>
+          <a:xfrm>
+            <a:off x="6355080" y="4983480"/>
+            <a:ext cx="457200" cy="457200"/>
+          </a:xfrm>
+          <a:prstGeom prst="rect">
+            <a:avLst/>
+          </a:prstGeom>
+          <a:noFill/>
+          <a:ln/>
+        </p:spPr>
+        <p:txBody>
+          <a:bodyPr wrap="square" lIns="0" tIns="0" rIns="0" bIns="0" rtlCol="0" anchor="ctr"/>
+          <a:lstStyle/>
+          <a:p>
+            <a:pPr algn="ctr" indent="0" marL="0">
+              <a:buNone/>
+            </a:pPr>
+            <a:r>
+              <a:rPr lang="en-US" sz="1600" b="1" dirty="0">
+                <a:solidFill>
+                  <a:srgbClr val="FFFFFF"/>
+                </a:solidFill>
+                <a:latin typeface="Calibri" pitchFamily="34" charset="0"/>
+                <a:ea typeface="Calibri" pitchFamily="34" charset="-122"/>
+                <a:cs typeface="Calibri" pitchFamily="34" charset="-120"/>
+              </a:rPr>
+              <a:t>3</a:t>
+            </a:r>
+            <a:endParaRPr lang="en-US" sz="1600" dirty="0"/>
+          </a:p>
+        </p:txBody>
+      </p:sp>
+      <p:sp>
+        <p:nvSpPr>
+          <p:cNvPr id="20" name="Text 18"/>
+          <p:cNvSpPr txBox="1"/>
+          <p:nvPr/>
+        </p:nvSpPr>
+        <p:spPr>
+          <a:xfrm>
+            <a:off x="6995160" y="4800600"/>
+            <a:ext cx="4526280" cy="822960"/>
+          </a:xfrm>
+          <a:prstGeom prst="rect">
+            <a:avLst/>
+          </a:prstGeom>
+          <a:noFill/>
+          <a:ln/>
+        </p:spPr>
+        <p:txBody>
+          <a:bodyPr wrap="square" lIns="0" tIns="0" rIns="0" bIns="0" rtlCol="0" anchor="ctr"/>
+          <a:lstStyle/>
+          <a:p>
+            <a:pPr indent="0" marL="0">
+              <a:buNone/>
+            </a:pPr>
+            <a:r>
+              <a:rPr lang="en-US" sz="1600" b="1" dirty="0">
+                <a:solidFill>
+                  <a:srgbClr val="16323B"/>
+                </a:solidFill>
+                <a:latin typeface="Calibri" pitchFamily="34" charset="0"/>
+                <a:ea typeface="Calibri" pitchFamily="34" charset="-122"/>
+                <a:cs typeface="Calibri" pitchFamily="34" charset="-120"/>
+              </a:rPr>
+              <a:t>BR-001 и регрессия</a:t>
+            </a:r>
+            <a:endParaRPr lang="en-US" sz="1600" dirty="0"/>
+          </a:p>
+          <a:p>
+            <a:pPr indent="0" marL="0">
+              <a:buNone/>
+            </a:pPr>
+            <a:r>
+              <a:rPr lang="en-US" sz="1400" dirty="0">
+                <a:solidFill>
+                  <a:srgbClr val="5A7179"/>
+                </a:solidFill>
+                <a:latin typeface="Calibri" pitchFamily="34" charset="0"/>
+                <a:ea typeface="Calibri" pitchFamily="34" charset="-122"/>
+                <a:cs typeface="Calibri" pitchFamily="34" charset="-120"/>
+              </a:rPr>
+              <a:t>затемнить фон бейджа; добавить автопроверки доступности и скорости</a:t>
+            </a:r>
+            <a:endParaRPr lang="en-US" sz="1600" dirty="0"/>
+          </a:p>
+        </p:txBody>
+      </p:sp>
+    </p:spTree>
+  </p:cSld>
+  <p:clrMapOvr>
+    <a:masterClrMapping/>
+  </p:clrMapOvr>
+</p:sld>
+</file>
+
+<file path=ppt/slides/slide15.xml><?xml version="1.0" encoding="utf-8"?>
+<p:sld xmlns:a="http://schemas.openxmlformats.org/drawingml/2006/main" xmlns:r="http://schemas.openxmlformats.org/officeDocument/2006/relationships" xmlns:p="http://schemas.openxmlformats.org/presentationml/2006/main">
+  <p:cSld name="Slide 15">
+    <p:bg>
+      <p:bgPr>
+        <a:blipFill dpi="0" rotWithShape="1">
+          <a:blip r:embed="rId1">
+            <a:lum/>
+          </a:blip>
+          <a:srcRect/>
+          <a:stretch>
+            <a:fillRect/>
+          </a:stretch>
+        </a:blipFill>
+        <a:effectLst/>
+      </p:bgPr>
+    </p:bg>
+    <p:spTree>
+      <p:nvGrpSpPr>
+        <p:cNvPr id="1" name=""/>
+        <p:cNvGrpSpPr/>
+        <p:nvPr/>
+      </p:nvGrpSpPr>
+      <p:grpSpPr>
+        <a:xfrm>
+          <a:off x="0" y="0"/>
+          <a:ext cx="0" cy="0"/>
+          <a:chOff x="0" y="0"/>
+          <a:chExt cx="0" cy="0"/>
+        </a:xfrm>
+      </p:grpSpPr>
+      <p:sp>
+        <p:nvSpPr>
+          <p:cNvPr id="2" name="Text 0"/>
+          <p:cNvSpPr txBox="1"/>
+          <p:nvPr/>
+        </p:nvSpPr>
+        <p:spPr>
+          <a:xfrm>
             <a:off x="640080" y="1097280"/>
             <a:ext cx="6858000" cy="1188720"/>
           </a:xfrm>
@@ -6081,7 +6850,7 @@
                 <a:ea typeface="Calibri" pitchFamily="34" charset="-122"/>
                 <a:cs typeface="Calibri" pitchFamily="34" charset="-120"/>
               </a:rPr>
-              <a:t>5 UI-кейсов, 8 API-кейсов, 12 нефункциональных проверок</a:t>
+              <a:t>5 UI-кейсов, 11 API-кейсов, 12 нефункциональных проверок</a:t>
             </a:r>
             <a:endParaRPr lang="en-US" sz="1700" dirty="0"/>
           </a:p>
@@ -6201,7 +6970,7 @@
                 <a:ea typeface="Calibri" pitchFamily="34" charset="-122"/>
                 <a:cs typeface="Calibri" pitchFamily="34" charset="-120"/>
               </a:rPr>
-              <a:t>8 запросов с проверками статуса и переменными</a:t>
+              <a:t>11 запросов к API Читай-города с проверками и переменными</a:t>
             </a:r>
             <a:endParaRPr lang="en-US" sz="1700" dirty="0"/>
           </a:p>
@@ -6912,7 +7681,7 @@
         <p:spPr>
           <a:xfrm>
             <a:off x="6629400" y="1828800"/>
-            <a:ext cx="3200400" cy="457200"/>
+            <a:ext cx="3566160" cy="457200"/>
           </a:xfrm>
           <a:prstGeom prst="rect">
             <a:avLst/>
@@ -6936,7 +7705,7 @@
                 <a:ea typeface="Cambria" pitchFamily="34" charset="-122"/>
                 <a:cs typeface="Cambria" pitchFamily="34" charset="-120"/>
               </a:rPr>
-              <a:t>Todo List API</a:t>
+              <a:t>API Читай-города</a:t>
             </a:r>
             <a:endParaRPr lang="en-US" sz="2200" dirty="0"/>
           </a:p>
@@ -7041,7 +7810,7 @@
                 <a:ea typeface="Calibri" pitchFamily="34" charset="-122"/>
                 <a:cs typeface="Calibri" pitchFamily="34" charset="-120"/>
               </a:rPr>
-              <a:t>jsonplaceholder.typicode.com · REST, без авторизации</a:t>
+              <a:t>web-agr.chitai-gorod.ru/web/api · анонимный Bearer-токен</a:t>
             </a:r>
             <a:endParaRPr lang="en-US" sz="1300" dirty="0"/>
           </a:p>
@@ -7055,8 +7824,130 @@
         </p:nvSpPr>
         <p:spPr>
           <a:xfrm>
-            <a:off x="6629400" y="2880360"/>
-            <a:ext cx="1051560" cy="329184"/>
+            <a:off x="6629400" y="2788920"/>
+            <a:ext cx="777240" cy="329184"/>
+          </a:xfrm>
+          <a:prstGeom prst="roundRect">
+            <a:avLst>
+              <a:gd name="adj" fmla="val 50000"/>
+            </a:avLst>
+          </a:prstGeom>
+          <a:solidFill>
+            <a:srgbClr val="2F7D4F"/>
+          </a:solidFill>
+          <a:ln w="12700">
+            <a:solidFill>
+              <a:srgbClr val="2F7D4F"/>
+            </a:solidFill>
+            <a:prstDash val="solid"/>
+          </a:ln>
+        </p:spPr>
+      </p:sp>
+      <p:sp>
+        <p:nvSpPr>
+          <p:cNvPr id="18" name="Text 15"/>
+          <p:cNvSpPr txBox="1"/>
+          <p:nvPr/>
+        </p:nvSpPr>
+        <p:spPr>
+          <a:xfrm>
+            <a:off x="6629400" y="2788920"/>
+            <a:ext cx="777240" cy="329184"/>
+          </a:xfrm>
+          <a:prstGeom prst="rect">
+            <a:avLst/>
+          </a:prstGeom>
+          <a:noFill/>
+          <a:ln/>
+        </p:spPr>
+        <p:txBody>
+          <a:bodyPr wrap="square" lIns="0" tIns="0" rIns="0" bIns="0" rtlCol="0" anchor="ctr"/>
+          <a:lstStyle/>
+          <a:p>
+            <a:pPr algn="ctr" indent="0" marL="0">
+              <a:buNone/>
+            </a:pPr>
+            <a:r>
+              <a:rPr lang="en-US" sz="1200" b="1" dirty="0">
+                <a:solidFill>
+                  <a:srgbClr val="FFFFFF"/>
+                </a:solidFill>
+                <a:latin typeface="Calibri" pitchFamily="34" charset="0"/>
+                <a:ea typeface="Calibri" pitchFamily="34" charset="-122"/>
+                <a:cs typeface="Calibri" pitchFamily="34" charset="-120"/>
+              </a:rPr>
+              <a:t>POST</a:t>
+            </a:r>
+            <a:endParaRPr lang="en-US" sz="1200" dirty="0"/>
+          </a:p>
+        </p:txBody>
+      </p:sp>
+      <p:sp>
+        <p:nvSpPr>
+          <p:cNvPr id="19" name="Text 16"/>
+          <p:cNvSpPr txBox="1"/>
+          <p:nvPr/>
+        </p:nvSpPr>
+        <p:spPr>
+          <a:xfrm>
+            <a:off x="7543800" y="2715768"/>
+            <a:ext cx="3931920" cy="548640"/>
+          </a:xfrm>
+          <a:prstGeom prst="rect">
+            <a:avLst/>
+          </a:prstGeom>
+          <a:noFill/>
+          <a:ln/>
+        </p:spPr>
+        <p:txBody>
+          <a:bodyPr wrap="square" lIns="0" tIns="0" rIns="0" bIns="0" rtlCol="0" anchor="t"/>
+          <a:lstStyle/>
+          <a:p>
+            <a:pPr indent="0" marL="0">
+              <a:buNone/>
+            </a:pPr>
+            <a:r>
+              <a:rPr lang="en-US" sz="1200" b="1" dirty="0">
+                <a:solidFill>
+                  <a:srgbClr val="16323B"/>
+                </a:solidFill>
+                <a:latin typeface="Courier New" pitchFamily="34" charset="0"/>
+                <a:ea typeface="Courier New" pitchFamily="34" charset="-122"/>
+                <a:cs typeface="Courier New" pitchFamily="34" charset="-120"/>
+              </a:rPr>
+              <a:t>/v1/auth/anonymous</a:t>
+            </a:r>
+            <a:endParaRPr lang="en-US" sz="1200" dirty="0"/>
+          </a:p>
+          <a:p>
+            <a:pPr indent="0" marL="0">
+              <a:buNone/>
+            </a:pPr>
+            <a:r>
+              <a:rPr lang="en-US" sz="1200" dirty="0">
+                <a:solidFill>
+                  <a:srgbClr val="5A7179"/>
+                </a:solidFill>
+                <a:latin typeface="Calibri" pitchFamily="34" charset="0"/>
+                <a:ea typeface="Calibri" pitchFamily="34" charset="-122"/>
+                <a:cs typeface="Calibri" pitchFamily="34" charset="-120"/>
+              </a:rPr>
+              <a:t>токен</a:t>
+            </a:r>
+            <a:endParaRPr lang="en-US" sz="1200" dirty="0"/>
+          </a:p>
+        </p:txBody>
+      </p:sp>
+      <p:sp>
+        <p:nvSpPr>
+          <p:cNvPr id="20" name="Shape 17"/>
+          <p:cNvSpPr/>
+          <p:nvPr/>
+        </p:nvSpPr>
+        <p:spPr>
+          <a:xfrm>
+            <a:off x="6629400" y="3410712"/>
+            <a:ext cx="777240" cy="329184"/>
           </a:xfrm>
           <a:prstGeom prst="roundRect">
             <a:avLst>
@@ -7076,14 +7967,14 @@
       </p:sp>
       <p:sp>
         <p:nvSpPr>
-          <p:cNvPr id="18" name="Text 15"/>
-          <p:cNvSpPr txBox="1"/>
-          <p:nvPr/>
-        </p:nvSpPr>
-        <p:spPr>
-          <a:xfrm>
-            <a:off x="6629400" y="2880360"/>
-            <a:ext cx="1051560" cy="329184"/>
+          <p:cNvPr id="21" name="Text 18"/>
+          <p:cNvSpPr txBox="1"/>
+          <p:nvPr/>
+        </p:nvSpPr>
+        <p:spPr>
+          <a:xfrm>
+            <a:off x="6629400" y="3410712"/>
+            <a:ext cx="777240" cy="329184"/>
           </a:xfrm>
           <a:prstGeom prst="rect">
             <a:avLst/>
@@ -7115,14 +8006,70 @@
       </p:sp>
       <p:sp>
         <p:nvSpPr>
-          <p:cNvPr id="19" name="Shape 16"/>
+          <p:cNvPr id="22" name="Text 19"/>
+          <p:cNvSpPr txBox="1"/>
+          <p:nvPr/>
+        </p:nvSpPr>
+        <p:spPr>
+          <a:xfrm>
+            <a:off x="7543800" y="3337560"/>
+            <a:ext cx="3931920" cy="548640"/>
+          </a:xfrm>
+          <a:prstGeom prst="rect">
+            <a:avLst/>
+          </a:prstGeom>
+          <a:noFill/>
+          <a:ln/>
+        </p:spPr>
+        <p:txBody>
+          <a:bodyPr wrap="square" lIns="0" tIns="0" rIns="0" bIns="0" rtlCol="0" anchor="t"/>
+          <a:lstStyle/>
+          <a:p>
+            <a:pPr indent="0" marL="0">
+              <a:buNone/>
+            </a:pPr>
+            <a:r>
+              <a:rPr lang="en-US" sz="1200" b="1" dirty="0">
+                <a:solidFill>
+                  <a:srgbClr val="16323B"/>
+                </a:solidFill>
+                <a:latin typeface="Courier New" pitchFamily="34" charset="0"/>
+                <a:ea typeface="Courier New" pitchFamily="34" charset="-122"/>
+                <a:cs typeface="Courier New" pitchFamily="34" charset="-120"/>
+              </a:rPr>
+              <a:t>/v2/search/product</a:t>
+            </a:r>
+            <a:endParaRPr lang="en-US" sz="1200" dirty="0"/>
+          </a:p>
+          <a:p>
+            <a:pPr indent="0" marL="0">
+              <a:buNone/>
+            </a:pPr>
+            <a:r>
+              <a:rPr lang="en-US" sz="1200" dirty="0">
+                <a:solidFill>
+                  <a:srgbClr val="5A7179"/>
+                </a:solidFill>
+                <a:latin typeface="Calibri" pitchFamily="34" charset="0"/>
+                <a:ea typeface="Calibri" pitchFamily="34" charset="-122"/>
+                <a:cs typeface="Calibri" pitchFamily="34" charset="-120"/>
+              </a:rPr>
+              <a:t>поиск товаров</a:t>
+            </a:r>
+            <a:endParaRPr lang="en-US" sz="1200" dirty="0"/>
+          </a:p>
+        </p:txBody>
+      </p:sp>
+      <p:sp>
+        <p:nvSpPr>
+          <p:cNvPr id="23" name="Shape 20"/>
           <p:cNvSpPr/>
           <p:nvPr/>
         </p:nvSpPr>
         <p:spPr>
           <a:xfrm>
-            <a:off x="7818120" y="2880360"/>
-            <a:ext cx="1051560" cy="329184"/>
+            <a:off x="6629400" y="4032504"/>
+            <a:ext cx="777240" cy="329184"/>
           </a:xfrm>
           <a:prstGeom prst="roundRect">
             <a:avLst>
@@ -7130,11 +8077,11 @@
             </a:avLst>
           </a:prstGeom>
           <a:solidFill>
-            <a:srgbClr val="2F7D4F"/>
+            <a:srgbClr val="2BA79A"/>
           </a:solidFill>
           <a:ln w="12700">
             <a:solidFill>
-              <a:srgbClr val="2F7D4F"/>
+              <a:srgbClr val="2BA79A"/>
             </a:solidFill>
             <a:prstDash val="solid"/>
           </a:ln>
@@ -7142,14 +8089,14 @@
       </p:sp>
       <p:sp>
         <p:nvSpPr>
-          <p:cNvPr id="20" name="Text 17"/>
-          <p:cNvSpPr txBox="1"/>
-          <p:nvPr/>
-        </p:nvSpPr>
-        <p:spPr>
-          <a:xfrm>
-            <a:off x="7818120" y="2880360"/>
-            <a:ext cx="1051560" cy="329184"/>
+          <p:cNvPr id="24" name="Text 21"/>
+          <p:cNvSpPr txBox="1"/>
+          <p:nvPr/>
+        </p:nvSpPr>
+        <p:spPr>
+          <a:xfrm>
+            <a:off x="6629400" y="4032504"/>
+            <a:ext cx="777240" cy="329184"/>
           </a:xfrm>
           <a:prstGeom prst="rect">
             <a:avLst/>
@@ -7173,7 +8120,7 @@
                 <a:ea typeface="Calibri" pitchFamily="34" charset="-122"/>
                 <a:cs typeface="Calibri" pitchFamily="34" charset="-120"/>
               </a:rPr>
-              <a:t>POST</a:t>
+              <a:t>GET</a:t>
             </a:r>
             <a:endParaRPr lang="en-US" sz="1200" dirty="0"/>
           </a:p>
@@ -7181,14 +8128,70 @@
       </p:sp>
       <p:sp>
         <p:nvSpPr>
-          <p:cNvPr id="21" name="Shape 18"/>
+          <p:cNvPr id="25" name="Text 22"/>
+          <p:cNvSpPr txBox="1"/>
+          <p:nvPr/>
+        </p:nvSpPr>
+        <p:spPr>
+          <a:xfrm>
+            <a:off x="7543800" y="3959352"/>
+            <a:ext cx="3931920" cy="548640"/>
+          </a:xfrm>
+          <a:prstGeom prst="rect">
+            <a:avLst/>
+          </a:prstGeom>
+          <a:noFill/>
+          <a:ln/>
+        </p:spPr>
+        <p:txBody>
+          <a:bodyPr wrap="square" lIns="0" tIns="0" rIns="0" bIns="0" rtlCol="0" anchor="t"/>
+          <a:lstStyle/>
+          <a:p>
+            <a:pPr indent="0" marL="0">
+              <a:buNone/>
+            </a:pPr>
+            <a:r>
+              <a:rPr lang="en-US" sz="1200" b="1" dirty="0">
+                <a:solidFill>
+                  <a:srgbClr val="16323B"/>
+                </a:solidFill>
+                <a:latin typeface="Courier New" pitchFamily="34" charset="0"/>
+                <a:ea typeface="Courier New" pitchFamily="34" charset="-122"/>
+                <a:cs typeface="Courier New" pitchFamily="34" charset="-120"/>
+              </a:rPr>
+              <a:t>/v2/search/search-phrase-suggests</a:t>
+            </a:r>
+            <a:endParaRPr lang="en-US" sz="1200" dirty="0"/>
+          </a:p>
+          <a:p>
+            <a:pPr indent="0" marL="0">
+              <a:buNone/>
+            </a:pPr>
+            <a:r>
+              <a:rPr lang="en-US" sz="1200" dirty="0">
+                <a:solidFill>
+                  <a:srgbClr val="5A7179"/>
+                </a:solidFill>
+                <a:latin typeface="Calibri" pitchFamily="34" charset="0"/>
+                <a:ea typeface="Calibri" pitchFamily="34" charset="-122"/>
+                <a:cs typeface="Calibri" pitchFamily="34" charset="-120"/>
+              </a:rPr>
+              <a:t>подсказки</a:t>
+            </a:r>
+            <a:endParaRPr lang="en-US" sz="1200" dirty="0"/>
+          </a:p>
+        </p:txBody>
+      </p:sp>
+      <p:sp>
+        <p:nvSpPr>
+          <p:cNvPr id="26" name="Shape 23"/>
           <p:cNvSpPr/>
           <p:nvPr/>
         </p:nvSpPr>
         <p:spPr>
           <a:xfrm>
-            <a:off x="9006840" y="2880360"/>
-            <a:ext cx="1051560" cy="329184"/>
+            <a:off x="6629400" y="4654296"/>
+            <a:ext cx="777240" cy="329184"/>
           </a:xfrm>
           <a:prstGeom prst="roundRect">
             <a:avLst>
@@ -7196,11 +8199,11 @@
             </a:avLst>
           </a:prstGeom>
           <a:solidFill>
-            <a:srgbClr val="0F6E7A"/>
+            <a:srgbClr val="2BA79A"/>
           </a:solidFill>
           <a:ln w="12700">
             <a:solidFill>
-              <a:srgbClr val="0F6E7A"/>
+              <a:srgbClr val="2BA79A"/>
             </a:solidFill>
             <a:prstDash val="solid"/>
           </a:ln>
@@ -7208,14 +8211,14 @@
       </p:sp>
       <p:sp>
         <p:nvSpPr>
-          <p:cNvPr id="22" name="Text 19"/>
-          <p:cNvSpPr txBox="1"/>
-          <p:nvPr/>
-        </p:nvSpPr>
-        <p:spPr>
-          <a:xfrm>
-            <a:off x="9006840" y="2880360"/>
-            <a:ext cx="1051560" cy="329184"/>
+          <p:cNvPr id="27" name="Text 24"/>
+          <p:cNvSpPr txBox="1"/>
+          <p:nvPr/>
+        </p:nvSpPr>
+        <p:spPr>
+          <a:xfrm>
+            <a:off x="6629400" y="4654296"/>
+            <a:ext cx="777240" cy="329184"/>
           </a:xfrm>
           <a:prstGeom prst="rect">
             <a:avLst/>
@@ -7239,7 +8242,7 @@
                 <a:ea typeface="Calibri" pitchFamily="34" charset="-122"/>
                 <a:cs typeface="Calibri" pitchFamily="34" charset="-120"/>
               </a:rPr>
-              <a:t>PATCH</a:t>
+              <a:t>GET</a:t>
             </a:r>
             <a:endParaRPr lang="en-US" sz="1200" dirty="0"/>
           </a:p>
@@ -7247,165 +8250,70 @@
       </p:sp>
       <p:sp>
         <p:nvSpPr>
-          <p:cNvPr id="23" name="Shape 20"/>
-          <p:cNvSpPr/>
-          <p:nvPr/>
-        </p:nvSpPr>
-        <p:spPr>
-          <a:xfrm>
-            <a:off x="10195560" y="2880360"/>
-            <a:ext cx="1051560" cy="329184"/>
-          </a:xfrm>
-          <a:prstGeom prst="roundRect">
-            <a:avLst>
-              <a:gd name="adj" fmla="val 50000"/>
-            </a:avLst>
-          </a:prstGeom>
-          <a:solidFill>
-            <a:srgbClr val="E8692E"/>
-          </a:solidFill>
-          <a:ln w="12700">
-            <a:solidFill>
-              <a:srgbClr val="E8692E"/>
-            </a:solidFill>
-            <a:prstDash val="solid"/>
-          </a:ln>
-        </p:spPr>
-      </p:sp>
-      <p:sp>
-        <p:nvSpPr>
-          <p:cNvPr id="24" name="Text 21"/>
-          <p:cNvSpPr txBox="1"/>
-          <p:nvPr/>
-        </p:nvSpPr>
-        <p:spPr>
-          <a:xfrm>
-            <a:off x="10195560" y="2880360"/>
-            <a:ext cx="1051560" cy="329184"/>
-          </a:xfrm>
-          <a:prstGeom prst="rect">
-            <a:avLst/>
-          </a:prstGeom>
-          <a:noFill/>
-          <a:ln/>
-        </p:spPr>
-        <p:txBody>
-          <a:bodyPr wrap="square" lIns="0" tIns="0" rIns="0" bIns="0" rtlCol="0" anchor="ctr"/>
-          <a:lstStyle/>
-          <a:p>
-            <a:pPr algn="ctr" indent="0" marL="0">
+          <p:cNvPr id="28" name="Text 25"/>
+          <p:cNvSpPr txBox="1"/>
+          <p:nvPr/>
+        </p:nvSpPr>
+        <p:spPr>
+          <a:xfrm>
+            <a:off x="7543800" y="4581144"/>
+            <a:ext cx="3931920" cy="548640"/>
+          </a:xfrm>
+          <a:prstGeom prst="rect">
+            <a:avLst/>
+          </a:prstGeom>
+          <a:noFill/>
+          <a:ln/>
+        </p:spPr>
+        <p:txBody>
+          <a:bodyPr wrap="square" lIns="0" tIns="0" rIns="0" bIns="0" rtlCol="0" anchor="t"/>
+          <a:lstStyle/>
+          <a:p>
+            <a:pPr indent="0" marL="0">
               <a:buNone/>
             </a:pPr>
             <a:r>
               <a:rPr lang="en-US" sz="1200" b="1" dirty="0">
                 <a:solidFill>
-                  <a:srgbClr val="FFFFFF"/>
-                </a:solidFill>
-                <a:latin typeface="Calibri" pitchFamily="34" charset="0"/>
-                <a:ea typeface="Calibri" pitchFamily="34" charset="-122"/>
-                <a:cs typeface="Calibri" pitchFamily="34" charset="-120"/>
-              </a:rPr>
-              <a:t>DELETE</a:t>
+                  <a:srgbClr val="16323B"/>
+                </a:solidFill>
+                <a:latin typeface="Courier New" pitchFamily="34" charset="0"/>
+                <a:ea typeface="Courier New" pitchFamily="34" charset="-122"/>
+                <a:cs typeface="Courier New" pitchFamily="34" charset="-120"/>
+              </a:rPr>
+              <a:t>/v2/search/popular-search-phrases</a:t>
             </a:r>
             <a:endParaRPr lang="en-US" sz="1200" dirty="0"/>
           </a:p>
-        </p:txBody>
-      </p:sp>
-      <p:sp>
-        <p:nvSpPr>
-          <p:cNvPr id="25" name="Text 22"/>
-          <p:cNvSpPr txBox="1"/>
-          <p:nvPr/>
-        </p:nvSpPr>
-        <p:spPr>
-          <a:xfrm>
-            <a:off x="6629400" y="3520440"/>
-            <a:ext cx="4754880" cy="1737360"/>
-          </a:xfrm>
-          <a:prstGeom prst="rect">
-            <a:avLst/>
-          </a:prstGeom>
-          <a:noFill/>
-          <a:ln/>
-        </p:spPr>
-        <p:txBody>
-          <a:bodyPr wrap="square" lIns="0" tIns="0" rIns="0" bIns="0" rtlCol="0" anchor="t"/>
-          <a:lstStyle/>
-          <a:p>
-            <a:pPr marL="342900" indent="-342900">
-              <a:spcAft>
-                <a:spcPts val="600"/>
-              </a:spcAft>
-              <a:buSzPct val="100000"/>
-              <a:buChar char="•"/>
-            </a:pPr>
-            <a:r>
-              <a:rPr lang="en-US" sz="1500" dirty="0">
-                <a:solidFill>
-                  <a:srgbClr val="16323B"/>
-                </a:solidFill>
-                <a:latin typeface="Calibri" pitchFamily="34" charset="0"/>
-                <a:ea typeface="Calibri" pitchFamily="34" charset="-122"/>
-                <a:cs typeface="Calibri" pitchFamily="34" charset="-120"/>
-              </a:rPr>
-              <a:t>Получение списка и одной задачи</a:t>
-            </a:r>
-            <a:endParaRPr lang="en-US" sz="1500" dirty="0"/>
-          </a:p>
-          <a:p>
-            <a:pPr marL="342900" indent="-342900">
-              <a:spcAft>
-                <a:spcPts val="600"/>
-              </a:spcAft>
-              <a:buSzPct val="100000"/>
-              <a:buChar char="•"/>
-            </a:pPr>
-            <a:r>
-              <a:rPr lang="en-US" sz="1500" dirty="0">
-                <a:solidFill>
-                  <a:srgbClr val="16323B"/>
-                </a:solidFill>
-                <a:latin typeface="Calibri" pitchFamily="34" charset="0"/>
-                <a:ea typeface="Calibri" pitchFamily="34" charset="-122"/>
-                <a:cs typeface="Calibri" pitchFamily="34" charset="-120"/>
-              </a:rPr>
-              <a:t>Создание, изменение и удаление</a:t>
-            </a:r>
-            <a:endParaRPr lang="en-US" sz="1500" dirty="0"/>
-          </a:p>
-          <a:p>
-            <a:pPr marL="342900" indent="-342900">
-              <a:spcAft>
-                <a:spcPts val="600"/>
-              </a:spcAft>
-              <a:buSzPct val="100000"/>
-              <a:buChar char="•"/>
-            </a:pPr>
-            <a:r>
-              <a:rPr lang="en-US" sz="1500" dirty="0">
-                <a:solidFill>
-                  <a:srgbClr val="16323B"/>
-                </a:solidFill>
-                <a:latin typeface="Calibri" pitchFamily="34" charset="0"/>
-                <a:ea typeface="Calibri" pitchFamily="34" charset="-122"/>
-                <a:cs typeface="Calibri" pitchFamily="34" charset="-120"/>
-              </a:rPr>
-              <a:t>Три негативных сценария: чужой id, id не числом, неподдерживаемый метод</a:t>
-            </a:r>
-            <a:endParaRPr lang="en-US" sz="1500" dirty="0"/>
-          </a:p>
-        </p:txBody>
-      </p:sp>
-      <p:sp>
-        <p:nvSpPr>
-          <p:cNvPr id="26" name="Text 23"/>
+          <a:p>
+            <a:pPr indent="0" marL="0">
+              <a:buNone/>
+            </a:pPr>
+            <a:r>
+              <a:rPr lang="en-US" sz="1200" dirty="0">
+                <a:solidFill>
+                  <a:srgbClr val="5A7179"/>
+                </a:solidFill>
+                <a:latin typeface="Calibri" pitchFamily="34" charset="0"/>
+                <a:ea typeface="Calibri" pitchFamily="34" charset="-122"/>
+                <a:cs typeface="Calibri" pitchFamily="34" charset="-120"/>
+              </a:rPr>
+              <a:t>популярные фразы</a:t>
+            </a:r>
+            <a:endParaRPr lang="en-US" sz="1200" dirty="0"/>
+          </a:p>
+        </p:txBody>
+      </p:sp>
+      <p:sp>
+        <p:nvSpPr>
+          <p:cNvPr id="29" name="Text 26"/>
           <p:cNvSpPr txBox="1"/>
           <p:nvPr/>
         </p:nvSpPr>
         <p:spPr>
           <a:xfrm>
             <a:off x="548640" y="5760720"/>
-            <a:ext cx="10515600" cy="320040"/>
+            <a:ext cx="11064240" cy="320040"/>
           </a:xfrm>
           <a:prstGeom prst="rect">
             <a:avLst/>
@@ -7429,7 +8337,7 @@
                 <a:ea typeface="Calibri" pitchFamily="34" charset="-122"/>
                 <a:cs typeface="Calibri" pitchFamily="34" charset="-120"/>
               </a:rPr>
-              <a:t>Три ключевые функции: поиск книги · карточка товара · управление задачами через API</a:t>
+              <a:t>Одно приложение, три ключевые функции: поиск книги · карточка товара · подсказки и популярные запросы</a:t>
             </a:r>
             <a:endParaRPr lang="en-US" sz="1400" dirty="0"/>
           </a:p>
@@ -7507,7 +8415,7 @@
                 <a:ea typeface="Calibri" pitchFamily="34" charset="-122"/>
                 <a:cs typeface="Calibri" pitchFamily="34" charset="-120"/>
               </a:rPr>
-              <a:t>03 · СМЕНА ПЛАНА</a:t>
+              <a:t>03 · КАК МЕНЯЛАСЬ API-ЧАСТЬ</a:t>
             </a:r>
             <a:endParaRPr lang="en-US" sz="1200" dirty="0"/>
           </a:p>
@@ -7546,7 +8454,7 @@
                 <a:ea typeface="Cambria" pitchFamily="34" charset="-122"/>
                 <a:cs typeface="Cambria" pitchFamily="34" charset="-120"/>
               </a:rPr>
-              <a:t>Почему API переехал на JSONPlaceholder</a:t>
+              <a:t>Как API переехал на Читай-город</a:t>
             </a:r>
             <a:endParaRPr lang="en-US" sz="3400" dirty="0"/>
           </a:p>
@@ -7599,8 +8507,8 @@
         </p:nvSpPr>
         <p:spPr>
           <a:xfrm>
-            <a:off x="548640" y="2103120"/>
-            <a:ext cx="2468880" cy="3108960"/>
+            <a:off x="548640" y="1920240"/>
+            <a:ext cx="2468880" cy="3383280"/>
           </a:xfrm>
           <a:prstGeom prst="roundRect">
             <a:avLst>
@@ -7633,7 +8541,7 @@
         </p:nvSpPr>
         <p:spPr>
           <a:xfrm>
-            <a:off x="822960" y="2377440"/>
+            <a:off x="822960" y="2194560"/>
             <a:ext cx="548640" cy="548640"/>
           </a:xfrm>
           <a:prstGeom prst="ellipse">
@@ -7658,7 +8566,7 @@
         </p:nvSpPr>
         <p:spPr>
           <a:xfrm>
-            <a:off x="822960" y="2377440"/>
+            <a:off x="822960" y="2194560"/>
             <a:ext cx="548640" cy="548640"/>
           </a:xfrm>
           <a:prstGeom prst="rect">
@@ -7697,7 +8605,7 @@
         </p:nvSpPr>
         <p:spPr>
           <a:xfrm>
-            <a:off x="822960" y="3108960"/>
+            <a:off x="822960" y="2926080"/>
             <a:ext cx="2011680" cy="457200"/>
           </a:xfrm>
           <a:prstGeom prst="rect">
@@ -7736,8 +8644,8 @@
         </p:nvSpPr>
         <p:spPr>
           <a:xfrm>
-            <a:off x="822960" y="3611880"/>
-            <a:ext cx="1965960" cy="1463040"/>
+            <a:off x="822960" y="3429000"/>
+            <a:ext cx="1965960" cy="1737360"/>
           </a:xfrm>
           <a:prstGeom prst="rect">
             <a:avLst/>
@@ -7775,7 +8683,7 @@
         </p:nvSpPr>
         <p:spPr>
           <a:xfrm>
-            <a:off x="3035808" y="3383280"/>
+            <a:off x="3035808" y="3291840"/>
             <a:ext cx="329184" cy="457200"/>
           </a:xfrm>
           <a:prstGeom prst="rect">
@@ -7814,8 +8722,8 @@
         </p:nvSpPr>
         <p:spPr>
           <a:xfrm>
-            <a:off x="3383280" y="2103120"/>
-            <a:ext cx="2468880" cy="3108960"/>
+            <a:off x="3383280" y="1920240"/>
+            <a:ext cx="2468880" cy="3383280"/>
           </a:xfrm>
           <a:prstGeom prst="roundRect">
             <a:avLst>
@@ -7848,7 +8756,7 @@
         </p:nvSpPr>
         <p:spPr>
           <a:xfrm>
-            <a:off x="3657600" y="2377440"/>
+            <a:off x="3657600" y="2194560"/>
             <a:ext cx="548640" cy="548640"/>
           </a:xfrm>
           <a:prstGeom prst="ellipse">
@@ -7873,7 +8781,7 @@
         </p:nvSpPr>
         <p:spPr>
           <a:xfrm>
-            <a:off x="3657600" y="2377440"/>
+            <a:off x="3657600" y="2194560"/>
             <a:ext cx="548640" cy="548640"/>
           </a:xfrm>
           <a:prstGeom prst="rect">
@@ -7912,7 +8820,7 @@
         </p:nvSpPr>
         <p:spPr>
           <a:xfrm>
-            <a:off x="3657600" y="3108960"/>
+            <a:off x="3657600" y="2926080"/>
             <a:ext cx="2011680" cy="457200"/>
           </a:xfrm>
           <a:prstGeom prst="rect">
@@ -7937,7 +8845,7 @@
                 <a:ea typeface="Cambria" pitchFamily="34" charset="-122"/>
                 <a:cs typeface="Cambria" pitchFamily="34" charset="-120"/>
               </a:rPr>
-              <a:t>Проблема</a:t>
+              <a:t>Сервер упал</a:t>
             </a:r>
             <a:endParaRPr lang="en-US" sz="2000" dirty="0"/>
           </a:p>
@@ -7951,8 +8859,8 @@
         </p:nvSpPr>
         <p:spPr>
           <a:xfrm>
-            <a:off x="3657600" y="3611880"/>
-            <a:ext cx="1965960" cy="1463040"/>
+            <a:off x="3657600" y="3429000"/>
+            <a:ext cx="1965960" cy="1737360"/>
           </a:xfrm>
           <a:prstGeom prst="rect">
             <a:avLst/>
@@ -7976,7 +8884,7 @@
                 <a:ea typeface="Calibri" pitchFamily="34" charset="-122"/>
                 <a:cs typeface="Calibri" pitchFamily="34" charset="-120"/>
               </a:rPr>
-              <a:t>23 сентября сервер перестал отвечать: таймаут соединения</a:t>
+              <a:t>23.09 перестал отвечать. Временно перенёс кейсы на JSONPlaceholder</a:t>
             </a:r>
             <a:endParaRPr lang="en-US" sz="1500" dirty="0"/>
           </a:p>
@@ -7990,7 +8898,7 @@
         </p:nvSpPr>
         <p:spPr>
           <a:xfrm>
-            <a:off x="5870448" y="3383280"/>
+            <a:off x="5870448" y="3291840"/>
             <a:ext cx="329184" cy="457200"/>
           </a:xfrm>
           <a:prstGeom prst="rect">
@@ -8029,8 +8937,8 @@
         </p:nvSpPr>
         <p:spPr>
           <a:xfrm>
-            <a:off x="6217920" y="2103120"/>
-            <a:ext cx="2468880" cy="3108960"/>
+            <a:off x="6217920" y="1920240"/>
+            <a:ext cx="2468880" cy="3383280"/>
           </a:xfrm>
           <a:prstGeom prst="roundRect">
             <a:avLst>
@@ -8063,7 +8971,7 @@
         </p:nvSpPr>
         <p:spPr>
           <a:xfrm>
-            <a:off x="6492240" y="2377440"/>
+            <a:off x="6492240" y="2194560"/>
             <a:ext cx="548640" cy="548640"/>
           </a:xfrm>
           <a:prstGeom prst="ellipse">
@@ -8088,7 +8996,7 @@
         </p:nvSpPr>
         <p:spPr>
           <a:xfrm>
-            <a:off x="6492240" y="2377440"/>
+            <a:off x="6492240" y="2194560"/>
             <a:ext cx="548640" cy="548640"/>
           </a:xfrm>
           <a:prstGeom prst="rect">
@@ -8127,7 +9035,7 @@
         </p:nvSpPr>
         <p:spPr>
           <a:xfrm>
-            <a:off x="6492240" y="3108960"/>
+            <a:off x="6492240" y="2926080"/>
             <a:ext cx="2011680" cy="457200"/>
           </a:xfrm>
           <a:prstGeom prst="rect">
@@ -8152,7 +9060,7 @@
                 <a:ea typeface="Cambria" pitchFamily="34" charset="-122"/>
                 <a:cs typeface="Cambria" pitchFamily="34" charset="-120"/>
               </a:rPr>
-              <a:t>Решение</a:t>
+              <a:t>Замечание</a:t>
             </a:r>
             <a:endParaRPr lang="en-US" sz="2000" dirty="0"/>
           </a:p>
@@ -8166,8 +9074,8 @@
         </p:nvSpPr>
         <p:spPr>
           <a:xfrm>
-            <a:off x="6492240" y="3611880"/>
-            <a:ext cx="1965960" cy="1463040"/>
+            <a:off x="6492240" y="3429000"/>
+            <a:ext cx="1965960" cy="1737360"/>
           </a:xfrm>
           <a:prstGeom prst="rect">
             <a:avLst/>
@@ -8191,7 +9099,7 @@
                 <a:ea typeface="Calibri" pitchFamily="34" charset="-122"/>
                 <a:cs typeface="Calibri" pitchFamily="34" charset="-120"/>
               </a:rPr>
-              <a:t>JSONPlaceholder: та же модель «задача», авторизация не нужна</a:t>
+              <a:t>Наставник: UI и API должны относиться к одному приложению</a:t>
             </a:r>
             <a:endParaRPr lang="en-US" sz="1500" dirty="0"/>
           </a:p>
@@ -8205,7 +9113,7 @@
         </p:nvSpPr>
         <p:spPr>
           <a:xfrm>
-            <a:off x="8705088" y="3383280"/>
+            <a:off x="8705088" y="3291840"/>
             <a:ext cx="329184" cy="457200"/>
           </a:xfrm>
           <a:prstGeom prst="rect">
@@ -8244,8 +9152,8 @@
         </p:nvSpPr>
         <p:spPr>
           <a:xfrm>
-            <a:off x="9052560" y="2103120"/>
-            <a:ext cx="2468880" cy="3108960"/>
+            <a:off x="9052560" y="1920240"/>
+            <a:ext cx="2468880" cy="3383280"/>
           </a:xfrm>
           <a:prstGeom prst="roundRect">
             <a:avLst>
@@ -8278,7 +9186,7 @@
         </p:nvSpPr>
         <p:spPr>
           <a:xfrm>
-            <a:off x="9326880" y="2377440"/>
+            <a:off x="9326880" y="2194560"/>
             <a:ext cx="548640" cy="548640"/>
           </a:xfrm>
           <a:prstGeom prst="ellipse">
@@ -8303,7 +9211,7 @@
         </p:nvSpPr>
         <p:spPr>
           <a:xfrm>
-            <a:off x="9326880" y="2377440"/>
+            <a:off x="9326880" y="2194560"/>
             <a:ext cx="548640" cy="548640"/>
           </a:xfrm>
           <a:prstGeom prst="rect">
@@ -8342,7 +9250,7 @@
         </p:nvSpPr>
         <p:spPr>
           <a:xfrm>
-            <a:off x="9326880" y="3108960"/>
+            <a:off x="9326880" y="2926080"/>
             <a:ext cx="2011680" cy="457200"/>
           </a:xfrm>
           <a:prstGeom prst="rect">
@@ -8381,8 +9289,8 @@
         </p:nvSpPr>
         <p:spPr>
           <a:xfrm>
-            <a:off x="9326880" y="3611880"/>
-            <a:ext cx="1965960" cy="1463040"/>
+            <a:off x="9326880" y="3429000"/>
+            <a:ext cx="1965960" cy="1737360"/>
           </a:xfrm>
           <a:prstGeom prst="rect">
             <a:avLst/>
@@ -8406,7 +9314,7 @@
                 <a:ea typeface="Calibri" pitchFamily="34" charset="-122"/>
                 <a:cs typeface="Calibri" pitchFamily="34" charset="-120"/>
               </a:rPr>
-              <a:t>Структура кейсов сохранилась, каждый код ответа проверил вручную</a:t>
+              <a:t>API самого Читай-города: токен, поиск, подсказки. Кейсы, Postman и автотесты переписаны</a:t>
             </a:r>
             <a:endParaRPr lang="en-US" sz="1500" dirty="0"/>
           </a:p>
@@ -8420,7 +9328,7 @@
         </p:nvSpPr>
         <p:spPr>
           <a:xfrm>
-            <a:off x="548640" y="5577840"/>
+            <a:off x="548640" y="5623560"/>
             <a:ext cx="9144000" cy="365760"/>
           </a:xfrm>
           <a:prstGeom prst="rect">
@@ -8445,7 +9353,7 @@
                 <a:ea typeface="Calibri" pitchFamily="34" charset="-122"/>
                 <a:cs typeface="Calibri" pitchFamily="34" charset="-120"/>
               </a:rPr>
-              <a:t>Подробности и история изменений — в тест-плане в Yonote</a:t>
+              <a:t>Подробности — в разделе «История изменений» тест-плана</a:t>
             </a:r>
             <a:endParaRPr lang="en-US" sz="1300" dirty="0"/>
           </a:p>
@@ -8842,7 +9750,7 @@
                 <a:ea typeface="Cambria" pitchFamily="34" charset="-122"/>
                 <a:cs typeface="Cambria" pitchFamily="34" charset="-120"/>
               </a:rPr>
-              <a:t>8</a:t>
+              <a:t>11</a:t>
             </a:r>
             <a:endParaRPr lang="en-US" sz="6600" dirty="0"/>
           </a:p>
@@ -8920,7 +9828,7 @@
                 <a:ea typeface="Calibri" pitchFamily="34" charset="-122"/>
                 <a:cs typeface="Calibri" pitchFamily="34" charset="-120"/>
               </a:rPr>
-              <a:t>5 позитивных + 3 негативных</a:t>
+              <a:t>6 позитивных + 5 негативных</a:t>
             </a:r>
             <a:endParaRPr lang="en-US" sz="1400" dirty="0"/>
           </a:p>
@@ -9161,7 +10069,7 @@
                 <a:ea typeface="Cambria" pitchFamily="34" charset="-122"/>
                 <a:cs typeface="Cambria" pitchFamily="34" charset="-120"/>
               </a:rPr>
-              <a:t>13</a:t>
+              <a:t>16</a:t>
             </a:r>
             <a:endParaRPr lang="en-US" sz="6600" dirty="0"/>
           </a:p>
@@ -9239,7 +10147,7 @@
                 <a:ea typeface="Calibri" pitchFamily="34" charset="-122"/>
                 <a:cs typeface="Calibri" pitchFamily="34" charset="-120"/>
               </a:rPr>
-              <a:t>5 UI + 8 API</a:t>
+              <a:t>5 UI + 11 API</a:t>
             </a:r>
             <a:endParaRPr lang="en-US" sz="1400" dirty="0"/>
           </a:p>
@@ -9388,7 +10296,7 @@
                 <a:ea typeface="Calibri" pitchFamily="34" charset="-122"/>
                 <a:cs typeface="Calibri" pitchFamily="34" charset="-120"/>
               </a:rPr>
-              <a:t>Кейсы и чек-лист</a:t>
+              <a:t>Кейсы и чек-лист, XLS</a:t>
             </a:r>
             <a:endParaRPr lang="en-US" sz="1300" dirty="0"/>
           </a:p>
@@ -9405,7 +10313,7 @@
                 <a:ea typeface="Calibri" pitchFamily="34" charset="-122"/>
                 <a:cs typeface="Calibri" pitchFamily="34" charset="-120"/>
               </a:rPr>
-              <a:t>XLS</a:t>
+              <a:t>Yonote</a:t>
             </a:r>
             <a:endParaRPr lang="en-US" sz="1300" dirty="0"/>
           </a:p>
@@ -9471,7 +10379,7 @@
                 <a:ea typeface="Calibri" pitchFamily="34" charset="-122"/>
                 <a:cs typeface="Calibri" pitchFamily="34" charset="-120"/>
               </a:rPr>
-              <a:t>Коллекция</a:t>
+              <a:t>Коллекция Postman, JSON</a:t>
             </a:r>
             <a:endParaRPr lang="en-US" sz="1300" dirty="0"/>
           </a:p>
@@ -9488,7 +10396,7 @@
                 <a:ea typeface="Calibri" pitchFamily="34" charset="-122"/>
                 <a:cs typeface="Calibri" pitchFamily="34" charset="-120"/>
               </a:rPr>
-              <a:t>Postman, JSON</a:t>
+              <a:t>Yonote</a:t>
             </a:r>
             <a:endParaRPr lang="en-US" sz="1300" dirty="0"/>
           </a:p>
@@ -10825,12 +11733,12 @@
         </p:nvSpPr>
         <p:spPr>
           <a:xfrm>
-            <a:off x="548640" y="1691640"/>
-            <a:ext cx="5440680" cy="3977640"/>
+            <a:off x="548640" y="1645920"/>
+            <a:ext cx="5440680" cy="4160520"/>
           </a:xfrm>
           <a:prstGeom prst="roundRect">
             <a:avLst>
-              <a:gd name="adj" fmla="val 5057"/>
+              <a:gd name="adj" fmla="val 4835"/>
             </a:avLst>
           </a:prstGeom>
           <a:solidFill>
@@ -10859,7 +11767,7 @@
         </p:nvSpPr>
         <p:spPr>
           <a:xfrm>
-            <a:off x="868680" y="1874520"/>
+            <a:off x="868680" y="1783080"/>
             <a:ext cx="4754880" cy="457200"/>
           </a:xfrm>
           <a:prstGeom prst="rect">
@@ -10884,7 +11792,7 @@
                 <a:ea typeface="Cambria" pitchFamily="34" charset="-122"/>
                 <a:cs typeface="Cambria" pitchFamily="34" charset="-120"/>
               </a:rPr>
-              <a:t>Позитивные · 5</a:t>
+              <a:t>Позитивные · 6</a:t>
             </a:r>
             <a:endParaRPr lang="en-US" sz="2000" dirty="0"/>
           </a:p>
@@ -10898,8 +11806,141 @@
         </p:nvSpPr>
         <p:spPr>
           <a:xfrm>
-            <a:off x="868680" y="2514600"/>
-            <a:ext cx="960120" cy="329184"/>
+            <a:off x="868680" y="2377440"/>
+            <a:ext cx="822960" cy="329184"/>
+          </a:xfrm>
+          <a:prstGeom prst="roundRect">
+            <a:avLst>
+              <a:gd name="adj" fmla="val 50000"/>
+            </a:avLst>
+          </a:prstGeom>
+          <a:solidFill>
+            <a:srgbClr val="2F7D4F"/>
+          </a:solidFill>
+          <a:ln w="12700">
+            <a:solidFill>
+              <a:srgbClr val="2F7D4F"/>
+            </a:solidFill>
+            <a:prstDash val="solid"/>
+          </a:ln>
+        </p:spPr>
+      </p:sp>
+      <p:sp>
+        <p:nvSpPr>
+          <p:cNvPr id="8" name="Text 6"/>
+          <p:cNvSpPr txBox="1"/>
+          <p:nvPr/>
+        </p:nvSpPr>
+        <p:spPr>
+          <a:xfrm>
+            <a:off x="868680" y="2377440"/>
+            <a:ext cx="822960" cy="329184"/>
+          </a:xfrm>
+          <a:prstGeom prst="rect">
+            <a:avLst/>
+          </a:prstGeom>
+          <a:noFill/>
+          <a:ln/>
+        </p:spPr>
+        <p:txBody>
+          <a:bodyPr wrap="square" lIns="0" tIns="0" rIns="0" bIns="0" rtlCol="0" anchor="ctr"/>
+          <a:lstStyle/>
+          <a:p>
+            <a:pPr algn="ctr" indent="0" marL="0">
+              <a:buNone/>
+            </a:pPr>
+            <a:r>
+              <a:rPr lang="en-US" sz="1200" b="1" dirty="0">
+                <a:solidFill>
+                  <a:srgbClr val="FFFFFF"/>
+                </a:solidFill>
+                <a:latin typeface="Calibri" pitchFamily="34" charset="0"/>
+                <a:ea typeface="Calibri" pitchFamily="34" charset="-122"/>
+                <a:cs typeface="Calibri" pitchFamily="34" charset="-120"/>
+              </a:rPr>
+              <a:t>POST</a:t>
+            </a:r>
+            <a:endParaRPr lang="en-US" sz="1200" dirty="0"/>
+          </a:p>
+        </p:txBody>
+      </p:sp>
+      <p:sp>
+        <p:nvSpPr>
+          <p:cNvPr id="9" name="Text 7"/>
+          <p:cNvSpPr txBox="1"/>
+          <p:nvPr/>
+        </p:nvSpPr>
+        <p:spPr>
+          <a:xfrm>
+            <a:off x="1828800" y="2322576"/>
+            <a:ext cx="4069080" cy="438912"/>
+          </a:xfrm>
+          <a:prstGeom prst="rect">
+            <a:avLst/>
+          </a:prstGeom>
+          <a:noFill/>
+          <a:ln/>
+        </p:spPr>
+        <p:txBody>
+          <a:bodyPr wrap="square" lIns="0" tIns="0" rIns="0" bIns="0" rtlCol="0" anchor="ctr"/>
+          <a:lstStyle/>
+          <a:p>
+            <a:pPr indent="0" marL="0">
+              <a:buNone/>
+            </a:pPr>
+            <a:r>
+              <a:rPr lang="en-US" sz="1200" b="1" dirty="0">
+                <a:solidFill>
+                  <a:srgbClr val="16323B"/>
+                </a:solidFill>
+                <a:latin typeface="Courier New" pitchFamily="34" charset="0"/>
+                <a:ea typeface="Courier New" pitchFamily="34" charset="-122"/>
+                <a:cs typeface="Courier New" pitchFamily="34" charset="-120"/>
+              </a:rPr>
+              <a:t>/auth/anonymous</a:t>
+            </a:r>
+            <a:pPr indent="0" marL="0">
+              <a:buNone/>
+            </a:pPr>
+            <a:r>
+              <a:rPr lang="en-US" sz="1300" b="1" dirty="0">
+                <a:solidFill>
+                  <a:srgbClr val="2F7D4F"/>
+                </a:solidFill>
+                <a:latin typeface="Calibri" pitchFamily="34" charset="0"/>
+                <a:ea typeface="Calibri" pitchFamily="34" charset="-122"/>
+                <a:cs typeface="Calibri" pitchFamily="34" charset="-120"/>
+              </a:rPr>
+              <a:t>  →  201</a:t>
+            </a:r>
+            <a:pPr indent="0" marL="0">
+              <a:buNone/>
+            </a:pPr>
+            <a:r>
+              <a:rPr lang="en-US" sz="1200" dirty="0">
+                <a:solidFill>
+                  <a:srgbClr val="5A7179"/>
+                </a:solidFill>
+                <a:latin typeface="Calibri" pitchFamily="34" charset="0"/>
+                <a:ea typeface="Calibri" pitchFamily="34" charset="-122"/>
+                <a:cs typeface="Calibri" pitchFamily="34" charset="-120"/>
+              </a:rPr>
+              <a:t>  токен</a:t>
+            </a:r>
+            <a:endParaRPr lang="en-US" sz="1200" dirty="0"/>
+          </a:p>
+        </p:txBody>
+      </p:sp>
+      <p:sp>
+        <p:nvSpPr>
+          <p:cNvPr id="10" name="Shape 8"/>
+          <p:cNvSpPr/>
+          <p:nvPr/>
+        </p:nvSpPr>
+        <p:spPr>
+          <a:xfrm>
+            <a:off x="868680" y="2926080"/>
+            <a:ext cx="822960" cy="329184"/>
           </a:xfrm>
           <a:prstGeom prst="roundRect">
             <a:avLst>
@@ -10919,14 +11960,14 @@
       </p:sp>
       <p:sp>
         <p:nvSpPr>
-          <p:cNvPr id="8" name="Text 6"/>
-          <p:cNvSpPr txBox="1"/>
-          <p:nvPr/>
-        </p:nvSpPr>
-        <p:spPr>
-          <a:xfrm>
-            <a:off x="868680" y="2514600"/>
-            <a:ext cx="960120" cy="329184"/>
+          <p:cNvPr id="11" name="Text 9"/>
+          <p:cNvSpPr txBox="1"/>
+          <p:nvPr/>
+        </p:nvSpPr>
+        <p:spPr>
+          <a:xfrm>
+            <a:off x="868680" y="2926080"/>
+            <a:ext cx="822960" cy="329184"/>
           </a:xfrm>
           <a:prstGeom prst="rect">
             <a:avLst/>
@@ -10958,30 +11999,30 @@
       </p:sp>
       <p:sp>
         <p:nvSpPr>
-          <p:cNvPr id="9" name="Text 7"/>
-          <p:cNvSpPr txBox="1"/>
-          <p:nvPr/>
-        </p:nvSpPr>
-        <p:spPr>
-          <a:xfrm>
-            <a:off x="1965960" y="2468880"/>
-            <a:ext cx="3931920" cy="420624"/>
-          </a:xfrm>
-          <a:prstGeom prst="rect">
-            <a:avLst/>
-          </a:prstGeom>
-          <a:noFill/>
-          <a:ln/>
-        </p:spPr>
-        <p:txBody>
-          <a:bodyPr wrap="square" lIns="0" tIns="0" rIns="0" bIns="0" rtlCol="0" anchor="ctr"/>
-          <a:lstStyle/>
-          <a:p>
-            <a:pPr indent="0" marL="0">
-              <a:buNone/>
-            </a:pPr>
-            <a:r>
-              <a:rPr lang="en-US" sz="1300" b="1" dirty="0">
+          <p:cNvPr id="12" name="Text 10"/>
+          <p:cNvSpPr txBox="1"/>
+          <p:nvPr/>
+        </p:nvSpPr>
+        <p:spPr>
+          <a:xfrm>
+            <a:off x="1828800" y="2871216"/>
+            <a:ext cx="4069080" cy="438912"/>
+          </a:xfrm>
+          <a:prstGeom prst="rect">
+            <a:avLst/>
+          </a:prstGeom>
+          <a:noFill/>
+          <a:ln/>
+        </p:spPr>
+        <p:txBody>
+          <a:bodyPr wrap="square" lIns="0" tIns="0" rIns="0" bIns="0" rtlCol="0" anchor="ctr"/>
+          <a:lstStyle/>
+          <a:p>
+            <a:pPr indent="0" marL="0">
+              <a:buNone/>
+            </a:pPr>
+            <a:r>
+              <a:rPr lang="en-US" sz="1200" b="1" dirty="0">
                 <a:solidFill>
                   <a:srgbClr val="16323B"/>
                 </a:solidFill>
@@ -10989,13 +12030,13 @@
                 <a:ea typeface="Courier New" pitchFamily="34" charset="-122"/>
                 <a:cs typeface="Courier New" pitchFamily="34" charset="-120"/>
               </a:rPr>
-              <a:t>/todos</a:t>
-            </a:r>
-            <a:pPr indent="0" marL="0">
-              <a:buNone/>
-            </a:pPr>
-            <a:r>
-              <a:rPr lang="en-US" sz="1400" b="1" dirty="0">
+              <a:t>/search/product</a:t>
+            </a:r>
+            <a:pPr indent="0" marL="0">
+              <a:buNone/>
+            </a:pPr>
+            <a:r>
+              <a:rPr lang="en-US" sz="1300" b="1" dirty="0">
                 <a:solidFill>
                   <a:srgbClr val="2F7D4F"/>
                 </a:solidFill>
@@ -11009,7 +12050,7 @@
               <a:buNone/>
             </a:pPr>
             <a:r>
-              <a:rPr lang="en-US" sz="1300" dirty="0">
+              <a:rPr lang="en-US" sz="1200" dirty="0">
                 <a:solidFill>
                   <a:srgbClr val="5A7179"/>
                 </a:solidFill>
@@ -11017,22 +12058,22 @@
                 <a:ea typeface="Calibri" pitchFamily="34" charset="-122"/>
                 <a:cs typeface="Calibri" pitchFamily="34" charset="-120"/>
               </a:rPr>
-              <a:t>   список</a:t>
-            </a:r>
-            <a:endParaRPr lang="en-US" sz="1300" dirty="0"/>
-          </a:p>
-        </p:txBody>
-      </p:sp>
-      <p:sp>
-        <p:nvSpPr>
-          <p:cNvPr id="10" name="Shape 8"/>
+              <a:t>  по названию</a:t>
+            </a:r>
+            <a:endParaRPr lang="en-US" sz="1200" dirty="0"/>
+          </a:p>
+        </p:txBody>
+      </p:sp>
+      <p:sp>
+        <p:nvSpPr>
+          <p:cNvPr id="13" name="Shape 11"/>
           <p:cNvSpPr/>
           <p:nvPr/>
         </p:nvSpPr>
         <p:spPr>
           <a:xfrm>
-            <a:off x="868680" y="3118104"/>
-            <a:ext cx="960120" cy="329184"/>
+            <a:off x="868680" y="3474720"/>
+            <a:ext cx="822960" cy="329184"/>
           </a:xfrm>
           <a:prstGeom prst="roundRect">
             <a:avLst>
@@ -11052,14 +12093,14 @@
       </p:sp>
       <p:sp>
         <p:nvSpPr>
-          <p:cNvPr id="11" name="Text 9"/>
-          <p:cNvSpPr txBox="1"/>
-          <p:nvPr/>
-        </p:nvSpPr>
-        <p:spPr>
-          <a:xfrm>
-            <a:off x="868680" y="3118104"/>
-            <a:ext cx="960120" cy="329184"/>
+          <p:cNvPr id="14" name="Text 12"/>
+          <p:cNvSpPr txBox="1"/>
+          <p:nvPr/>
+        </p:nvSpPr>
+        <p:spPr>
+          <a:xfrm>
+            <a:off x="868680" y="3474720"/>
+            <a:ext cx="822960" cy="329184"/>
           </a:xfrm>
           <a:prstGeom prst="rect">
             <a:avLst/>
@@ -11091,30 +12132,30 @@
       </p:sp>
       <p:sp>
         <p:nvSpPr>
-          <p:cNvPr id="12" name="Text 10"/>
-          <p:cNvSpPr txBox="1"/>
-          <p:nvPr/>
-        </p:nvSpPr>
-        <p:spPr>
-          <a:xfrm>
-            <a:off x="1965960" y="3072384"/>
-            <a:ext cx="3931920" cy="420624"/>
-          </a:xfrm>
-          <a:prstGeom prst="rect">
-            <a:avLst/>
-          </a:prstGeom>
-          <a:noFill/>
-          <a:ln/>
-        </p:spPr>
-        <p:txBody>
-          <a:bodyPr wrap="square" lIns="0" tIns="0" rIns="0" bIns="0" rtlCol="0" anchor="ctr"/>
-          <a:lstStyle/>
-          <a:p>
-            <a:pPr indent="0" marL="0">
-              <a:buNone/>
-            </a:pPr>
-            <a:r>
-              <a:rPr lang="en-US" sz="1300" b="1" dirty="0">
+          <p:cNvPr id="15" name="Text 13"/>
+          <p:cNvSpPr txBox="1"/>
+          <p:nvPr/>
+        </p:nvSpPr>
+        <p:spPr>
+          <a:xfrm>
+            <a:off x="1828800" y="3419856"/>
+            <a:ext cx="4069080" cy="438912"/>
+          </a:xfrm>
+          <a:prstGeom prst="rect">
+            <a:avLst/>
+          </a:prstGeom>
+          <a:noFill/>
+          <a:ln/>
+        </p:spPr>
+        <p:txBody>
+          <a:bodyPr wrap="square" lIns="0" tIns="0" rIns="0" bIns="0" rtlCol="0" anchor="ctr"/>
+          <a:lstStyle/>
+          <a:p>
+            <a:pPr indent="0" marL="0">
+              <a:buNone/>
+            </a:pPr>
+            <a:r>
+              <a:rPr lang="en-US" sz="1200" b="1" dirty="0">
                 <a:solidFill>
                   <a:srgbClr val="16323B"/>
                 </a:solidFill>
@@ -11122,13 +12163,13 @@
                 <a:ea typeface="Courier New" pitchFamily="34" charset="-122"/>
                 <a:cs typeface="Courier New" pitchFamily="34" charset="-120"/>
               </a:rPr>
-              <a:t>/todos/1</a:t>
-            </a:r>
-            <a:pPr indent="0" marL="0">
-              <a:buNone/>
-            </a:pPr>
-            <a:r>
-              <a:rPr lang="en-US" sz="1400" b="1" dirty="0">
+              <a:t>/search/product</a:t>
+            </a:r>
+            <a:pPr indent="0" marL="0">
+              <a:buNone/>
+            </a:pPr>
+            <a:r>
+              <a:rPr lang="en-US" sz="1300" b="1" dirty="0">
                 <a:solidFill>
                   <a:srgbClr val="2F7D4F"/>
                 </a:solidFill>
@@ -11142,7 +12183,7 @@
               <a:buNone/>
             </a:pPr>
             <a:r>
-              <a:rPr lang="en-US" sz="1300" dirty="0">
+              <a:rPr lang="en-US" sz="1200" dirty="0">
                 <a:solidFill>
                   <a:srgbClr val="5A7179"/>
                 </a:solidFill>
@@ -11150,22 +12191,22 @@
                 <a:ea typeface="Calibri" pitchFamily="34" charset="-122"/>
                 <a:cs typeface="Calibri" pitchFamily="34" charset="-120"/>
               </a:rPr>
-              <a:t>   одна задача</a:t>
-            </a:r>
-            <a:endParaRPr lang="en-US" sz="1300" dirty="0"/>
-          </a:p>
-        </p:txBody>
-      </p:sp>
-      <p:sp>
-        <p:nvSpPr>
-          <p:cNvPr id="13" name="Shape 11"/>
+              <a:t>  по автору</a:t>
+            </a:r>
+            <a:endParaRPr lang="en-US" sz="1200" dirty="0"/>
+          </a:p>
+        </p:txBody>
+      </p:sp>
+      <p:sp>
+        <p:nvSpPr>
+          <p:cNvPr id="16" name="Shape 14"/>
           <p:cNvSpPr/>
           <p:nvPr/>
         </p:nvSpPr>
         <p:spPr>
           <a:xfrm>
-            <a:off x="868680" y="3721608"/>
-            <a:ext cx="960120" cy="329184"/>
+            <a:off x="868680" y="4023360"/>
+            <a:ext cx="822960" cy="329184"/>
           </a:xfrm>
           <a:prstGeom prst="roundRect">
             <a:avLst>
@@ -11173,11 +12214,11 @@
             </a:avLst>
           </a:prstGeom>
           <a:solidFill>
-            <a:srgbClr val="2F7D4F"/>
+            <a:srgbClr val="2BA79A"/>
           </a:solidFill>
           <a:ln w="12700">
             <a:solidFill>
-              <a:srgbClr val="2F7D4F"/>
+              <a:srgbClr val="2BA79A"/>
             </a:solidFill>
             <a:prstDash val="solid"/>
           </a:ln>
@@ -11185,14 +12226,14 @@
       </p:sp>
       <p:sp>
         <p:nvSpPr>
-          <p:cNvPr id="14" name="Text 12"/>
-          <p:cNvSpPr txBox="1"/>
-          <p:nvPr/>
-        </p:nvSpPr>
-        <p:spPr>
-          <a:xfrm>
-            <a:off x="868680" y="3721608"/>
-            <a:ext cx="960120" cy="329184"/>
+          <p:cNvPr id="17" name="Text 15"/>
+          <p:cNvSpPr txBox="1"/>
+          <p:nvPr/>
+        </p:nvSpPr>
+        <p:spPr>
+          <a:xfrm>
+            <a:off x="868680" y="4023360"/>
+            <a:ext cx="822960" cy="329184"/>
           </a:xfrm>
           <a:prstGeom prst="rect">
             <a:avLst/>
@@ -11216,7 +12257,7 @@
                 <a:ea typeface="Calibri" pitchFamily="34" charset="-122"/>
                 <a:cs typeface="Calibri" pitchFamily="34" charset="-120"/>
               </a:rPr>
-              <a:t>POST</a:t>
+              <a:t>GET</a:t>
             </a:r>
             <a:endParaRPr lang="en-US" sz="1200" dirty="0"/>
           </a:p>
@@ -11224,30 +12265,30 @@
       </p:sp>
       <p:sp>
         <p:nvSpPr>
-          <p:cNvPr id="15" name="Text 13"/>
-          <p:cNvSpPr txBox="1"/>
-          <p:nvPr/>
-        </p:nvSpPr>
-        <p:spPr>
-          <a:xfrm>
-            <a:off x="1965960" y="3675888"/>
-            <a:ext cx="3931920" cy="420624"/>
-          </a:xfrm>
-          <a:prstGeom prst="rect">
-            <a:avLst/>
-          </a:prstGeom>
-          <a:noFill/>
-          <a:ln/>
-        </p:spPr>
-        <p:txBody>
-          <a:bodyPr wrap="square" lIns="0" tIns="0" rIns="0" bIns="0" rtlCol="0" anchor="ctr"/>
-          <a:lstStyle/>
-          <a:p>
-            <a:pPr indent="0" marL="0">
-              <a:buNone/>
-            </a:pPr>
-            <a:r>
-              <a:rPr lang="en-US" sz="1300" b="1" dirty="0">
+          <p:cNvPr id="18" name="Text 16"/>
+          <p:cNvSpPr txBox="1"/>
+          <p:nvPr/>
+        </p:nvSpPr>
+        <p:spPr>
+          <a:xfrm>
+            <a:off x="1828800" y="3968496"/>
+            <a:ext cx="4069080" cy="438912"/>
+          </a:xfrm>
+          <a:prstGeom prst="rect">
+            <a:avLst/>
+          </a:prstGeom>
+          <a:noFill/>
+          <a:ln/>
+        </p:spPr>
+        <p:txBody>
+          <a:bodyPr wrap="square" lIns="0" tIns="0" rIns="0" bIns="0" rtlCol="0" anchor="ctr"/>
+          <a:lstStyle/>
+          <a:p>
+            <a:pPr indent="0" marL="0">
+              <a:buNone/>
+            </a:pPr>
+            <a:r>
+              <a:rPr lang="en-US" sz="1200" b="1" dirty="0">
                 <a:solidFill>
                   <a:srgbClr val="16323B"/>
                 </a:solidFill>
@@ -11255,13 +12296,13 @@
                 <a:ea typeface="Courier New" pitchFamily="34" charset="-122"/>
                 <a:cs typeface="Courier New" pitchFamily="34" charset="-120"/>
               </a:rPr>
-              <a:t>/todos</a:t>
-            </a:r>
-            <a:pPr indent="0" marL="0">
-              <a:buNone/>
-            </a:pPr>
-            <a:r>
-              <a:rPr lang="en-US" sz="1400" b="1" dirty="0">
+              <a:t>/search/product</a:t>
+            </a:r>
+            <a:pPr indent="0" marL="0">
+              <a:buNone/>
+            </a:pPr>
+            <a:r>
+              <a:rPr lang="en-US" sz="1300" b="1" dirty="0">
                 <a:solidFill>
                   <a:srgbClr val="2F7D4F"/>
                 </a:solidFill>
@@ -11269,13 +12310,13 @@
                 <a:ea typeface="Calibri" pitchFamily="34" charset="-122"/>
                 <a:cs typeface="Calibri" pitchFamily="34" charset="-120"/>
               </a:rPr>
-              <a:t>  →  201</a:t>
-            </a:r>
-            <a:pPr indent="0" marL="0">
-              <a:buNone/>
-            </a:pPr>
-            <a:r>
-              <a:rPr lang="en-US" sz="1300" dirty="0">
+              <a:t>  →  200</a:t>
+            </a:r>
+            <a:pPr indent="0" marL="0">
+              <a:buNone/>
+            </a:pPr>
+            <a:r>
+              <a:rPr lang="en-US" sz="1200" dirty="0">
                 <a:solidFill>
                   <a:srgbClr val="5A7179"/>
                 </a:solidFill>
@@ -11283,22 +12324,22 @@
                 <a:ea typeface="Calibri" pitchFamily="34" charset="-122"/>
                 <a:cs typeface="Calibri" pitchFamily="34" charset="-120"/>
               </a:rPr>
-              <a:t>   создание</a:t>
-            </a:r>
-            <a:endParaRPr lang="en-US" sz="1300" dirty="0"/>
-          </a:p>
-        </p:txBody>
-      </p:sp>
-      <p:sp>
-        <p:nvSpPr>
-          <p:cNvPr id="16" name="Shape 14"/>
+              <a:t>  страница 2</a:t>
+            </a:r>
+            <a:endParaRPr lang="en-US" sz="1200" dirty="0"/>
+          </a:p>
+        </p:txBody>
+      </p:sp>
+      <p:sp>
+        <p:nvSpPr>
+          <p:cNvPr id="19" name="Shape 17"/>
           <p:cNvSpPr/>
           <p:nvPr/>
         </p:nvSpPr>
         <p:spPr>
           <a:xfrm>
-            <a:off x="868680" y="4325112"/>
-            <a:ext cx="960120" cy="329184"/>
+            <a:off x="868680" y="4572000"/>
+            <a:ext cx="822960" cy="329184"/>
           </a:xfrm>
           <a:prstGeom prst="roundRect">
             <a:avLst>
@@ -11306,11 +12347,11 @@
             </a:avLst>
           </a:prstGeom>
           <a:solidFill>
-            <a:srgbClr val="0F6E7A"/>
+            <a:srgbClr val="2BA79A"/>
           </a:solidFill>
           <a:ln w="12700">
             <a:solidFill>
-              <a:srgbClr val="0F6E7A"/>
+              <a:srgbClr val="2BA79A"/>
             </a:solidFill>
             <a:prstDash val="solid"/>
           </a:ln>
@@ -11318,14 +12359,14 @@
       </p:sp>
       <p:sp>
         <p:nvSpPr>
-          <p:cNvPr id="17" name="Text 15"/>
-          <p:cNvSpPr txBox="1"/>
-          <p:nvPr/>
-        </p:nvSpPr>
-        <p:spPr>
-          <a:xfrm>
-            <a:off x="868680" y="4325112"/>
-            <a:ext cx="960120" cy="329184"/>
+          <p:cNvPr id="20" name="Text 18"/>
+          <p:cNvSpPr txBox="1"/>
+          <p:nvPr/>
+        </p:nvSpPr>
+        <p:spPr>
+          <a:xfrm>
+            <a:off x="868680" y="4572000"/>
+            <a:ext cx="822960" cy="329184"/>
           </a:xfrm>
           <a:prstGeom prst="rect">
             <a:avLst/>
@@ -11349,7 +12390,7 @@
                 <a:ea typeface="Calibri" pitchFamily="34" charset="-122"/>
                 <a:cs typeface="Calibri" pitchFamily="34" charset="-120"/>
               </a:rPr>
-              <a:t>PATCH</a:t>
+              <a:t>GET</a:t>
             </a:r>
             <a:endParaRPr lang="en-US" sz="1200" dirty="0"/>
           </a:p>
@@ -11357,30 +12398,30 @@
       </p:sp>
       <p:sp>
         <p:nvSpPr>
-          <p:cNvPr id="18" name="Text 16"/>
-          <p:cNvSpPr txBox="1"/>
-          <p:nvPr/>
-        </p:nvSpPr>
-        <p:spPr>
-          <a:xfrm>
-            <a:off x="1965960" y="4279392"/>
-            <a:ext cx="3931920" cy="420624"/>
-          </a:xfrm>
-          <a:prstGeom prst="rect">
-            <a:avLst/>
-          </a:prstGeom>
-          <a:noFill/>
-          <a:ln/>
-        </p:spPr>
-        <p:txBody>
-          <a:bodyPr wrap="square" lIns="0" tIns="0" rIns="0" bIns="0" rtlCol="0" anchor="ctr"/>
-          <a:lstStyle/>
-          <a:p>
-            <a:pPr indent="0" marL="0">
-              <a:buNone/>
-            </a:pPr>
-            <a:r>
-              <a:rPr lang="en-US" sz="1300" b="1" dirty="0">
+          <p:cNvPr id="21" name="Text 19"/>
+          <p:cNvSpPr txBox="1"/>
+          <p:nvPr/>
+        </p:nvSpPr>
+        <p:spPr>
+          <a:xfrm>
+            <a:off x="1828800" y="4517136"/>
+            <a:ext cx="4069080" cy="438912"/>
+          </a:xfrm>
+          <a:prstGeom prst="rect">
+            <a:avLst/>
+          </a:prstGeom>
+          <a:noFill/>
+          <a:ln/>
+        </p:spPr>
+        <p:txBody>
+          <a:bodyPr wrap="square" lIns="0" tIns="0" rIns="0" bIns="0" rtlCol="0" anchor="ctr"/>
+          <a:lstStyle/>
+          <a:p>
+            <a:pPr indent="0" marL="0">
+              <a:buNone/>
+            </a:pPr>
+            <a:r>
+              <a:rPr lang="en-US" sz="1200" b="1" dirty="0">
                 <a:solidFill>
                   <a:srgbClr val="16323B"/>
                 </a:solidFill>
@@ -11388,13 +12429,13 @@
                 <a:ea typeface="Courier New" pitchFamily="34" charset="-122"/>
                 <a:cs typeface="Courier New" pitchFamily="34" charset="-120"/>
               </a:rPr>
-              <a:t>/todos/1</a:t>
-            </a:r>
-            <a:pPr indent="0" marL="0">
-              <a:buNone/>
-            </a:pPr>
-            <a:r>
-              <a:rPr lang="en-US" sz="1400" b="1" dirty="0">
+              <a:t>/search-phrase-suggests</a:t>
+            </a:r>
+            <a:pPr indent="0" marL="0">
+              <a:buNone/>
+            </a:pPr>
+            <a:r>
+              <a:rPr lang="en-US" sz="1300" b="1" dirty="0">
                 <a:solidFill>
                   <a:srgbClr val="2F7D4F"/>
                 </a:solidFill>
@@ -11408,7 +12449,7 @@
               <a:buNone/>
             </a:pPr>
             <a:r>
-              <a:rPr lang="en-US" sz="1300" dirty="0">
+              <a:rPr lang="en-US" sz="1200" dirty="0">
                 <a:solidFill>
                   <a:srgbClr val="5A7179"/>
                 </a:solidFill>
@@ -11416,22 +12457,22 @@
                 <a:ea typeface="Calibri" pitchFamily="34" charset="-122"/>
                 <a:cs typeface="Calibri" pitchFamily="34" charset="-120"/>
               </a:rPr>
-              <a:t>   изменение</a:t>
-            </a:r>
-            <a:endParaRPr lang="en-US" sz="1300" dirty="0"/>
-          </a:p>
-        </p:txBody>
-      </p:sp>
-      <p:sp>
-        <p:nvSpPr>
-          <p:cNvPr id="19" name="Shape 17"/>
+              <a:t>  подсказки</a:t>
+            </a:r>
+            <a:endParaRPr lang="en-US" sz="1200" dirty="0"/>
+          </a:p>
+        </p:txBody>
+      </p:sp>
+      <p:sp>
+        <p:nvSpPr>
+          <p:cNvPr id="22" name="Shape 20"/>
           <p:cNvSpPr/>
           <p:nvPr/>
         </p:nvSpPr>
         <p:spPr>
           <a:xfrm>
-            <a:off x="868680" y="4928616"/>
-            <a:ext cx="960120" cy="329184"/>
+            <a:off x="868680" y="5120640"/>
+            <a:ext cx="822960" cy="329184"/>
           </a:xfrm>
           <a:prstGeom prst="roundRect">
             <a:avLst>
@@ -11439,11 +12480,11 @@
             </a:avLst>
           </a:prstGeom>
           <a:solidFill>
-            <a:srgbClr val="E8692E"/>
+            <a:srgbClr val="2BA79A"/>
           </a:solidFill>
           <a:ln w="12700">
             <a:solidFill>
-              <a:srgbClr val="E8692E"/>
+              <a:srgbClr val="2BA79A"/>
             </a:solidFill>
             <a:prstDash val="solid"/>
           </a:ln>
@@ -11451,14 +12492,14 @@
       </p:sp>
       <p:sp>
         <p:nvSpPr>
-          <p:cNvPr id="20" name="Text 18"/>
-          <p:cNvSpPr txBox="1"/>
-          <p:nvPr/>
-        </p:nvSpPr>
-        <p:spPr>
-          <a:xfrm>
-            <a:off x="868680" y="4928616"/>
-            <a:ext cx="960120" cy="329184"/>
+          <p:cNvPr id="23" name="Text 21"/>
+          <p:cNvSpPr txBox="1"/>
+          <p:nvPr/>
+        </p:nvSpPr>
+        <p:spPr>
+          <a:xfrm>
+            <a:off x="868680" y="5120640"/>
+            <a:ext cx="822960" cy="329184"/>
           </a:xfrm>
           <a:prstGeom prst="rect">
             <a:avLst/>
@@ -11482,7 +12523,7 @@
                 <a:ea typeface="Calibri" pitchFamily="34" charset="-122"/>
                 <a:cs typeface="Calibri" pitchFamily="34" charset="-120"/>
               </a:rPr>
-              <a:t>DELETE</a:t>
+              <a:t>GET</a:t>
             </a:r>
             <a:endParaRPr lang="en-US" sz="1200" dirty="0"/>
           </a:p>
@@ -11490,30 +12531,30 @@
       </p:sp>
       <p:sp>
         <p:nvSpPr>
-          <p:cNvPr id="21" name="Text 19"/>
-          <p:cNvSpPr txBox="1"/>
-          <p:nvPr/>
-        </p:nvSpPr>
-        <p:spPr>
-          <a:xfrm>
-            <a:off x="1965960" y="4882896"/>
-            <a:ext cx="3931920" cy="420624"/>
-          </a:xfrm>
-          <a:prstGeom prst="rect">
-            <a:avLst/>
-          </a:prstGeom>
-          <a:noFill/>
-          <a:ln/>
-        </p:spPr>
-        <p:txBody>
-          <a:bodyPr wrap="square" lIns="0" tIns="0" rIns="0" bIns="0" rtlCol="0" anchor="ctr"/>
-          <a:lstStyle/>
-          <a:p>
-            <a:pPr indent="0" marL="0">
-              <a:buNone/>
-            </a:pPr>
-            <a:r>
-              <a:rPr lang="en-US" sz="1300" b="1" dirty="0">
+          <p:cNvPr id="24" name="Text 22"/>
+          <p:cNvSpPr txBox="1"/>
+          <p:nvPr/>
+        </p:nvSpPr>
+        <p:spPr>
+          <a:xfrm>
+            <a:off x="1828800" y="5065776"/>
+            <a:ext cx="4069080" cy="438912"/>
+          </a:xfrm>
+          <a:prstGeom prst="rect">
+            <a:avLst/>
+          </a:prstGeom>
+          <a:noFill/>
+          <a:ln/>
+        </p:spPr>
+        <p:txBody>
+          <a:bodyPr wrap="square" lIns="0" tIns="0" rIns="0" bIns="0" rtlCol="0" anchor="ctr"/>
+          <a:lstStyle/>
+          <a:p>
+            <a:pPr indent="0" marL="0">
+              <a:buNone/>
+            </a:pPr>
+            <a:r>
+              <a:rPr lang="en-US" sz="1200" b="1" dirty="0">
                 <a:solidFill>
                   <a:srgbClr val="16323B"/>
                 </a:solidFill>
@@ -11521,13 +12562,13 @@
                 <a:ea typeface="Courier New" pitchFamily="34" charset="-122"/>
                 <a:cs typeface="Courier New" pitchFamily="34" charset="-120"/>
               </a:rPr>
-              <a:t>/todos/1</a:t>
-            </a:r>
-            <a:pPr indent="0" marL="0">
-              <a:buNone/>
-            </a:pPr>
-            <a:r>
-              <a:rPr lang="en-US" sz="1400" b="1" dirty="0">
+              <a:t>/popular-search-phrases</a:t>
+            </a:r>
+            <a:pPr indent="0" marL="0">
+              <a:buNone/>
+            </a:pPr>
+            <a:r>
+              <a:rPr lang="en-US" sz="1300" b="1" dirty="0">
                 <a:solidFill>
                   <a:srgbClr val="2F7D4F"/>
                 </a:solidFill>
@@ -11541,7 +12582,7 @@
               <a:buNone/>
             </a:pPr>
             <a:r>
-              <a:rPr lang="en-US" sz="1300" dirty="0">
+              <a:rPr lang="en-US" sz="1200" dirty="0">
                 <a:solidFill>
                   <a:srgbClr val="5A7179"/>
                 </a:solidFill>
@@ -11549,26 +12590,26 @@
                 <a:ea typeface="Calibri" pitchFamily="34" charset="-122"/>
                 <a:cs typeface="Calibri" pitchFamily="34" charset="-120"/>
               </a:rPr>
-              <a:t>   удаление</a:t>
-            </a:r>
-            <a:endParaRPr lang="en-US" sz="1300" dirty="0"/>
-          </a:p>
-        </p:txBody>
-      </p:sp>
-      <p:sp>
-        <p:nvSpPr>
-          <p:cNvPr id="22" name="Shape 20"/>
+              <a:t>  популярные</a:t>
+            </a:r>
+            <a:endParaRPr lang="en-US" sz="1200" dirty="0"/>
+          </a:p>
+        </p:txBody>
+      </p:sp>
+      <p:sp>
+        <p:nvSpPr>
+          <p:cNvPr id="25" name="Shape 23"/>
           <p:cNvSpPr/>
           <p:nvPr/>
         </p:nvSpPr>
         <p:spPr>
           <a:xfrm>
-            <a:off x="6217920" y="1691640"/>
-            <a:ext cx="5440680" cy="3977640"/>
+            <a:off x="6217920" y="1645920"/>
+            <a:ext cx="5440680" cy="4160520"/>
           </a:xfrm>
           <a:prstGeom prst="roundRect">
             <a:avLst>
-              <a:gd name="adj" fmla="val 5057"/>
+              <a:gd name="adj" fmla="val 4835"/>
             </a:avLst>
           </a:prstGeom>
           <a:solidFill>
@@ -11591,13 +12632,13 @@
       </p:sp>
       <p:sp>
         <p:nvSpPr>
-          <p:cNvPr id="23" name="Text 21"/>
-          <p:cNvSpPr txBox="1"/>
-          <p:nvPr/>
-        </p:nvSpPr>
-        <p:spPr>
-          <a:xfrm>
-            <a:off x="6537960" y="1874520"/>
+          <p:cNvPr id="26" name="Text 24"/>
+          <p:cNvSpPr txBox="1"/>
+          <p:nvPr/>
+        </p:nvSpPr>
+        <p:spPr>
+          <a:xfrm>
+            <a:off x="6537960" y="1783080"/>
             <a:ext cx="4754880" cy="457200"/>
           </a:xfrm>
           <a:prstGeom prst="rect">
@@ -11622,7 +12663,7 @@
                 <a:ea typeface="Cambria" pitchFamily="34" charset="-122"/>
                 <a:cs typeface="Cambria" pitchFamily="34" charset="-120"/>
               </a:rPr>
-              <a:t>Негативные · 3</a:t>
+              <a:t>Негативные · 5</a:t>
             </a:r>
             <a:endParaRPr lang="en-US" sz="2000" dirty="0"/>
           </a:p>
@@ -11630,14 +12671,14 @@
       </p:sp>
       <p:sp>
         <p:nvSpPr>
-          <p:cNvPr id="24" name="Shape 22"/>
+          <p:cNvPr id="27" name="Shape 25"/>
           <p:cNvSpPr/>
           <p:nvPr/>
         </p:nvSpPr>
         <p:spPr>
           <a:xfrm>
-            <a:off x="6537960" y="2514600"/>
-            <a:ext cx="960120" cy="329184"/>
+            <a:off x="6537960" y="2377440"/>
+            <a:ext cx="822960" cy="329184"/>
           </a:xfrm>
           <a:prstGeom prst="roundRect">
             <a:avLst>
@@ -11657,14 +12698,14 @@
       </p:sp>
       <p:sp>
         <p:nvSpPr>
-          <p:cNvPr id="25" name="Text 23"/>
-          <p:cNvSpPr txBox="1"/>
-          <p:nvPr/>
-        </p:nvSpPr>
-        <p:spPr>
-          <a:xfrm>
-            <a:off x="6537960" y="2514600"/>
-            <a:ext cx="960120" cy="329184"/>
+          <p:cNvPr id="28" name="Text 26"/>
+          <p:cNvSpPr txBox="1"/>
+          <p:nvPr/>
+        </p:nvSpPr>
+        <p:spPr>
+          <a:xfrm>
+            <a:off x="6537960" y="2377440"/>
+            <a:ext cx="822960" cy="329184"/>
           </a:xfrm>
           <a:prstGeom prst="rect">
             <a:avLst/>
@@ -11696,30 +12737,30 @@
       </p:sp>
       <p:sp>
         <p:nvSpPr>
-          <p:cNvPr id="26" name="Text 24"/>
-          <p:cNvSpPr txBox="1"/>
-          <p:nvPr/>
-        </p:nvSpPr>
-        <p:spPr>
-          <a:xfrm>
-            <a:off x="7635240" y="2468880"/>
-            <a:ext cx="3931920" cy="420624"/>
-          </a:xfrm>
-          <a:prstGeom prst="rect">
-            <a:avLst/>
-          </a:prstGeom>
-          <a:noFill/>
-          <a:ln/>
-        </p:spPr>
-        <p:txBody>
-          <a:bodyPr wrap="square" lIns="0" tIns="0" rIns="0" bIns="0" rtlCol="0" anchor="ctr"/>
-          <a:lstStyle/>
-          <a:p>
-            <a:pPr indent="0" marL="0">
-              <a:buNone/>
-            </a:pPr>
-            <a:r>
-              <a:rPr lang="en-US" sz="1300" b="1" dirty="0">
+          <p:cNvPr id="29" name="Text 27"/>
+          <p:cNvSpPr txBox="1"/>
+          <p:nvPr/>
+        </p:nvSpPr>
+        <p:spPr>
+          <a:xfrm>
+            <a:off x="7498080" y="2322576"/>
+            <a:ext cx="4069080" cy="438912"/>
+          </a:xfrm>
+          <a:prstGeom prst="rect">
+            <a:avLst/>
+          </a:prstGeom>
+          <a:noFill/>
+          <a:ln/>
+        </p:spPr>
+        <p:txBody>
+          <a:bodyPr wrap="square" lIns="0" tIns="0" rIns="0" bIns="0" rtlCol="0" anchor="ctr"/>
+          <a:lstStyle/>
+          <a:p>
+            <a:pPr indent="0" marL="0">
+              <a:buNone/>
+            </a:pPr>
+            <a:r>
+              <a:rPr lang="en-US" sz="1200" b="1" dirty="0">
                 <a:solidFill>
                   <a:srgbClr val="16323B"/>
                 </a:solidFill>
@@ -11727,13 +12768,13 @@
                 <a:ea typeface="Courier New" pitchFamily="34" charset="-122"/>
                 <a:cs typeface="Courier New" pitchFamily="34" charset="-120"/>
               </a:rPr>
-              <a:t>/todos/999999</a:t>
-            </a:r>
-            <a:pPr indent="0" marL="0">
-              <a:buNone/>
-            </a:pPr>
-            <a:r>
-              <a:rPr lang="en-US" sz="1400" b="1" dirty="0">
+              <a:t>без токена</a:t>
+            </a:r>
+            <a:pPr indent="0" marL="0">
+              <a:buNone/>
+            </a:pPr>
+            <a:r>
+              <a:rPr lang="en-US" sz="1300" b="1" dirty="0">
                 <a:solidFill>
                   <a:srgbClr val="E8692E"/>
                 </a:solidFill>
@@ -11741,13 +12782,13 @@
                 <a:ea typeface="Calibri" pitchFamily="34" charset="-122"/>
                 <a:cs typeface="Calibri" pitchFamily="34" charset="-120"/>
               </a:rPr>
-              <a:t>  →  404</a:t>
-            </a:r>
-            <a:pPr indent="0" marL="0">
-              <a:buNone/>
-            </a:pPr>
-            <a:r>
-              <a:rPr lang="en-US" sz="1300" dirty="0">
+              <a:t>  →  401</a:t>
+            </a:r>
+            <a:pPr indent="0" marL="0">
+              <a:buNone/>
+            </a:pPr>
+            <a:r>
+              <a:rPr lang="en-US" sz="1200" dirty="0">
                 <a:solidFill>
                   <a:srgbClr val="5A7179"/>
                 </a:solidFill>
@@ -11755,22 +12796,22 @@
                 <a:ea typeface="Calibri" pitchFamily="34" charset="-122"/>
                 <a:cs typeface="Calibri" pitchFamily="34" charset="-120"/>
               </a:rPr>
-              <a:t>   нет такой</a:t>
-            </a:r>
-            <a:endParaRPr lang="en-US" sz="1300" dirty="0"/>
-          </a:p>
-        </p:txBody>
-      </p:sp>
-      <p:sp>
-        <p:nvSpPr>
-          <p:cNvPr id="27" name="Shape 25"/>
+              <a:t>  </a:t>
+            </a:r>
+            <a:endParaRPr lang="en-US" sz="1200" dirty="0"/>
+          </a:p>
+        </p:txBody>
+      </p:sp>
+      <p:sp>
+        <p:nvSpPr>
+          <p:cNvPr id="30" name="Shape 28"/>
           <p:cNvSpPr/>
           <p:nvPr/>
         </p:nvSpPr>
         <p:spPr>
           <a:xfrm>
-            <a:off x="6537960" y="3118104"/>
-            <a:ext cx="960120" cy="329184"/>
+            <a:off x="6537960" y="2926080"/>
+            <a:ext cx="822960" cy="329184"/>
           </a:xfrm>
           <a:prstGeom prst="roundRect">
             <a:avLst>
@@ -11790,14 +12831,14 @@
       </p:sp>
       <p:sp>
         <p:nvSpPr>
-          <p:cNvPr id="28" name="Text 26"/>
-          <p:cNvSpPr txBox="1"/>
-          <p:nvPr/>
-        </p:nvSpPr>
-        <p:spPr>
-          <a:xfrm>
-            <a:off x="6537960" y="3118104"/>
-            <a:ext cx="960120" cy="329184"/>
+          <p:cNvPr id="31" name="Text 29"/>
+          <p:cNvSpPr txBox="1"/>
+          <p:nvPr/>
+        </p:nvSpPr>
+        <p:spPr>
+          <a:xfrm>
+            <a:off x="6537960" y="2926080"/>
+            <a:ext cx="822960" cy="329184"/>
           </a:xfrm>
           <a:prstGeom prst="rect">
             <a:avLst/>
@@ -11829,30 +12870,30 @@
       </p:sp>
       <p:sp>
         <p:nvSpPr>
-          <p:cNvPr id="29" name="Text 27"/>
-          <p:cNvSpPr txBox="1"/>
-          <p:nvPr/>
-        </p:nvSpPr>
-        <p:spPr>
-          <a:xfrm>
-            <a:off x="7635240" y="3072384"/>
-            <a:ext cx="3931920" cy="420624"/>
-          </a:xfrm>
-          <a:prstGeom prst="rect">
-            <a:avLst/>
-          </a:prstGeom>
-          <a:noFill/>
-          <a:ln/>
-        </p:spPr>
-        <p:txBody>
-          <a:bodyPr wrap="square" lIns="0" tIns="0" rIns="0" bIns="0" rtlCol="0" anchor="ctr"/>
-          <a:lstStyle/>
-          <a:p>
-            <a:pPr indent="0" marL="0">
-              <a:buNone/>
-            </a:pPr>
-            <a:r>
-              <a:rPr lang="en-US" sz="1300" b="1" dirty="0">
+          <p:cNvPr id="32" name="Text 30"/>
+          <p:cNvSpPr txBox="1"/>
+          <p:nvPr/>
+        </p:nvSpPr>
+        <p:spPr>
+          <a:xfrm>
+            <a:off x="7498080" y="2871216"/>
+            <a:ext cx="4069080" cy="438912"/>
+          </a:xfrm>
+          <a:prstGeom prst="rect">
+            <a:avLst/>
+          </a:prstGeom>
+          <a:noFill/>
+          <a:ln/>
+        </p:spPr>
+        <p:txBody>
+          <a:bodyPr wrap="square" lIns="0" tIns="0" rIns="0" bIns="0" rtlCol="0" anchor="ctr"/>
+          <a:lstStyle/>
+          <a:p>
+            <a:pPr indent="0" marL="0">
+              <a:buNone/>
+            </a:pPr>
+            <a:r>
+              <a:rPr lang="en-US" sz="1200" b="1" dirty="0">
                 <a:solidFill>
                   <a:srgbClr val="16323B"/>
                 </a:solidFill>
@@ -11860,13 +12901,13 @@
                 <a:ea typeface="Courier New" pitchFamily="34" charset="-122"/>
                 <a:cs typeface="Courier New" pitchFamily="34" charset="-120"/>
               </a:rPr>
-              <a:t>/todos/not-a-number</a:t>
-            </a:r>
-            <a:pPr indent="0" marL="0">
-              <a:buNone/>
-            </a:pPr>
-            <a:r>
-              <a:rPr lang="en-US" sz="1400" b="1" dirty="0">
+              <a:t>phrase=a</a:t>
+            </a:r>
+            <a:pPr indent="0" marL="0">
+              <a:buNone/>
+            </a:pPr>
+            <a:r>
+              <a:rPr lang="en-US" sz="1300" b="1" dirty="0">
                 <a:solidFill>
                   <a:srgbClr val="E8692E"/>
                 </a:solidFill>
@@ -11874,13 +12915,13 @@
                 <a:ea typeface="Calibri" pitchFamily="34" charset="-122"/>
                 <a:cs typeface="Calibri" pitchFamily="34" charset="-120"/>
               </a:rPr>
-              <a:t>  →  404</a:t>
-            </a:r>
-            <a:pPr indent="0" marL="0">
-              <a:buNone/>
-            </a:pPr>
-            <a:r>
-              <a:rPr lang="en-US" sz="1300" dirty="0">
+              <a:t>  →  400</a:t>
+            </a:r>
+            <a:pPr indent="0" marL="0">
+              <a:buNone/>
+            </a:pPr>
+            <a:r>
+              <a:rPr lang="en-US" sz="1200" dirty="0">
                 <a:solidFill>
                   <a:srgbClr val="5A7179"/>
                 </a:solidFill>
@@ -11888,22 +12929,155 @@
                 <a:ea typeface="Calibri" pitchFamily="34" charset="-122"/>
                 <a:cs typeface="Calibri" pitchFamily="34" charset="-120"/>
               </a:rPr>
-              <a:t>   не 500</a:t>
-            </a:r>
-            <a:endParaRPr lang="en-US" sz="1300" dirty="0"/>
-          </a:p>
-        </p:txBody>
-      </p:sp>
-      <p:sp>
-        <p:nvSpPr>
-          <p:cNvPr id="30" name="Shape 28"/>
+              <a:t>  мин. 2 символа</a:t>
+            </a:r>
+            <a:endParaRPr lang="en-US" sz="1200" dirty="0"/>
+          </a:p>
+        </p:txBody>
+      </p:sp>
+      <p:sp>
+        <p:nvSpPr>
+          <p:cNvPr id="33" name="Shape 31"/>
           <p:cNvSpPr/>
           <p:nvPr/>
         </p:nvSpPr>
         <p:spPr>
           <a:xfrm>
-            <a:off x="6537960" y="3721608"/>
-            <a:ext cx="960120" cy="329184"/>
+            <a:off x="6537960" y="3474720"/>
+            <a:ext cx="822960" cy="329184"/>
+          </a:xfrm>
+          <a:prstGeom prst="roundRect">
+            <a:avLst>
+              <a:gd name="adj" fmla="val 50000"/>
+            </a:avLst>
+          </a:prstGeom>
+          <a:solidFill>
+            <a:srgbClr val="2BA79A"/>
+          </a:solidFill>
+          <a:ln w="12700">
+            <a:solidFill>
+              <a:srgbClr val="2BA79A"/>
+            </a:solidFill>
+            <a:prstDash val="solid"/>
+          </a:ln>
+        </p:spPr>
+      </p:sp>
+      <p:sp>
+        <p:nvSpPr>
+          <p:cNvPr id="34" name="Text 32"/>
+          <p:cNvSpPr txBox="1"/>
+          <p:nvPr/>
+        </p:nvSpPr>
+        <p:spPr>
+          <a:xfrm>
+            <a:off x="6537960" y="3474720"/>
+            <a:ext cx="822960" cy="329184"/>
+          </a:xfrm>
+          <a:prstGeom prst="rect">
+            <a:avLst/>
+          </a:prstGeom>
+          <a:noFill/>
+          <a:ln/>
+        </p:spPr>
+        <p:txBody>
+          <a:bodyPr wrap="square" lIns="0" tIns="0" rIns="0" bIns="0" rtlCol="0" anchor="ctr"/>
+          <a:lstStyle/>
+          <a:p>
+            <a:pPr algn="ctr" indent="0" marL="0">
+              <a:buNone/>
+            </a:pPr>
+            <a:r>
+              <a:rPr lang="en-US" sz="1200" b="1" dirty="0">
+                <a:solidFill>
+                  <a:srgbClr val="FFFFFF"/>
+                </a:solidFill>
+                <a:latin typeface="Calibri" pitchFamily="34" charset="0"/>
+                <a:ea typeface="Calibri" pitchFamily="34" charset="-122"/>
+                <a:cs typeface="Calibri" pitchFamily="34" charset="-120"/>
+              </a:rPr>
+              <a:t>GET</a:t>
+            </a:r>
+            <a:endParaRPr lang="en-US" sz="1200" dirty="0"/>
+          </a:p>
+        </p:txBody>
+      </p:sp>
+      <p:sp>
+        <p:nvSpPr>
+          <p:cNvPr id="35" name="Text 33"/>
+          <p:cNvSpPr txBox="1"/>
+          <p:nvPr/>
+        </p:nvSpPr>
+        <p:spPr>
+          <a:xfrm>
+            <a:off x="7498080" y="3419856"/>
+            <a:ext cx="4069080" cy="438912"/>
+          </a:xfrm>
+          <a:prstGeom prst="rect">
+            <a:avLst/>
+          </a:prstGeom>
+          <a:noFill/>
+          <a:ln/>
+        </p:spPr>
+        <p:txBody>
+          <a:bodyPr wrap="square" lIns="0" tIns="0" rIns="0" bIns="0" rtlCol="0" anchor="ctr"/>
+          <a:lstStyle/>
+          <a:p>
+            <a:pPr indent="0" marL="0">
+              <a:buNone/>
+            </a:pPr>
+            <a:r>
+              <a:rPr lang="en-US" sz="1200" b="1" dirty="0">
+                <a:solidFill>
+                  <a:srgbClr val="16323B"/>
+                </a:solidFill>
+                <a:latin typeface="Courier New" pitchFamily="34" charset="0"/>
+                <a:ea typeface="Courier New" pitchFamily="34" charset="-122"/>
+                <a:cs typeface="Courier New" pitchFamily="34" charset="-120"/>
+              </a:rPr>
+              <a:t>products[page]=-1</a:t>
+            </a:r>
+            <a:pPr indent="0" marL="0">
+              <a:buNone/>
+            </a:pPr>
+            <a:r>
+              <a:rPr lang="en-US" sz="1300" b="1" dirty="0">
+                <a:solidFill>
+                  <a:srgbClr val="E8692E"/>
+                </a:solidFill>
+                <a:latin typeface="Calibri" pitchFamily="34" charset="0"/>
+                <a:ea typeface="Calibri" pitchFamily="34" charset="-122"/>
+                <a:cs typeface="Calibri" pitchFamily="34" charset="-120"/>
+              </a:rPr>
+              <a:t>  →  422</a:t>
+            </a:r>
+            <a:pPr indent="0" marL="0">
+              <a:buNone/>
+            </a:pPr>
+            <a:r>
+              <a:rPr lang="en-US" sz="1200" dirty="0">
+                <a:solidFill>
+                  <a:srgbClr val="5A7179"/>
+                </a:solidFill>
+                <a:latin typeface="Calibri" pitchFamily="34" charset="0"/>
+                <a:ea typeface="Calibri" pitchFamily="34" charset="-122"/>
+                <a:cs typeface="Calibri" pitchFamily="34" charset="-120"/>
+              </a:rPr>
+              <a:t>  </a:t>
+            </a:r>
+            <a:endParaRPr lang="en-US" sz="1200" dirty="0"/>
+          </a:p>
+        </p:txBody>
+      </p:sp>
+      <p:sp>
+        <p:nvSpPr>
+          <p:cNvPr id="36" name="Shape 34"/>
+          <p:cNvSpPr/>
+          <p:nvPr/>
+        </p:nvSpPr>
+        <p:spPr>
+          <a:xfrm>
+            <a:off x="6537960" y="4023360"/>
+            <a:ext cx="822960" cy="329184"/>
           </a:xfrm>
           <a:prstGeom prst="roundRect">
             <a:avLst>
@@ -11923,14 +13097,14 @@
       </p:sp>
       <p:sp>
         <p:nvSpPr>
-          <p:cNvPr id="31" name="Text 29"/>
-          <p:cNvSpPr txBox="1"/>
-          <p:nvPr/>
-        </p:nvSpPr>
-        <p:spPr>
-          <a:xfrm>
-            <a:off x="6537960" y="3721608"/>
-            <a:ext cx="960120" cy="329184"/>
+          <p:cNvPr id="37" name="Text 35"/>
+          <p:cNvSpPr txBox="1"/>
+          <p:nvPr/>
+        </p:nvSpPr>
+        <p:spPr>
+          <a:xfrm>
+            <a:off x="6537960" y="4023360"/>
+            <a:ext cx="822960" cy="329184"/>
           </a:xfrm>
           <a:prstGeom prst="rect">
             <a:avLst/>
@@ -11962,30 +13136,30 @@
       </p:sp>
       <p:sp>
         <p:nvSpPr>
-          <p:cNvPr id="32" name="Text 30"/>
-          <p:cNvSpPr txBox="1"/>
-          <p:nvPr/>
-        </p:nvSpPr>
-        <p:spPr>
-          <a:xfrm>
-            <a:off x="7635240" y="3675888"/>
-            <a:ext cx="3931920" cy="420624"/>
-          </a:xfrm>
-          <a:prstGeom prst="rect">
-            <a:avLst/>
-          </a:prstGeom>
-          <a:noFill/>
-          <a:ln/>
-        </p:spPr>
-        <p:txBody>
-          <a:bodyPr wrap="square" lIns="0" tIns="0" rIns="0" bIns="0" rtlCol="0" anchor="ctr"/>
-          <a:lstStyle/>
-          <a:p>
-            <a:pPr indent="0" marL="0">
-              <a:buNone/>
-            </a:pPr>
-            <a:r>
-              <a:rPr lang="en-US" sz="1300" b="1" dirty="0">
+          <p:cNvPr id="38" name="Text 36"/>
+          <p:cNvSpPr txBox="1"/>
+          <p:nvPr/>
+        </p:nvSpPr>
+        <p:spPr>
+          <a:xfrm>
+            <a:off x="7498080" y="3968496"/>
+            <a:ext cx="4069080" cy="438912"/>
+          </a:xfrm>
+          <a:prstGeom prst="rect">
+            <a:avLst/>
+          </a:prstGeom>
+          <a:noFill/>
+          <a:ln/>
+        </p:spPr>
+        <p:txBody>
+          <a:bodyPr wrap="square" lIns="0" tIns="0" rIns="0" bIns="0" rtlCol="0" anchor="ctr"/>
+          <a:lstStyle/>
+          <a:p>
+            <a:pPr indent="0" marL="0">
+              <a:buNone/>
+            </a:pPr>
+            <a:r>
+              <a:rPr lang="en-US" sz="1200" b="1" dirty="0">
                 <a:solidFill>
                   <a:srgbClr val="16323B"/>
                 </a:solidFill>
@@ -11993,67 +13167,200 @@
                 <a:ea typeface="Courier New" pitchFamily="34" charset="-122"/>
                 <a:cs typeface="Courier New" pitchFamily="34" charset="-120"/>
               </a:rPr>
-              <a:t>/todos/1</a:t>
-            </a:r>
+              <a:t>/search/product</a:t>
+            </a:r>
+            <a:pPr indent="0" marL="0">
+              <a:buNone/>
+            </a:pPr>
+            <a:r>
+              <a:rPr lang="en-US" sz="1300" b="1" dirty="0">
+                <a:solidFill>
+                  <a:srgbClr val="E8692E"/>
+                </a:solidFill>
+                <a:latin typeface="Calibri" pitchFamily="34" charset="0"/>
+                <a:ea typeface="Calibri" pitchFamily="34" charset="-122"/>
+                <a:cs typeface="Calibri" pitchFamily="34" charset="-120"/>
+              </a:rPr>
+              <a:t>  →  405</a:t>
+            </a:r>
+            <a:pPr indent="0" marL="0">
+              <a:buNone/>
+            </a:pPr>
+            <a:r>
+              <a:rPr lang="en-US" sz="1200" dirty="0">
+                <a:solidFill>
+                  <a:srgbClr val="5A7179"/>
+                </a:solidFill>
+                <a:latin typeface="Calibri" pitchFamily="34" charset="0"/>
+                <a:ea typeface="Calibri" pitchFamily="34" charset="-122"/>
+                <a:cs typeface="Calibri" pitchFamily="34" charset="-120"/>
+              </a:rPr>
+              <a:t>  </a:t>
+            </a:r>
+            <a:endParaRPr lang="en-US" sz="1200" dirty="0"/>
+          </a:p>
+        </p:txBody>
+      </p:sp>
+      <p:sp>
+        <p:nvSpPr>
+          <p:cNvPr id="39" name="Shape 37"/>
+          <p:cNvSpPr/>
+          <p:nvPr/>
+        </p:nvSpPr>
+        <p:spPr>
+          <a:xfrm>
+            <a:off x="6537960" y="4572000"/>
+            <a:ext cx="822960" cy="329184"/>
+          </a:xfrm>
+          <a:prstGeom prst="roundRect">
+            <a:avLst>
+              <a:gd name="adj" fmla="val 50000"/>
+            </a:avLst>
+          </a:prstGeom>
+          <a:solidFill>
+            <a:srgbClr val="2BA79A"/>
+          </a:solidFill>
+          <a:ln w="12700">
+            <a:solidFill>
+              <a:srgbClr val="2BA79A"/>
+            </a:solidFill>
+            <a:prstDash val="solid"/>
+          </a:ln>
+        </p:spPr>
+      </p:sp>
+      <p:sp>
+        <p:nvSpPr>
+          <p:cNvPr id="40" name="Text 38"/>
+          <p:cNvSpPr txBox="1"/>
+          <p:nvPr/>
+        </p:nvSpPr>
+        <p:spPr>
+          <a:xfrm>
+            <a:off x="6537960" y="4572000"/>
+            <a:ext cx="822960" cy="329184"/>
+          </a:xfrm>
+          <a:prstGeom prst="rect">
+            <a:avLst/>
+          </a:prstGeom>
+          <a:noFill/>
+          <a:ln/>
+        </p:spPr>
+        <p:txBody>
+          <a:bodyPr wrap="square" lIns="0" tIns="0" rIns="0" bIns="0" rtlCol="0" anchor="ctr"/>
+          <a:lstStyle/>
+          <a:p>
+            <a:pPr algn="ctr" indent="0" marL="0">
+              <a:buNone/>
+            </a:pPr>
+            <a:r>
+              <a:rPr lang="en-US" sz="1200" b="1" dirty="0">
+                <a:solidFill>
+                  <a:srgbClr val="FFFFFF"/>
+                </a:solidFill>
+                <a:latin typeface="Calibri" pitchFamily="34" charset="0"/>
+                <a:ea typeface="Calibri" pitchFamily="34" charset="-122"/>
+                <a:cs typeface="Calibri" pitchFamily="34" charset="-120"/>
+              </a:rPr>
+              <a:t>GET</a:t>
+            </a:r>
+            <a:endParaRPr lang="en-US" sz="1200" dirty="0"/>
+          </a:p>
+        </p:txBody>
+      </p:sp>
+      <p:sp>
+        <p:nvSpPr>
+          <p:cNvPr id="41" name="Text 39"/>
+          <p:cNvSpPr txBox="1"/>
+          <p:nvPr/>
+        </p:nvSpPr>
+        <p:spPr>
+          <a:xfrm>
+            <a:off x="7498080" y="4517136"/>
+            <a:ext cx="4069080" cy="438912"/>
+          </a:xfrm>
+          <a:prstGeom prst="rect">
+            <a:avLst/>
+          </a:prstGeom>
+          <a:noFill/>
+          <a:ln/>
+        </p:spPr>
+        <p:txBody>
+          <a:bodyPr wrap="square" lIns="0" tIns="0" rIns="0" bIns="0" rtlCol="0" anchor="ctr"/>
+          <a:lstStyle/>
+          <a:p>
+            <a:pPr indent="0" marL="0">
+              <a:buNone/>
+            </a:pPr>
+            <a:r>
+              <a:rPr lang="en-US" sz="1200" b="1" dirty="0">
+                <a:solidFill>
+                  <a:srgbClr val="16323B"/>
+                </a:solidFill>
+                <a:latin typeface="Courier New" pitchFamily="34" charset="0"/>
+                <a:ea typeface="Courier New" pitchFamily="34" charset="-122"/>
+                <a:cs typeface="Courier New" pitchFamily="34" charset="-120"/>
+              </a:rPr>
+              <a:t>customerCityId=99999</a:t>
+            </a:r>
+            <a:pPr indent="0" marL="0">
+              <a:buNone/>
+            </a:pPr>
+            <a:r>
+              <a:rPr lang="en-US" sz="1300" b="1" dirty="0">
+                <a:solidFill>
+                  <a:srgbClr val="E8692E"/>
+                </a:solidFill>
+                <a:latin typeface="Calibri" pitchFamily="34" charset="0"/>
+                <a:ea typeface="Calibri" pitchFamily="34" charset="-122"/>
+                <a:cs typeface="Calibri" pitchFamily="34" charset="-120"/>
+              </a:rPr>
+              <a:t>  →  500</a:t>
+            </a:r>
+            <a:pPr indent="0" marL="0">
+              <a:buNone/>
+            </a:pPr>
+            <a:r>
+              <a:rPr lang="en-US" sz="1200" dirty="0">
+                <a:solidFill>
+                  <a:srgbClr val="5A7179"/>
+                </a:solidFill>
+                <a:latin typeface="Calibri" pitchFamily="34" charset="0"/>
+                <a:ea typeface="Calibri" pitchFamily="34" charset="-122"/>
+                <a:cs typeface="Calibri" pitchFamily="34" charset="-120"/>
+              </a:rPr>
+              <a:t>  BR-003</a:t>
+            </a:r>
+            <a:endParaRPr lang="en-US" sz="1200" dirty="0"/>
+          </a:p>
+        </p:txBody>
+      </p:sp>
+      <p:sp>
+        <p:nvSpPr>
+          <p:cNvPr id="42" name="Text 40"/>
+          <p:cNvSpPr txBox="1"/>
+          <p:nvPr/>
+        </p:nvSpPr>
+        <p:spPr>
+          <a:xfrm>
+            <a:off x="548640" y="5943600"/>
+            <a:ext cx="11064240" cy="411480"/>
+          </a:xfrm>
+          <a:prstGeom prst="rect">
+            <a:avLst/>
+          </a:prstGeom>
+          <a:noFill/>
+          <a:ln/>
+        </p:spPr>
+        <p:txBody>
+          <a:bodyPr wrap="square" lIns="0" tIns="0" rIns="0" bIns="0" rtlCol="0" anchor="ctr"/>
+          <a:lstStyle/>
+          <a:p>
             <a:pPr indent="0" marL="0">
               <a:buNone/>
             </a:pPr>
             <a:r>
               <a:rPr lang="en-US" sz="1400" b="1" dirty="0">
                 <a:solidFill>
-                  <a:srgbClr val="E8692E"/>
-                </a:solidFill>
-                <a:latin typeface="Calibri" pitchFamily="34" charset="0"/>
-                <a:ea typeface="Calibri" pitchFamily="34" charset="-122"/>
-                <a:cs typeface="Calibri" pitchFamily="34" charset="-120"/>
-              </a:rPr>
-              <a:t>  →  404</a:t>
-            </a:r>
-            <a:pPr indent="0" marL="0">
-              <a:buNone/>
-            </a:pPr>
-            <a:r>
-              <a:rPr lang="en-US" sz="1300" dirty="0">
-                <a:solidFill>
-                  <a:srgbClr val="5A7179"/>
-                </a:solidFill>
-                <a:latin typeface="Calibri" pitchFamily="34" charset="0"/>
-                <a:ea typeface="Calibri" pitchFamily="34" charset="-122"/>
-                <a:cs typeface="Calibri" pitchFamily="34" charset="-120"/>
-              </a:rPr>
-              <a:t>   метод не тот</a:t>
-            </a:r>
-            <a:endParaRPr lang="en-US" sz="1300" dirty="0"/>
-          </a:p>
-        </p:txBody>
-      </p:sp>
-      <p:sp>
-        <p:nvSpPr>
-          <p:cNvPr id="33" name="Text 31"/>
-          <p:cNvSpPr txBox="1"/>
-          <p:nvPr/>
-        </p:nvSpPr>
-        <p:spPr>
-          <a:xfrm>
-            <a:off x="548640" y="5852160"/>
-            <a:ext cx="11064240" cy="411480"/>
-          </a:xfrm>
-          <a:prstGeom prst="rect">
-            <a:avLst/>
-          </a:prstGeom>
-          <a:noFill/>
-          <a:ln/>
-        </p:spPr>
-        <p:txBody>
-          <a:bodyPr wrap="square" lIns="0" tIns="0" rIns="0" bIns="0" rtlCol="0" anchor="ctr"/>
-          <a:lstStyle/>
-          <a:p>
-            <a:pPr indent="0" marL="0">
-              <a:buNone/>
-            </a:pPr>
-            <a:r>
-              <a:rPr lang="en-US" sz="1400" b="1" dirty="0">
-                <a:solidFill>
                   <a:srgbClr val="0B3C49"/>
                 </a:solidFill>
                 <a:latin typeface="Calibri" pitchFamily="34" charset="0"/>
@@ -12074,7 +13381,7 @@
                 <a:ea typeface="Calibri" pitchFamily="34" charset="-122"/>
                 <a:cs typeface="Calibri" pitchFamily="34" charset="-120"/>
               </a:rPr>
-              <a:t>переменные base_url и token, проверка статуса в каждом запросе, id созданной задачи сохраняется в переменную коллекции</a:t>
+              <a:t>base_url и token во всех запросах, токен получает первый запрос, id найденного товара сохраняется в product_id</a:t>
             </a:r>
             <a:endParaRPr lang="en-US" sz="1400" dirty="0"/>
           </a:p>
@@ -13247,8 +14554,8 @@
         </p:nvSpPr>
         <p:spPr>
           <a:xfrm>
-            <a:off x="548640" y="2286000"/>
-            <a:ext cx="5760720" cy="3566160"/>
+            <a:off x="548640" y="2240280"/>
+            <a:ext cx="5852160" cy="3749040"/>
           </a:xfrm>
           <a:prstGeom prst="rect">
             <a:avLst/>
@@ -13262,13 +14569,13 @@
           <a:p>
             <a:pPr marL="342900" indent="-342900">
               <a:spcAft>
-                <a:spcPts val="900"/>
+                <a:spcPts val="700"/>
               </a:spcAft>
               <a:buSzPct val="100000"/>
               <a:buChar char="•"/>
             </a:pPr>
             <a:r>
-              <a:rPr lang="en-US" sz="1600" dirty="0">
+              <a:rPr lang="en-US" sz="1500" dirty="0">
                 <a:solidFill>
                   <a:srgbClr val="16323B"/>
                 </a:solidFill>
@@ -13278,18 +14585,18 @@
               </a:rPr>
               <a:t>Никаких time.sleep(): только явные ожидания Playwright</a:t>
             </a:r>
-            <a:endParaRPr lang="en-US" sz="1600" dirty="0"/>
+            <a:endParaRPr lang="en-US" sz="1500" dirty="0"/>
           </a:p>
           <a:p>
             <a:pPr marL="342900" indent="-342900">
               <a:spcAft>
-                <a:spcPts val="900"/>
+                <a:spcPts val="700"/>
               </a:spcAft>
               <a:buSzPct val="100000"/>
               <a:buChar char="•"/>
             </a:pPr>
             <a:r>
-              <a:rPr lang="en-US" sz="1600" dirty="0">
+              <a:rPr lang="en-US" sz="1500" dirty="0">
                 <a:solidFill>
                   <a:srgbClr val="16323B"/>
                 </a:solidFill>
@@ -13299,18 +14606,18 @@
               </a:rPr>
               <a:t>У каждого UI-теста свой контекст браузера, тесты не зависят друг от друга</a:t>
             </a:r>
-            <a:endParaRPr lang="en-US" sz="1600" dirty="0"/>
+            <a:endParaRPr lang="en-US" sz="1500" dirty="0"/>
           </a:p>
           <a:p>
             <a:pPr marL="342900" indent="-342900">
               <a:spcAft>
-                <a:spcPts val="900"/>
+                <a:spcPts val="700"/>
               </a:spcAft>
               <a:buSzPct val="100000"/>
               <a:buChar char="•"/>
             </a:pPr>
             <a:r>
-              <a:rPr lang="en-US" sz="1600" dirty="0">
+              <a:rPr lang="en-US" sz="1500" dirty="0">
                 <a:solidFill>
                   <a:srgbClr val="16323B"/>
                 </a:solidFill>
@@ -13320,18 +14627,18 @@
               </a:rPr>
               <a:t>Аннотации типов на всех функциях, flake8 без ошибок</a:t>
             </a:r>
-            <a:endParaRPr lang="en-US" sz="1600" dirty="0"/>
+            <a:endParaRPr lang="en-US" sz="1500" dirty="0"/>
           </a:p>
           <a:p>
             <a:pPr marL="342900" indent="-342900">
               <a:spcAft>
-                <a:spcPts val="900"/>
+                <a:spcPts val="700"/>
               </a:spcAft>
               <a:buSzPct val="100000"/>
               <a:buChar char="•"/>
             </a:pPr>
             <a:r>
-              <a:rPr lang="en-US" sz="1600" dirty="0">
+              <a:rPr lang="en-US" sz="1500" dirty="0">
                 <a:solidFill>
                   <a:srgbClr val="16323B"/>
                 </a:solidFill>
@@ -13341,18 +14648,18 @@
               </a:rPr>
               <a:t>Адреса и тестовые данные вынесены в config.py</a:t>
             </a:r>
-            <a:endParaRPr lang="en-US" sz="1600" dirty="0"/>
+            <a:endParaRPr lang="en-US" sz="1500" dirty="0"/>
           </a:p>
           <a:p>
             <a:pPr marL="342900" indent="-342900">
               <a:spcAft>
-                <a:spcPts val="900"/>
+                <a:spcPts val="700"/>
               </a:spcAft>
               <a:buSzPct val="100000"/>
               <a:buChar char="•"/>
             </a:pPr>
             <a:r>
-              <a:rPr lang="en-US" sz="1600" dirty="0">
+              <a:rPr lang="en-US" sz="1500" dirty="0">
                 <a:solidFill>
                   <a:srgbClr val="16323B"/>
                 </a:solidFill>
@@ -13360,20 +14667,20 @@
                 <a:ea typeface="Calibri" pitchFamily="34" charset="-122"/>
                 <a:cs typeface="Calibri" pitchFamily="34" charset="-120"/>
               </a:rPr>
-              <a:t>Три режима запуска: все тесты, -m ui, -m api</a:t>
-            </a:r>
-            <a:endParaRPr lang="en-US" sz="1600" dirty="0"/>
+              <a:t>API-тесты сами получают анонимный токен (фикстура api_token)</a:t>
+            </a:r>
+            <a:endParaRPr lang="en-US" sz="1500" dirty="0"/>
           </a:p>
           <a:p>
             <a:pPr marL="342900" indent="-342900">
               <a:spcAft>
-                <a:spcPts val="900"/>
+                <a:spcPts val="700"/>
               </a:spcAft>
               <a:buSzPct val="100000"/>
               <a:buChar char="•"/>
             </a:pPr>
             <a:r>
-              <a:rPr lang="en-US" sz="1600" dirty="0">
+              <a:rPr lang="en-US" sz="1500" dirty="0">
                 <a:solidFill>
                   <a:srgbClr val="16323B"/>
                 </a:solidFill>
@@ -13381,9 +14688,30 @@
                 <a:ea typeface="Calibri" pitchFamily="34" charset="-122"/>
                 <a:cs typeface="Calibri" pitchFamily="34" charset="-120"/>
               </a:rPr>
+              <a:t>Три режима запуска: все тесты, -m ui, -m api</a:t>
+            </a:r>
+            <a:endParaRPr lang="en-US" sz="1500" dirty="0"/>
+          </a:p>
+          <a:p>
+            <a:pPr marL="342900" indent="-342900">
+              <a:spcAft>
+                <a:spcPts val="700"/>
+              </a:spcAft>
+              <a:buSzPct val="100000"/>
+              <a:buChar char="•"/>
+            </a:pPr>
+            <a:r>
+              <a:rPr lang="en-US" sz="1500" dirty="0">
+                <a:solidFill>
+                  <a:srgbClr val="16323B"/>
+                </a:solidFill>
+                <a:latin typeface="Calibri" pitchFamily="34" charset="0"/>
+                <a:ea typeface="Calibri" pitchFamily="34" charset="-122"/>
+                <a:cs typeface="Calibri" pitchFamily="34" charset="-120"/>
+              </a:rPr>
               <a:t>В каждом тесте allure.title, allure.story и шаги allure.step</a:t>
             </a:r>
-            <a:endParaRPr lang="en-US" sz="1600" dirty="0"/>
+            <a:endParaRPr lang="en-US" sz="1500" dirty="0"/>
           </a:p>
         </p:txBody>
       </p:sp>
@@ -13561,7 +14889,7 @@
                 <a:ea typeface="Courier New" pitchFamily="34" charset="-122"/>
                 <a:cs typeface="Courier New" pitchFamily="34" charset="-120"/>
               </a:rPr>
-              <a:t>├── tests/api/     8 тестов</a:t>
+              <a:t>├── tests/api/     11 тестов</a:t>
             </a:r>
             <a:endParaRPr lang="en-US" sz="1400" dirty="0"/>
           </a:p>
